--- a/presentations/Day 4 - Classification Data Preparation and Unsupervised Learning/4_unsupervised_learning_discovery.pptx
+++ b/presentations/Day 4 - Classification Data Preparation and Unsupervised Learning/4_unsupervised_learning_discovery.pptx
@@ -5,7 +5,7 @@
     <p:sldMasterId id="2147483648" r:id="rId1"/>
   </p:sldMasterIdLst>
   <p:notesMasterIdLst>
-    <p:notesMasterId r:id="rId18"/>
+    <p:notesMasterId r:id="rId17"/>
   </p:notesMasterIdLst>
   <p:sldIdLst>
     <p:sldId id="256" r:id="rId2"/>
@@ -21,9 +21,8 @@
     <p:sldId id="266" r:id="rId12"/>
     <p:sldId id="267" r:id="rId13"/>
     <p:sldId id="268" r:id="rId14"/>
-    <p:sldId id="269" r:id="rId15"/>
-    <p:sldId id="270" r:id="rId16"/>
-    <p:sldId id="271" r:id="rId17"/>
+    <p:sldId id="270" r:id="rId15"/>
+    <p:sldId id="271" r:id="rId16"/>
   </p:sldIdLst>
   <p:sldSz cx="12192000" cy="6858000"/>
   <p:notesSz cx="6858000" cy="12192000"/>
@@ -840,90 +839,6 @@
 </p:notes>
 </file>
 
-<file path=ppt/notesSlides/notesSlide16.xml><?xml version="1.0" encoding="utf-8"?>
-<p:notes xmlns:a="http://schemas.openxmlformats.org/drawingml/2006/main" xmlns:r="http://schemas.openxmlformats.org/officeDocument/2006/relationships" xmlns:p="http://schemas.openxmlformats.org/presentationml/2006/main">
-  <p:cSld>
-    <p:spTree>
-      <p:nvGrpSpPr>
-        <p:cNvPr id="1" name=""/>
-        <p:cNvGrpSpPr/>
-        <p:nvPr/>
-      </p:nvGrpSpPr>
-      <p:grpSpPr>
-        <a:xfrm>
-          <a:off x="0" y="0"/>
-          <a:ext cx="0" cy="0"/>
-          <a:chOff x="0" y="0"/>
-          <a:chExt cx="0" cy="0"/>
-        </a:xfrm>
-      </p:grpSpPr>
-      <p:sp>
-        <p:nvSpPr>
-          <p:cNvPr id="2" name="Slide Image Placeholder 1"/>
-          <p:cNvSpPr>
-            <a:spLocks noGrp="1" noRot="1" noChangeAspect="1"/>
-          </p:cNvSpPr>
-          <p:nvPr>
-            <p:ph type="sldImg"/>
-          </p:nvPr>
-        </p:nvSpPr>
-        <p:spPr/>
-      </p:sp>
-      <p:sp>
-        <p:nvSpPr>
-          <p:cNvPr id="3" name="Notes Placeholder 2"/>
-          <p:cNvSpPr>
-            <a:spLocks noGrp="1"/>
-          </p:cNvSpPr>
-          <p:nvPr>
-            <p:ph type="body" idx="1"/>
-          </p:nvPr>
-        </p:nvSpPr>
-        <p:spPr/>
-        <p:txBody>
-          <a:bodyPr/>
-          <a:lstStyle/>
-          <a:p>
-            <a:endParaRPr lang="en-US" dirty="0"/>
-          </a:p>
-        </p:txBody>
-      </p:sp>
-      <p:sp>
-        <p:nvSpPr>
-          <p:cNvPr id="4" name="Slide Number Placeholder 3"/>
-          <p:cNvSpPr>
-            <a:spLocks noGrp="1"/>
-          </p:cNvSpPr>
-          <p:nvPr>
-            <p:ph type="sldNum" sz="quarter" idx="10"/>
-          </p:nvPr>
-        </p:nvSpPr>
-        <p:spPr/>
-        <p:txBody>
-          <a:bodyPr/>
-          <a:lstStyle/>
-          <a:p>
-            <a:fld id="{F7021451-1387-4CA6-816F-3879F97B5CBC}" type="slidenum">
-              <a:rPr lang="en-US"/>
-              <a:t>16</a:t>
-            </a:fld>
-            <a:endParaRPr lang="en-US"/>
-          </a:p>
-        </p:txBody>
-      </p:sp>
-    </p:spTree>
-    <p:extLst>
-      <p:ext uri="{BB962C8B-B14F-4D97-AF65-F5344CB8AC3E}">
-        <p14:creationId xmlns:p14="http://schemas.microsoft.com/office/powerpoint/2010/main" val="1024086991"/>
-      </p:ext>
-    </p:extLst>
-  </p:cSld>
-  <p:clrMapOvr>
-    <a:masterClrMapping/>
-  </p:clrMapOvr>
-</p:notes>
-</file>
-
 <file path=ppt/notesSlides/notesSlide2.xml><?xml version="1.0" encoding="utf-8"?>
 <p:notes xmlns:a="http://schemas.openxmlformats.org/drawingml/2006/main" xmlns:r="http://schemas.openxmlformats.org/officeDocument/2006/relationships" xmlns:p="http://schemas.openxmlformats.org/presentationml/2006/main">
   <p:cSld>
@@ -1618,6 +1533,36 @@
           <a:chExt cx="0" cy="0"/>
         </a:xfrm>
       </p:grpSpPr>
+      <p:pic>
+        <p:nvPicPr>
+          <p:cNvPr id="3" name="Picture 2" descr="NC State Engineering -- ANS / Conferences / 2021 Student Conference">
+            <a:extLst>
+              <a:ext uri="{FF2B5EF4-FFF2-40B4-BE49-F238E27FC236}">
+                <a16:creationId xmlns:a16="http://schemas.microsoft.com/office/drawing/2014/main" id="{8F3784AA-2818-E7AF-6E6A-BD6117BEBCF5}"/>
+              </a:ext>
+            </a:extLst>
+          </p:cNvPr>
+          <p:cNvPicPr>
+            <a:picLocks noChangeAspect="1"/>
+          </p:cNvPicPr>
+          <p:nvPr userDrawn="1"/>
+        </p:nvPicPr>
+        <p:blipFill>
+          <a:blip r:embed="rId2"/>
+          <a:stretch>
+            <a:fillRect/>
+          </a:stretch>
+        </p:blipFill>
+        <p:spPr>
+          <a:xfrm>
+            <a:off x="9176537" y="334371"/>
+            <a:ext cx="1551223" cy="432403"/>
+          </a:xfrm>
+          <a:prstGeom prst="rect">
+            <a:avLst/>
+          </a:prstGeom>
+        </p:spPr>
+      </p:pic>
     </p:spTree>
   </p:cSld>
   <p:clrMapOvr>
@@ -2613,14 +2558,14 @@
               <a:buNone/>
             </a:pPr>
             <a:r>
-              <a:rPr lang="en-US" sz="550" b="1" dirty="0">
+              <a:rPr lang="en-US" sz="1200" b="1" dirty="0">
                 <a:solidFill>
                   <a:srgbClr val="555555"/>
                 </a:solidFill>
               </a:rPr>
               <a:t>APPLIED AI DESIGN WORKSHOP</a:t>
             </a:r>
-            <a:endParaRPr lang="en-US" sz="550" dirty="0"/>
+            <a:endParaRPr lang="en-US" sz="1200" dirty="0"/>
           </a:p>
         </p:txBody>
       </p:sp>
@@ -2649,14 +2594,14 @@
               <a:buNone/>
             </a:pPr>
             <a:r>
-              <a:rPr lang="en-US" sz="550" dirty="0">
+              <a:rPr lang="en-US" sz="1200" dirty="0">
                 <a:solidFill>
                   <a:srgbClr val="555555"/>
                 </a:solidFill>
               </a:rPr>
               <a:t>Session 4</a:t>
             </a:r>
-            <a:endParaRPr lang="en-US" sz="550" dirty="0"/>
+            <a:endParaRPr lang="en-US" sz="1200" dirty="0"/>
           </a:p>
         </p:txBody>
       </p:sp>
@@ -2723,14 +2668,14 @@
               <a:buNone/>
             </a:pPr>
             <a:r>
-              <a:rPr lang="en-US" sz="800" dirty="0">
+              <a:rPr lang="en-US" sz="1200" dirty="0">
                 <a:solidFill>
                   <a:srgbClr val="333333"/>
                 </a:solidFill>
               </a:rPr>
               <a:t>Principal component analysis projects high-dimensional data into fewer dimensions.</a:t>
             </a:r>
-            <a:endParaRPr lang="en-US" sz="800" dirty="0"/>
+            <a:endParaRPr lang="en-US" sz="1200" dirty="0"/>
           </a:p>
         </p:txBody>
       </p:sp>
@@ -2833,14 +2778,14 @@
               <a:buNone/>
             </a:pPr>
             <a:r>
-              <a:rPr lang="en-US" sz="850" dirty="0">
+              <a:rPr lang="en-US" sz="1200" dirty="0">
                 <a:solidFill>
                   <a:srgbClr val="111111"/>
                 </a:solidFill>
               </a:rPr>
               <a:t>Finds directions of maximum variation and creates new component axes.</a:t>
             </a:r>
-            <a:endParaRPr lang="en-US" sz="850" dirty="0"/>
+            <a:endParaRPr lang="en-US" sz="1200" dirty="0"/>
           </a:p>
         </p:txBody>
       </p:sp>
@@ -2943,14 +2888,14 @@
               <a:buNone/>
             </a:pPr>
             <a:r>
-              <a:rPr lang="en-US" sz="850" dirty="0">
+              <a:rPr lang="en-US" sz="1200" dirty="0">
                 <a:solidFill>
                   <a:srgbClr val="111111"/>
                 </a:solidFill>
               </a:rPr>
               <a:t>Visualize clusters, detect redundancy, and summarize many correlated features.</a:t>
             </a:r>
-            <a:endParaRPr lang="en-US" sz="850" dirty="0"/>
+            <a:endParaRPr lang="en-US" sz="1200" dirty="0"/>
           </a:p>
         </p:txBody>
       </p:sp>
@@ -3053,14 +2998,14 @@
               <a:buNone/>
             </a:pPr>
             <a:r>
-              <a:rPr lang="en-US" sz="850" dirty="0">
+              <a:rPr lang="en-US" sz="1200" dirty="0">
                 <a:solidFill>
                   <a:srgbClr val="111111"/>
                 </a:solidFill>
               </a:rPr>
               <a:t>PCA components are combinations of variables, not original physical quantities.</a:t>
             </a:r>
-            <a:endParaRPr lang="en-US" sz="850" dirty="0"/>
+            <a:endParaRPr lang="en-US" sz="1200" dirty="0"/>
           </a:p>
         </p:txBody>
       </p:sp>
@@ -3123,14 +3068,14 @@
               <a:buNone/>
             </a:pPr>
             <a:r>
-              <a:rPr lang="en-US" sz="800" b="1" dirty="0">
+              <a:rPr lang="en-US" sz="1200" b="1" dirty="0">
                 <a:solidFill>
                   <a:srgbClr val="111111"/>
                 </a:solidFill>
               </a:rPr>
               <a:t>Component</a:t>
             </a:r>
-            <a:endParaRPr lang="en-US" sz="800" dirty="0"/>
+            <a:endParaRPr lang="en-US" sz="1200" dirty="0"/>
           </a:p>
         </p:txBody>
       </p:sp>
@@ -3193,14 +3138,14 @@
               <a:buNone/>
             </a:pPr>
             <a:r>
-              <a:rPr lang="en-US" sz="800" b="1" dirty="0">
+              <a:rPr lang="en-US" sz="1200" b="1" dirty="0">
                 <a:solidFill>
                   <a:srgbClr val="111111"/>
                 </a:solidFill>
               </a:rPr>
               <a:t>Interpretation question</a:t>
             </a:r>
-            <a:endParaRPr lang="en-US" sz="800" dirty="0"/>
+            <a:endParaRPr lang="en-US" sz="1200" dirty="0"/>
           </a:p>
         </p:txBody>
       </p:sp>
@@ -3265,14 +3210,14 @@
               <a:buNone/>
             </a:pPr>
             <a:r>
-              <a:rPr lang="en-US" sz="800" b="1" dirty="0">
+              <a:rPr lang="en-US" sz="1200" b="1" dirty="0">
                 <a:solidFill>
                   <a:srgbClr val="CC0000"/>
                 </a:solidFill>
               </a:rPr>
               <a:t>PC1</a:t>
             </a:r>
-            <a:endParaRPr lang="en-US" sz="800" dirty="0"/>
+            <a:endParaRPr lang="en-US" sz="1200" dirty="0"/>
           </a:p>
         </p:txBody>
       </p:sp>
@@ -3337,14 +3282,14 @@
               <a:buNone/>
             </a:pPr>
             <a:r>
-              <a:rPr lang="en-US" sz="800" dirty="0">
+              <a:rPr lang="en-US" sz="1200" dirty="0">
                 <a:solidFill>
                   <a:srgbClr val="111111"/>
                 </a:solidFill>
               </a:rPr>
               <a:t>Which variables load strongly and define the main direction of variation?</a:t>
             </a:r>
-            <a:endParaRPr lang="en-US" sz="800" dirty="0"/>
+            <a:endParaRPr lang="en-US" sz="1200" dirty="0"/>
           </a:p>
         </p:txBody>
       </p:sp>
@@ -3409,14 +3354,14 @@
               <a:buNone/>
             </a:pPr>
             <a:r>
-              <a:rPr lang="en-US" sz="800" b="1" dirty="0">
+              <a:rPr lang="en-US" sz="1200" b="1" dirty="0">
                 <a:solidFill>
                   <a:srgbClr val="CC0000"/>
                 </a:solidFill>
               </a:rPr>
               <a:t>PC2</a:t>
             </a:r>
-            <a:endParaRPr lang="en-US" sz="800" dirty="0"/>
+            <a:endParaRPr lang="en-US" sz="1200" dirty="0"/>
           </a:p>
         </p:txBody>
       </p:sp>
@@ -3481,14 +3426,14 @@
               <a:buNone/>
             </a:pPr>
             <a:r>
-              <a:rPr lang="en-US" sz="800" dirty="0">
+              <a:rPr lang="en-US" sz="1200" dirty="0">
                 <a:solidFill>
                   <a:srgbClr val="111111"/>
                 </a:solidFill>
               </a:rPr>
               <a:t>What additional variation is captured beyond PC1?</a:t>
             </a:r>
-            <a:endParaRPr lang="en-US" sz="800" dirty="0"/>
+            <a:endParaRPr lang="en-US" sz="1200" dirty="0"/>
           </a:p>
         </p:txBody>
       </p:sp>
@@ -3553,14 +3498,14 @@
               <a:buNone/>
             </a:pPr>
             <a:r>
-              <a:rPr lang="en-US" sz="800" b="1" dirty="0">
+              <a:rPr lang="en-US" sz="1200" b="1" dirty="0">
                 <a:solidFill>
                   <a:srgbClr val="CC0000"/>
                 </a:solidFill>
               </a:rPr>
               <a:t>Explained variance</a:t>
             </a:r>
-            <a:endParaRPr lang="en-US" sz="800" dirty="0"/>
+            <a:endParaRPr lang="en-US" sz="1200" dirty="0"/>
           </a:p>
         </p:txBody>
       </p:sp>
@@ -3625,14 +3570,14 @@
               <a:buNone/>
             </a:pPr>
             <a:r>
-              <a:rPr lang="en-US" sz="800" dirty="0">
+              <a:rPr lang="en-US" sz="1200" dirty="0">
                 <a:solidFill>
                   <a:srgbClr val="111111"/>
                 </a:solidFill>
               </a:rPr>
               <a:t>How much of the original variation is retained?</a:t>
             </a:r>
-            <a:endParaRPr lang="en-US" sz="800" dirty="0"/>
+            <a:endParaRPr lang="en-US" sz="1200" dirty="0"/>
           </a:p>
         </p:txBody>
       </p:sp>
@@ -3689,7 +3634,7 @@
         </p:spPr>
         <p:txBody>
           <a:bodyPr wrap="square" lIns="0" tIns="0" rIns="0" bIns="0" rtlCol="0" anchor="ctr">
-            <a:normAutofit/>
+            <a:noAutofit/>
           </a:bodyPr>
           <a:lstStyle/>
           <a:p>
@@ -3697,14 +3642,14 @@
               <a:buNone/>
             </a:pPr>
             <a:r>
-              <a:rPr lang="en-US" sz="820" b="1" dirty="0">
+              <a:rPr lang="en-US" sz="1200" b="1" dirty="0">
                 <a:solidFill>
                   <a:srgbClr val="CC0000"/>
                 </a:solidFill>
               </a:rPr>
               <a:t>PCA is a lens for exploration, not a guarantee of meaningful clusters.</a:t>
             </a:r>
-            <a:endParaRPr lang="en-US" sz="820" dirty="0"/>
+            <a:endParaRPr lang="en-US" sz="1200" dirty="0"/>
           </a:p>
         </p:txBody>
       </p:sp>
@@ -3798,14 +3743,14 @@
               <a:buNone/>
             </a:pPr>
             <a:r>
-              <a:rPr lang="en-US" sz="550" b="1" dirty="0">
+              <a:rPr lang="en-US" sz="1200" b="1" dirty="0">
                 <a:solidFill>
                   <a:srgbClr val="555555"/>
                 </a:solidFill>
               </a:rPr>
               <a:t>APPLIED AI DESIGN WORKSHOP</a:t>
             </a:r>
-            <a:endParaRPr lang="en-US" sz="550" dirty="0"/>
+            <a:endParaRPr lang="en-US" sz="1200" dirty="0"/>
           </a:p>
         </p:txBody>
       </p:sp>
@@ -3834,14 +3779,14 @@
               <a:buNone/>
             </a:pPr>
             <a:r>
-              <a:rPr lang="en-US" sz="550" dirty="0">
+              <a:rPr lang="en-US" sz="1200" dirty="0">
                 <a:solidFill>
                   <a:srgbClr val="555555"/>
                 </a:solidFill>
               </a:rPr>
               <a:t>Session 4</a:t>
             </a:r>
-            <a:endParaRPr lang="en-US" sz="550" dirty="0"/>
+            <a:endParaRPr lang="en-US" sz="1200" dirty="0"/>
           </a:p>
         </p:txBody>
       </p:sp>
@@ -3908,14 +3853,14 @@
               <a:buNone/>
             </a:pPr>
             <a:r>
-              <a:rPr lang="en-US" sz="800" dirty="0">
+              <a:rPr lang="en-US" sz="1200" dirty="0">
                 <a:solidFill>
                   <a:srgbClr val="333333"/>
                 </a:solidFill>
               </a:rPr>
               <a:t>There is no single accuracy score because there is no target label.</a:t>
             </a:r>
-            <a:endParaRPr lang="en-US" sz="800" dirty="0"/>
+            <a:endParaRPr lang="en-US" sz="1200" dirty="0"/>
           </a:p>
         </p:txBody>
       </p:sp>
@@ -4018,14 +3963,14 @@
               <a:buNone/>
             </a:pPr>
             <a:r>
-              <a:rPr lang="en-US" sz="830" dirty="0">
+              <a:rPr lang="en-US" sz="1200" dirty="0">
                 <a:solidFill>
                   <a:srgbClr val="111111"/>
                 </a:solidFill>
               </a:rPr>
               <a:t>Silhouette score, within-cluster distance, cluster separation. Useful but not enough.</a:t>
             </a:r>
-            <a:endParaRPr lang="en-US" sz="830" dirty="0"/>
+            <a:endParaRPr lang="en-US" sz="1200" dirty="0"/>
           </a:p>
         </p:txBody>
       </p:sp>
@@ -4128,14 +4073,14 @@
               <a:buNone/>
             </a:pPr>
             <a:r>
-              <a:rPr lang="en-US" sz="830" dirty="0">
+              <a:rPr lang="en-US" sz="1200" dirty="0">
                 <a:solidFill>
                   <a:srgbClr val="111111"/>
                 </a:solidFill>
               </a:rPr>
               <a:t>Do clusters persist under new samples, resampling, or small feature changes?</a:t>
             </a:r>
-            <a:endParaRPr lang="en-US" sz="830" dirty="0"/>
+            <a:endParaRPr lang="en-US" sz="1200" dirty="0"/>
           </a:p>
         </p:txBody>
       </p:sp>
@@ -4238,14 +4183,14 @@
               <a:buNone/>
             </a:pPr>
             <a:r>
-              <a:rPr lang="en-US" sz="830" dirty="0">
+              <a:rPr lang="en-US" sz="1200" dirty="0">
                 <a:solidFill>
                   <a:srgbClr val="111111"/>
                 </a:solidFill>
               </a:rPr>
               <a:t>Do clusters align with known mechanisms, regimes, or follow-up measurements?</a:t>
             </a:r>
-            <a:endParaRPr lang="en-US" sz="830" dirty="0"/>
+            <a:endParaRPr lang="en-US" sz="1200" dirty="0"/>
           </a:p>
         </p:txBody>
       </p:sp>
@@ -4348,14 +4293,14 @@
               <a:buNone/>
             </a:pPr>
             <a:r>
-              <a:rPr lang="en-US" sz="900" dirty="0">
+              <a:rPr lang="en-US" sz="1200" dirty="0">
                 <a:solidFill>
                   <a:srgbClr val="111111"/>
                 </a:solidFill>
               </a:rPr>
               <a:t>A useful cluster should lead to a testable explanation or practical action.</a:t>
             </a:r>
-            <a:endParaRPr lang="en-US" sz="900" dirty="0"/>
+            <a:endParaRPr lang="en-US" sz="1200" dirty="0"/>
           </a:p>
         </p:txBody>
       </p:sp>
@@ -4412,7 +4357,7 @@
         </p:spPr>
         <p:txBody>
           <a:bodyPr wrap="square" lIns="0" tIns="0" rIns="0" bIns="0" rtlCol="0" anchor="ctr">
-            <a:normAutofit/>
+            <a:noAutofit/>
           </a:bodyPr>
           <a:lstStyle/>
           <a:p>
@@ -4420,14 +4365,14 @@
               <a:buNone/>
             </a:pPr>
             <a:r>
-              <a:rPr lang="en-US" sz="820" b="1" dirty="0">
+              <a:rPr lang="en-US" sz="1200" b="1" dirty="0">
                 <a:solidFill>
                   <a:srgbClr val="CC0000"/>
                 </a:solidFill>
               </a:rPr>
               <a:t>Validation combines math, visualization, and domain evidence.</a:t>
             </a:r>
-            <a:endParaRPr lang="en-US" sz="820" dirty="0"/>
+            <a:endParaRPr lang="en-US" sz="1200" dirty="0"/>
           </a:p>
         </p:txBody>
       </p:sp>
@@ -4521,14 +4466,14 @@
               <a:buNone/>
             </a:pPr>
             <a:r>
-              <a:rPr lang="en-US" sz="550" b="1" dirty="0">
+              <a:rPr lang="en-US" sz="1200" b="1" dirty="0">
                 <a:solidFill>
                   <a:srgbClr val="555555"/>
                 </a:solidFill>
               </a:rPr>
               <a:t>APPLIED AI DESIGN WORKSHOP</a:t>
             </a:r>
-            <a:endParaRPr lang="en-US" sz="550" dirty="0"/>
+            <a:endParaRPr lang="en-US" sz="1200" dirty="0"/>
           </a:p>
         </p:txBody>
       </p:sp>
@@ -4557,14 +4502,14 @@
               <a:buNone/>
             </a:pPr>
             <a:r>
-              <a:rPr lang="en-US" sz="550" dirty="0">
+              <a:rPr lang="en-US" sz="1200" dirty="0">
                 <a:solidFill>
                   <a:srgbClr val="555555"/>
                 </a:solidFill>
               </a:rPr>
               <a:t>Session 4</a:t>
             </a:r>
-            <a:endParaRPr lang="en-US" sz="550" dirty="0"/>
+            <a:endParaRPr lang="en-US" sz="1200" dirty="0"/>
           </a:p>
         </p:txBody>
       </p:sp>
@@ -4631,14 +4576,14 @@
               <a:buNone/>
             </a:pPr>
             <a:r>
-              <a:rPr lang="en-US" sz="800" dirty="0">
+              <a:rPr lang="en-US" sz="1200" dirty="0">
                 <a:solidFill>
                   <a:srgbClr val="333333"/>
                 </a:solidFill>
               </a:rPr>
               <a:t>Cluster labels such as 0, 1, and 2 are not explanations by themselves.</a:t>
             </a:r>
-            <a:endParaRPr lang="en-US" sz="800" dirty="0"/>
+            <a:endParaRPr lang="en-US" sz="1200" dirty="0"/>
           </a:p>
         </p:txBody>
       </p:sp>
@@ -4701,14 +4646,14 @@
               <a:buNone/>
             </a:pPr>
             <a:r>
-              <a:rPr lang="en-US" sz="790" b="1" dirty="0">
+              <a:rPr lang="en-US" sz="1200" b="1" dirty="0">
                 <a:solidFill>
                   <a:srgbClr val="111111"/>
                 </a:solidFill>
               </a:rPr>
               <a:t>Step</a:t>
             </a:r>
-            <a:endParaRPr lang="en-US" sz="790" dirty="0"/>
+            <a:endParaRPr lang="en-US" sz="1200" dirty="0"/>
           </a:p>
         </p:txBody>
       </p:sp>
@@ -4771,14 +4716,14 @@
               <a:buNone/>
             </a:pPr>
             <a:r>
-              <a:rPr lang="en-US" sz="790" b="1" dirty="0">
+              <a:rPr lang="en-US" sz="1200" b="1" dirty="0">
                 <a:solidFill>
                   <a:srgbClr val="111111"/>
                 </a:solidFill>
               </a:rPr>
               <a:t>Question to ask</a:t>
             </a:r>
-            <a:endParaRPr lang="en-US" sz="790" dirty="0"/>
+            <a:endParaRPr lang="en-US" sz="1200" dirty="0"/>
           </a:p>
         </p:txBody>
       </p:sp>
@@ -4843,14 +4788,14 @@
               <a:buNone/>
             </a:pPr>
             <a:r>
-              <a:rPr lang="en-US" sz="790" b="1" dirty="0">
+              <a:rPr lang="en-US" sz="1200" b="1" dirty="0">
                 <a:solidFill>
                   <a:srgbClr val="CC0000"/>
                 </a:solidFill>
               </a:rPr>
               <a:t>Describe each cluster</a:t>
             </a:r>
-            <a:endParaRPr lang="en-US" sz="790" dirty="0"/>
+            <a:endParaRPr lang="en-US" sz="1200" dirty="0"/>
           </a:p>
         </p:txBody>
       </p:sp>
@@ -4915,14 +4860,14 @@
               <a:buNone/>
             </a:pPr>
             <a:r>
-              <a:rPr lang="en-US" sz="790" dirty="0">
+              <a:rPr lang="en-US" sz="1200" dirty="0">
                 <a:solidFill>
                   <a:srgbClr val="111111"/>
                 </a:solidFill>
               </a:rPr>
               <a:t>What are the average feature values and ranges?</a:t>
             </a:r>
-            <a:endParaRPr lang="en-US" sz="790" dirty="0"/>
+            <a:endParaRPr lang="en-US" sz="1200" dirty="0"/>
           </a:p>
         </p:txBody>
       </p:sp>
@@ -4987,14 +4932,14 @@
               <a:buNone/>
             </a:pPr>
             <a:r>
-              <a:rPr lang="en-US" sz="790" b="1" dirty="0">
+              <a:rPr lang="en-US" sz="1200" b="1" dirty="0">
                 <a:solidFill>
                   <a:srgbClr val="CC0000"/>
                 </a:solidFill>
               </a:rPr>
               <a:t>Compare to metadata</a:t>
             </a:r>
-            <a:endParaRPr lang="en-US" sz="790" dirty="0"/>
+            <a:endParaRPr lang="en-US" sz="1200" dirty="0"/>
           </a:p>
         </p:txBody>
       </p:sp>
@@ -5059,14 +5004,14 @@
               <a:buNone/>
             </a:pPr>
             <a:r>
-              <a:rPr lang="en-US" sz="790" dirty="0">
+              <a:rPr lang="en-US" sz="1200" dirty="0">
                 <a:solidFill>
                   <a:srgbClr val="111111"/>
                 </a:solidFill>
               </a:rPr>
               <a:t>Do clusters differ by machine, batch, cohort, material, or time period?</a:t>
             </a:r>
-            <a:endParaRPr lang="en-US" sz="790" dirty="0"/>
+            <a:endParaRPr lang="en-US" sz="1200" dirty="0"/>
           </a:p>
         </p:txBody>
       </p:sp>
@@ -5131,14 +5076,14 @@
               <a:buNone/>
             </a:pPr>
             <a:r>
-              <a:rPr lang="en-US" sz="790" b="1" dirty="0">
+              <a:rPr lang="en-US" sz="1200" b="1" dirty="0">
                 <a:solidFill>
                   <a:srgbClr val="CC0000"/>
                 </a:solidFill>
               </a:rPr>
               <a:t>Inspect examples</a:t>
             </a:r>
-            <a:endParaRPr lang="en-US" sz="790" dirty="0"/>
+            <a:endParaRPr lang="en-US" sz="1200" dirty="0"/>
           </a:p>
         </p:txBody>
       </p:sp>
@@ -5203,14 +5148,14 @@
               <a:buNone/>
             </a:pPr>
             <a:r>
-              <a:rPr lang="en-US" sz="790" dirty="0">
+              <a:rPr lang="en-US" sz="1200" dirty="0">
                 <a:solidFill>
                   <a:srgbClr val="111111"/>
                 </a:solidFill>
               </a:rPr>
               <a:t>What do representative and borderline cases look like?</a:t>
             </a:r>
-            <a:endParaRPr lang="en-US" sz="790" dirty="0"/>
+            <a:endParaRPr lang="en-US" sz="1200" dirty="0"/>
           </a:p>
         </p:txBody>
       </p:sp>
@@ -5275,14 +5220,14 @@
               <a:buNone/>
             </a:pPr>
             <a:r>
-              <a:rPr lang="en-US" sz="790" b="1" dirty="0">
+              <a:rPr lang="en-US" sz="1200" b="1" dirty="0">
                 <a:solidFill>
                   <a:srgbClr val="CC0000"/>
                 </a:solidFill>
               </a:rPr>
               <a:t>Name carefully</a:t>
             </a:r>
-            <a:endParaRPr lang="en-US" sz="790" dirty="0"/>
+            <a:endParaRPr lang="en-US" sz="1200" dirty="0"/>
           </a:p>
         </p:txBody>
       </p:sp>
@@ -5347,14 +5292,14 @@
               <a:buNone/>
             </a:pPr>
             <a:r>
-              <a:rPr lang="en-US" sz="790" dirty="0">
+              <a:rPr lang="en-US" sz="1200" dirty="0">
                 <a:solidFill>
                   <a:srgbClr val="111111"/>
                 </a:solidFill>
               </a:rPr>
               <a:t>Use descriptive names only after evidence supports them.</a:t>
             </a:r>
-            <a:endParaRPr lang="en-US" sz="790" dirty="0"/>
+            <a:endParaRPr lang="en-US" sz="1200" dirty="0"/>
           </a:p>
         </p:txBody>
       </p:sp>
@@ -5419,14 +5364,14 @@
               <a:buNone/>
             </a:pPr>
             <a:r>
-              <a:rPr lang="en-US" sz="790" b="1" dirty="0">
+              <a:rPr lang="en-US" sz="1200" b="1" dirty="0">
                 <a:solidFill>
                   <a:srgbClr val="CC0000"/>
                 </a:solidFill>
               </a:rPr>
               <a:t>Plan follow-up</a:t>
             </a:r>
-            <a:endParaRPr lang="en-US" sz="790" dirty="0"/>
+            <a:endParaRPr lang="en-US" sz="1200" dirty="0"/>
           </a:p>
         </p:txBody>
       </p:sp>
@@ -5491,14 +5436,14 @@
               <a:buNone/>
             </a:pPr>
             <a:r>
-              <a:rPr lang="en-US" sz="790" dirty="0">
+              <a:rPr lang="en-US" sz="1200" dirty="0">
                 <a:solidFill>
                   <a:srgbClr val="111111"/>
                 </a:solidFill>
               </a:rPr>
               <a:t>What experiment, label review, or expert check would validate the hypothesis?</a:t>
             </a:r>
-            <a:endParaRPr lang="en-US" sz="790" dirty="0"/>
+            <a:endParaRPr lang="en-US" sz="1200" dirty="0"/>
           </a:p>
         </p:txBody>
       </p:sp>
@@ -5555,7 +5500,7 @@
         </p:spPr>
         <p:txBody>
           <a:bodyPr wrap="square" lIns="0" tIns="0" rIns="0" bIns="0" rtlCol="0" anchor="ctr">
-            <a:normAutofit/>
+            <a:noAutofit/>
           </a:bodyPr>
           <a:lstStyle/>
           <a:p>
@@ -5563,14 +5508,14 @@
               <a:buNone/>
             </a:pPr>
             <a:r>
-              <a:rPr lang="en-US" sz="820" b="1" dirty="0">
+              <a:rPr lang="en-US" sz="1200" b="1" dirty="0">
                 <a:solidFill>
                   <a:srgbClr val="CC0000"/>
                 </a:solidFill>
               </a:rPr>
               <a:t>A cluster is a hypothesis generator; domain experts decide whether the pattern is meaningful.</a:t>
             </a:r>
-            <a:endParaRPr lang="en-US" sz="820" dirty="0"/>
+            <a:endParaRPr lang="en-US" sz="1200" dirty="0"/>
           </a:p>
         </p:txBody>
       </p:sp>
@@ -5664,14 +5609,14 @@
               <a:buNone/>
             </a:pPr>
             <a:r>
-              <a:rPr lang="en-US" sz="550" b="1" dirty="0">
+              <a:rPr lang="en-US" sz="1200" b="1" dirty="0">
                 <a:solidFill>
                   <a:srgbClr val="555555"/>
                 </a:solidFill>
               </a:rPr>
               <a:t>APPLIED AI DESIGN WORKSHOP</a:t>
             </a:r>
-            <a:endParaRPr lang="en-US" sz="550" dirty="0"/>
+            <a:endParaRPr lang="en-US" sz="1200" dirty="0"/>
           </a:p>
         </p:txBody>
       </p:sp>
@@ -5700,14 +5645,14 @@
               <a:buNone/>
             </a:pPr>
             <a:r>
-              <a:rPr lang="en-US" sz="550" dirty="0">
+              <a:rPr lang="en-US" sz="1200" dirty="0">
                 <a:solidFill>
                   <a:srgbClr val="555555"/>
                 </a:solidFill>
               </a:rPr>
               <a:t>Session 4</a:t>
             </a:r>
-            <a:endParaRPr lang="en-US" sz="550" dirty="0"/>
+            <a:endParaRPr lang="en-US" sz="1200" dirty="0"/>
           </a:p>
         </p:txBody>
       </p:sp>
@@ -5774,14 +5719,14 @@
               <a:buNone/>
             </a:pPr>
             <a:r>
-              <a:rPr lang="en-US" sz="800" dirty="0">
+              <a:rPr lang="en-US" sz="1200" dirty="0">
                 <a:solidFill>
                   <a:srgbClr val="333333"/>
                 </a:solidFill>
               </a:rPr>
               <a:t>Goal: scale features, run k-means, visualize clusters, and compute an internal metric.</a:t>
             </a:r>
-            <a:endParaRPr lang="en-US" sz="800" dirty="0"/>
+            <a:endParaRPr lang="en-US" sz="1200" dirty="0"/>
           </a:p>
         </p:txBody>
       </p:sp>
@@ -5802,7 +5747,7 @@
             </a:avLst>
           </a:prstGeom>
           <a:solidFill>
-            <a:srgbClr val="F5F5F5"/>
+            <a:schemeClr val="tx2"/>
           </a:solidFill>
           <a:ln w="7620">
             <a:solidFill>
@@ -5846,9 +5791,11 @@
               <a:buNone/>
             </a:pPr>
             <a:r>
-              <a:rPr lang="en-US" sz="730" dirty="0">
-                <a:solidFill>
-                  <a:srgbClr val="222222"/>
+              <a:rPr lang="en-US" sz="1200" dirty="0">
+                <a:solidFill>
+                  <a:schemeClr val="bg1">
+                    <a:lumMod val="95000"/>
+                  </a:schemeClr>
                 </a:solidFill>
                 <a:latin typeface="Courier New" pitchFamily="34" charset="0"/>
                 <a:ea typeface="Courier New" pitchFamily="34" charset="-122"/>
@@ -5856,16 +5803,24 @@
               </a:rPr>
               <a:t>import pandas as pd</a:t>
             </a:r>
-            <a:endParaRPr lang="en-US" sz="730" dirty="0"/>
-          </a:p>
-          <a:p>
-            <a:pPr marL="0" indent="0">
-              <a:buNone/>
-            </a:pPr>
-            <a:r>
-              <a:rPr lang="en-US" sz="730" dirty="0">
-                <a:solidFill>
-                  <a:srgbClr val="222222"/>
+            <a:endParaRPr lang="en-US" sz="1200" dirty="0">
+              <a:solidFill>
+                <a:schemeClr val="bg1">
+                  <a:lumMod val="95000"/>
+                </a:schemeClr>
+              </a:solidFill>
+            </a:endParaRPr>
+          </a:p>
+          <a:p>
+            <a:pPr marL="0" indent="0">
+              <a:buNone/>
+            </a:pPr>
+            <a:r>
+              <a:rPr lang="en-US" sz="1200" dirty="0">
+                <a:solidFill>
+                  <a:schemeClr val="bg1">
+                    <a:lumMod val="95000"/>
+                  </a:schemeClr>
                 </a:solidFill>
                 <a:latin typeface="Courier New" pitchFamily="34" charset="0"/>
                 <a:ea typeface="Courier New" pitchFamily="34" charset="-122"/>
@@ -5873,16 +5828,24 @@
               </a:rPr>
               <a:t>from sklearn.preprocessing import StandardScaler</a:t>
             </a:r>
-            <a:endParaRPr lang="en-US" sz="730" dirty="0"/>
-          </a:p>
-          <a:p>
-            <a:pPr marL="0" indent="0">
-              <a:buNone/>
-            </a:pPr>
-            <a:r>
-              <a:rPr lang="en-US" sz="730" dirty="0">
-                <a:solidFill>
-                  <a:srgbClr val="222222"/>
+            <a:endParaRPr lang="en-US" sz="1200" dirty="0">
+              <a:solidFill>
+                <a:schemeClr val="bg1">
+                  <a:lumMod val="95000"/>
+                </a:schemeClr>
+              </a:solidFill>
+            </a:endParaRPr>
+          </a:p>
+          <a:p>
+            <a:pPr marL="0" indent="0">
+              <a:buNone/>
+            </a:pPr>
+            <a:r>
+              <a:rPr lang="en-US" sz="1200" dirty="0">
+                <a:solidFill>
+                  <a:schemeClr val="bg1">
+                    <a:lumMod val="95000"/>
+                  </a:schemeClr>
                 </a:solidFill>
                 <a:latin typeface="Courier New" pitchFamily="34" charset="0"/>
                 <a:ea typeface="Courier New" pitchFamily="34" charset="-122"/>
@@ -5890,16 +5853,24 @@
               </a:rPr>
               <a:t>from sklearn.cluster import KMeans</a:t>
             </a:r>
-            <a:endParaRPr lang="en-US" sz="730" dirty="0"/>
-          </a:p>
-          <a:p>
-            <a:pPr marL="0" indent="0">
-              <a:buNone/>
-            </a:pPr>
-            <a:r>
-              <a:rPr lang="en-US" sz="730" dirty="0">
-                <a:solidFill>
-                  <a:srgbClr val="222222"/>
+            <a:endParaRPr lang="en-US" sz="1200" dirty="0">
+              <a:solidFill>
+                <a:schemeClr val="bg1">
+                  <a:lumMod val="95000"/>
+                </a:schemeClr>
+              </a:solidFill>
+            </a:endParaRPr>
+          </a:p>
+          <a:p>
+            <a:pPr marL="0" indent="0">
+              <a:buNone/>
+            </a:pPr>
+            <a:r>
+              <a:rPr lang="en-US" sz="1200" dirty="0">
+                <a:solidFill>
+                  <a:schemeClr val="bg1">
+                    <a:lumMod val="95000"/>
+                  </a:schemeClr>
                 </a:solidFill>
                 <a:latin typeface="Courier New" pitchFamily="34" charset="0"/>
                 <a:ea typeface="Courier New" pitchFamily="34" charset="-122"/>
@@ -5907,16 +5878,24 @@
               </a:rPr>
               <a:t>from sklearn.decomposition import PCA</a:t>
             </a:r>
-            <a:endParaRPr lang="en-US" sz="730" dirty="0"/>
-          </a:p>
-          <a:p>
-            <a:pPr marL="0" indent="0">
-              <a:buNone/>
-            </a:pPr>
-            <a:r>
-              <a:rPr lang="en-US" sz="730" dirty="0">
-                <a:solidFill>
-                  <a:srgbClr val="222222"/>
+            <a:endParaRPr lang="en-US" sz="1200" dirty="0">
+              <a:solidFill>
+                <a:schemeClr val="bg1">
+                  <a:lumMod val="95000"/>
+                </a:schemeClr>
+              </a:solidFill>
+            </a:endParaRPr>
+          </a:p>
+          <a:p>
+            <a:pPr marL="0" indent="0">
+              <a:buNone/>
+            </a:pPr>
+            <a:r>
+              <a:rPr lang="en-US" sz="1200" dirty="0">
+                <a:solidFill>
+                  <a:schemeClr val="bg1">
+                    <a:lumMod val="95000"/>
+                  </a:schemeClr>
                 </a:solidFill>
                 <a:latin typeface="Courier New" pitchFamily="34" charset="0"/>
                 <a:ea typeface="Courier New" pitchFamily="34" charset="-122"/>
@@ -5924,22 +5903,36 @@
               </a:rPr>
               <a:t>from sklearn.metrics import silhouette_score</a:t>
             </a:r>
-            <a:endParaRPr lang="en-US" sz="730" dirty="0"/>
-          </a:p>
-          <a:p>
-            <a:pPr marL="0" indent="0">
-              <a:buNone/>
-            </a:pPr>
-            <a:endParaRPr lang="en-US" sz="730" dirty="0"/>
-          </a:p>
-          <a:p>
-            <a:pPr marL="0" indent="0">
-              <a:buNone/>
-            </a:pPr>
-            <a:r>
-              <a:rPr lang="en-US" sz="730" dirty="0">
-                <a:solidFill>
-                  <a:srgbClr val="222222"/>
+            <a:endParaRPr lang="en-US" sz="1200" dirty="0">
+              <a:solidFill>
+                <a:schemeClr val="bg1">
+                  <a:lumMod val="95000"/>
+                </a:schemeClr>
+              </a:solidFill>
+            </a:endParaRPr>
+          </a:p>
+          <a:p>
+            <a:pPr marL="0" indent="0">
+              <a:buNone/>
+            </a:pPr>
+            <a:endParaRPr lang="en-US" sz="1200" dirty="0">
+              <a:solidFill>
+                <a:schemeClr val="bg1">
+                  <a:lumMod val="95000"/>
+                </a:schemeClr>
+              </a:solidFill>
+            </a:endParaRPr>
+          </a:p>
+          <a:p>
+            <a:pPr marL="0" indent="0">
+              <a:buNone/>
+            </a:pPr>
+            <a:r>
+              <a:rPr lang="en-US" sz="1200" dirty="0">
+                <a:solidFill>
+                  <a:schemeClr val="bg1">
+                    <a:lumMod val="95000"/>
+                  </a:schemeClr>
                 </a:solidFill>
                 <a:latin typeface="Courier New" pitchFamily="34" charset="0"/>
                 <a:ea typeface="Courier New" pitchFamily="34" charset="-122"/>
@@ -5947,16 +5940,24 @@
               </a:rPr>
               <a:t>features = ["temperature", "pressure", "vibration", "energy"]</a:t>
             </a:r>
-            <a:endParaRPr lang="en-US" sz="730" dirty="0"/>
-          </a:p>
-          <a:p>
-            <a:pPr marL="0" indent="0">
-              <a:buNone/>
-            </a:pPr>
-            <a:r>
-              <a:rPr lang="en-US" sz="730" dirty="0">
-                <a:solidFill>
-                  <a:srgbClr val="222222"/>
+            <a:endParaRPr lang="en-US" sz="1200" dirty="0">
+              <a:solidFill>
+                <a:schemeClr val="bg1">
+                  <a:lumMod val="95000"/>
+                </a:schemeClr>
+              </a:solidFill>
+            </a:endParaRPr>
+          </a:p>
+          <a:p>
+            <a:pPr marL="0" indent="0">
+              <a:buNone/>
+            </a:pPr>
+            <a:r>
+              <a:rPr lang="en-US" sz="1200" dirty="0">
+                <a:solidFill>
+                  <a:schemeClr val="bg1">
+                    <a:lumMod val="95000"/>
+                  </a:schemeClr>
                 </a:solidFill>
                 <a:latin typeface="Courier New" pitchFamily="34" charset="0"/>
                 <a:ea typeface="Courier New" pitchFamily="34" charset="-122"/>
@@ -5964,22 +5965,36 @@
               </a:rPr>
               <a:t>X = df[features]</a:t>
             </a:r>
-            <a:endParaRPr lang="en-US" sz="730" dirty="0"/>
-          </a:p>
-          <a:p>
-            <a:pPr marL="0" indent="0">
-              <a:buNone/>
-            </a:pPr>
-            <a:endParaRPr lang="en-US" sz="730" dirty="0"/>
-          </a:p>
-          <a:p>
-            <a:pPr marL="0" indent="0">
-              <a:buNone/>
-            </a:pPr>
-            <a:r>
-              <a:rPr lang="en-US" sz="730" dirty="0">
-                <a:solidFill>
-                  <a:srgbClr val="222222"/>
+            <a:endParaRPr lang="en-US" sz="1200" dirty="0">
+              <a:solidFill>
+                <a:schemeClr val="bg1">
+                  <a:lumMod val="95000"/>
+                </a:schemeClr>
+              </a:solidFill>
+            </a:endParaRPr>
+          </a:p>
+          <a:p>
+            <a:pPr marL="0" indent="0">
+              <a:buNone/>
+            </a:pPr>
+            <a:endParaRPr lang="en-US" sz="1200" dirty="0">
+              <a:solidFill>
+                <a:schemeClr val="bg1">
+                  <a:lumMod val="95000"/>
+                </a:schemeClr>
+              </a:solidFill>
+            </a:endParaRPr>
+          </a:p>
+          <a:p>
+            <a:pPr marL="0" indent="0">
+              <a:buNone/>
+            </a:pPr>
+            <a:r>
+              <a:rPr lang="en-US" sz="1200" dirty="0">
+                <a:solidFill>
+                  <a:schemeClr val="bg1">
+                    <a:lumMod val="95000"/>
+                  </a:schemeClr>
                 </a:solidFill>
                 <a:latin typeface="Courier New" pitchFamily="34" charset="0"/>
                 <a:ea typeface="Courier New" pitchFamily="34" charset="-122"/>
@@ -5987,22 +6002,36 @@
               </a:rPr>
               <a:t>X_scaled = StandardScaler().fit_transform(X)</a:t>
             </a:r>
-            <a:endParaRPr lang="en-US" sz="730" dirty="0"/>
-          </a:p>
-          <a:p>
-            <a:pPr marL="0" indent="0">
-              <a:buNone/>
-            </a:pPr>
-            <a:endParaRPr lang="en-US" sz="730" dirty="0"/>
-          </a:p>
-          <a:p>
-            <a:pPr marL="0" indent="0">
-              <a:buNone/>
-            </a:pPr>
-            <a:r>
-              <a:rPr lang="en-US" sz="730" dirty="0">
-                <a:solidFill>
-                  <a:srgbClr val="222222"/>
+            <a:endParaRPr lang="en-US" sz="1200" dirty="0">
+              <a:solidFill>
+                <a:schemeClr val="bg1">
+                  <a:lumMod val="95000"/>
+                </a:schemeClr>
+              </a:solidFill>
+            </a:endParaRPr>
+          </a:p>
+          <a:p>
+            <a:pPr marL="0" indent="0">
+              <a:buNone/>
+            </a:pPr>
+            <a:endParaRPr lang="en-US" sz="1200" dirty="0">
+              <a:solidFill>
+                <a:schemeClr val="bg1">
+                  <a:lumMod val="95000"/>
+                </a:schemeClr>
+              </a:solidFill>
+            </a:endParaRPr>
+          </a:p>
+          <a:p>
+            <a:pPr marL="0" indent="0">
+              <a:buNone/>
+            </a:pPr>
+            <a:r>
+              <a:rPr lang="en-US" sz="1200" dirty="0">
+                <a:solidFill>
+                  <a:schemeClr val="bg1">
+                    <a:lumMod val="95000"/>
+                  </a:schemeClr>
                 </a:solidFill>
                 <a:latin typeface="Courier New" pitchFamily="34" charset="0"/>
                 <a:ea typeface="Courier New" pitchFamily="34" charset="-122"/>
@@ -6010,16 +6039,24 @@
               </a:rPr>
               <a:t>model = KMeans(n_clusters=3, random_state=42, n_init=10)</a:t>
             </a:r>
-            <a:endParaRPr lang="en-US" sz="730" dirty="0"/>
-          </a:p>
-          <a:p>
-            <a:pPr marL="0" indent="0">
-              <a:buNone/>
-            </a:pPr>
-            <a:r>
-              <a:rPr lang="en-US" sz="730" dirty="0">
-                <a:solidFill>
-                  <a:srgbClr val="222222"/>
+            <a:endParaRPr lang="en-US" sz="1200" dirty="0">
+              <a:solidFill>
+                <a:schemeClr val="bg1">
+                  <a:lumMod val="95000"/>
+                </a:schemeClr>
+              </a:solidFill>
+            </a:endParaRPr>
+          </a:p>
+          <a:p>
+            <a:pPr marL="0" indent="0">
+              <a:buNone/>
+            </a:pPr>
+            <a:r>
+              <a:rPr lang="en-US" sz="1200" dirty="0">
+                <a:solidFill>
+                  <a:schemeClr val="bg1">
+                    <a:lumMod val="95000"/>
+                  </a:schemeClr>
                 </a:solidFill>
                 <a:latin typeface="Courier New" pitchFamily="34" charset="0"/>
                 <a:ea typeface="Courier New" pitchFamily="34" charset="-122"/>
@@ -6027,22 +6064,36 @@
               </a:rPr>
               <a:t>clusters = model.fit_predict(X_scaled)</a:t>
             </a:r>
-            <a:endParaRPr lang="en-US" sz="730" dirty="0"/>
-          </a:p>
-          <a:p>
-            <a:pPr marL="0" indent="0">
-              <a:buNone/>
-            </a:pPr>
-            <a:endParaRPr lang="en-US" sz="730" dirty="0"/>
-          </a:p>
-          <a:p>
-            <a:pPr marL="0" indent="0">
-              <a:buNone/>
-            </a:pPr>
-            <a:r>
-              <a:rPr lang="en-US" sz="730" dirty="0">
-                <a:solidFill>
-                  <a:srgbClr val="222222"/>
+            <a:endParaRPr lang="en-US" sz="1200" dirty="0">
+              <a:solidFill>
+                <a:schemeClr val="bg1">
+                  <a:lumMod val="95000"/>
+                </a:schemeClr>
+              </a:solidFill>
+            </a:endParaRPr>
+          </a:p>
+          <a:p>
+            <a:pPr marL="0" indent="0">
+              <a:buNone/>
+            </a:pPr>
+            <a:endParaRPr lang="en-US" sz="1200" dirty="0">
+              <a:solidFill>
+                <a:schemeClr val="bg1">
+                  <a:lumMod val="95000"/>
+                </a:schemeClr>
+              </a:solidFill>
+            </a:endParaRPr>
+          </a:p>
+          <a:p>
+            <a:pPr marL="0" indent="0">
+              <a:buNone/>
+            </a:pPr>
+            <a:r>
+              <a:rPr lang="en-US" sz="1200" dirty="0">
+                <a:solidFill>
+                  <a:schemeClr val="bg1">
+                    <a:lumMod val="95000"/>
+                  </a:schemeClr>
                 </a:solidFill>
                 <a:latin typeface="Courier New" pitchFamily="34" charset="0"/>
                 <a:ea typeface="Courier New" pitchFamily="34" charset="-122"/>
@@ -6050,16 +6101,24 @@
               </a:rPr>
               <a:t>df["cluster"] = clusters</a:t>
             </a:r>
-            <a:endParaRPr lang="en-US" sz="730" dirty="0"/>
-          </a:p>
-          <a:p>
-            <a:pPr marL="0" indent="0">
-              <a:buNone/>
-            </a:pPr>
-            <a:r>
-              <a:rPr lang="en-US" sz="730" dirty="0">
-                <a:solidFill>
-                  <a:srgbClr val="222222"/>
+            <a:endParaRPr lang="en-US" sz="1200" dirty="0">
+              <a:solidFill>
+                <a:schemeClr val="bg1">
+                  <a:lumMod val="95000"/>
+                </a:schemeClr>
+              </a:solidFill>
+            </a:endParaRPr>
+          </a:p>
+          <a:p>
+            <a:pPr marL="0" indent="0">
+              <a:buNone/>
+            </a:pPr>
+            <a:r>
+              <a:rPr lang="en-US" sz="1200" dirty="0">
+                <a:solidFill>
+                  <a:schemeClr val="bg1">
+                    <a:lumMod val="95000"/>
+                  </a:schemeClr>
                 </a:solidFill>
                 <a:latin typeface="Courier New" pitchFamily="34" charset="0"/>
                 <a:ea typeface="Courier New" pitchFamily="34" charset="-122"/>
@@ -6067,22 +6126,36 @@
               </a:rPr>
               <a:t>print("Silhouette:", silhouette_score(X_scaled, clusters))</a:t>
             </a:r>
-            <a:endParaRPr lang="en-US" sz="730" dirty="0"/>
-          </a:p>
-          <a:p>
-            <a:pPr marL="0" indent="0">
-              <a:buNone/>
-            </a:pPr>
-            <a:endParaRPr lang="en-US" sz="730" dirty="0"/>
-          </a:p>
-          <a:p>
-            <a:pPr marL="0" indent="0">
-              <a:buNone/>
-            </a:pPr>
-            <a:r>
-              <a:rPr lang="en-US" sz="730" dirty="0">
-                <a:solidFill>
-                  <a:srgbClr val="222222"/>
+            <a:endParaRPr lang="en-US" sz="1200" dirty="0">
+              <a:solidFill>
+                <a:schemeClr val="bg1">
+                  <a:lumMod val="95000"/>
+                </a:schemeClr>
+              </a:solidFill>
+            </a:endParaRPr>
+          </a:p>
+          <a:p>
+            <a:pPr marL="0" indent="0">
+              <a:buNone/>
+            </a:pPr>
+            <a:endParaRPr lang="en-US" sz="1200" dirty="0">
+              <a:solidFill>
+                <a:schemeClr val="bg1">
+                  <a:lumMod val="95000"/>
+                </a:schemeClr>
+              </a:solidFill>
+            </a:endParaRPr>
+          </a:p>
+          <a:p>
+            <a:pPr marL="0" indent="0">
+              <a:buNone/>
+            </a:pPr>
+            <a:r>
+              <a:rPr lang="en-US" sz="1200" dirty="0">
+                <a:solidFill>
+                  <a:schemeClr val="bg1">
+                    <a:lumMod val="95000"/>
+                  </a:schemeClr>
                 </a:solidFill>
                 <a:latin typeface="Courier New" pitchFamily="34" charset="0"/>
                 <a:ea typeface="Courier New" pitchFamily="34" charset="-122"/>
@@ -6090,16 +6163,24 @@
               </a:rPr>
               <a:t>pca = PCA(n_components=2)</a:t>
             </a:r>
-            <a:endParaRPr lang="en-US" sz="730" dirty="0"/>
-          </a:p>
-          <a:p>
-            <a:pPr marL="0" indent="0">
-              <a:buNone/>
-            </a:pPr>
-            <a:r>
-              <a:rPr lang="en-US" sz="730" dirty="0">
-                <a:solidFill>
-                  <a:srgbClr val="222222"/>
+            <a:endParaRPr lang="en-US" sz="1200" dirty="0">
+              <a:solidFill>
+                <a:schemeClr val="bg1">
+                  <a:lumMod val="95000"/>
+                </a:schemeClr>
+              </a:solidFill>
+            </a:endParaRPr>
+          </a:p>
+          <a:p>
+            <a:pPr marL="0" indent="0">
+              <a:buNone/>
+            </a:pPr>
+            <a:r>
+              <a:rPr lang="en-US" sz="1200" dirty="0">
+                <a:solidFill>
+                  <a:schemeClr val="bg1">
+                    <a:lumMod val="95000"/>
+                  </a:schemeClr>
                 </a:solidFill>
                 <a:latin typeface="Courier New" pitchFamily="34" charset="0"/>
                 <a:ea typeface="Courier New" pitchFamily="34" charset="-122"/>
@@ -6107,7 +6188,13 @@
               </a:rPr>
               <a:t>coords = pca.fit_transform(X_scaled)</a:t>
             </a:r>
-            <a:endParaRPr lang="en-US" sz="730" dirty="0"/>
+            <a:endParaRPr lang="en-US" sz="1200" dirty="0">
+              <a:solidFill>
+                <a:schemeClr val="bg1">
+                  <a:lumMod val="95000"/>
+                </a:schemeClr>
+              </a:solidFill>
+            </a:endParaRPr>
           </a:p>
         </p:txBody>
       </p:sp>
@@ -6202,22 +6289,22 @@
         </p:spPr>
         <p:txBody>
           <a:bodyPr wrap="square" lIns="0" tIns="0" rIns="0" bIns="0" rtlCol="0" anchor="t">
-            <a:normAutofit/>
-          </a:bodyPr>
-          <a:lstStyle/>
-          <a:p>
-            <a:pPr marL="0" indent="0">
-              <a:buNone/>
-            </a:pPr>
-            <a:r>
-              <a:rPr lang="en-US" sz="850" dirty="0">
+            <a:noAutofit/>
+          </a:bodyPr>
+          <a:lstStyle/>
+          <a:p>
+            <a:pPr marL="0" indent="0">
+              <a:buNone/>
+            </a:pPr>
+            <a:r>
+              <a:rPr lang="en-US" sz="1200" dirty="0">
                 <a:solidFill>
                   <a:srgbClr val="111111"/>
                 </a:solidFill>
               </a:rPr>
               <a:t>Use the Session 4 unsupervised learning notebook or embedded technical notebook.</a:t>
             </a:r>
-            <a:endParaRPr lang="en-US" sz="850" dirty="0"/>
+            <a:endParaRPr lang="en-US" sz="1200" dirty="0"/>
           </a:p>
         </p:txBody>
       </p:sp>
@@ -6281,14 +6368,6 @@
             <a:pPr marL="0" indent="0">
               <a:buNone/>
             </a:pPr>
-            <a:r>
-              <a:rPr lang="en-US" sz="950" b="1" dirty="0">
-                <a:solidFill>
-                  <a:srgbClr val="CC0000"/>
-                </a:solidFill>
-              </a:rPr>
-              <a:t>Instructor prompt</a:t>
-            </a:r>
             <a:endParaRPr lang="en-US" sz="950" dirty="0"/>
           </a:p>
         </p:txBody>
@@ -6320,14 +6399,14 @@
               <a:buNone/>
             </a:pPr>
             <a:r>
-              <a:rPr lang="en-US" sz="870" dirty="0">
+              <a:rPr lang="en-US" sz="1200" dirty="0">
                 <a:solidFill>
                   <a:srgbClr val="111111"/>
                 </a:solidFill>
               </a:rPr>
               <a:t>“What evidence would convince you these clusters are meaningful?”</a:t>
             </a:r>
-            <a:endParaRPr lang="en-US" sz="870" dirty="0"/>
+            <a:endParaRPr lang="en-US" sz="1200" dirty="0"/>
           </a:p>
         </p:txBody>
       </p:sp>
@@ -6422,22 +6501,22 @@
         </p:spPr>
         <p:txBody>
           <a:bodyPr wrap="square" lIns="0" tIns="0" rIns="0" bIns="0" rtlCol="0" anchor="t">
-            <a:normAutofit/>
-          </a:bodyPr>
-          <a:lstStyle/>
-          <a:p>
-            <a:pPr marL="0" indent="0">
-              <a:buNone/>
-            </a:pPr>
-            <a:r>
-              <a:rPr lang="en-US" sz="800" dirty="0">
+            <a:noAutofit/>
+          </a:bodyPr>
+          <a:lstStyle/>
+          <a:p>
+            <a:pPr marL="0" indent="0">
+              <a:buNone/>
+            </a:pPr>
+            <a:r>
+              <a:rPr lang="en-US" sz="1200" dirty="0">
                 <a:solidFill>
                   <a:srgbClr val="111111"/>
                 </a:solidFill>
               </a:rPr>
               <a:t>Scale → cluster → visualize → interpret → validate.</a:t>
             </a:r>
-            <a:endParaRPr lang="en-US" sz="800" dirty="0"/>
+            <a:endParaRPr lang="en-US" sz="1200" dirty="0"/>
           </a:p>
         </p:txBody>
       </p:sp>
@@ -6450,1517 +6529,6 @@
 </file>
 
 <file path=ppt/slides/slide14.xml><?xml version="1.0" encoding="utf-8"?>
-<p:sld xmlns:a="http://schemas.openxmlformats.org/drawingml/2006/main" xmlns:r="http://schemas.openxmlformats.org/officeDocument/2006/relationships" xmlns:p="http://schemas.openxmlformats.org/presentationml/2006/main">
-  <p:cSld name="Slide 14">
-    <p:bg>
-      <p:bgPr>
-        <a:solidFill>
-          <a:srgbClr val="FFFFFF"/>
-        </a:solidFill>
-        <a:effectLst/>
-      </p:bgPr>
-    </p:bg>
-    <p:spTree>
-      <p:nvGrpSpPr>
-        <p:cNvPr id="1" name=""/>
-        <p:cNvGrpSpPr/>
-        <p:nvPr/>
-      </p:nvGrpSpPr>
-      <p:grpSpPr>
-        <a:xfrm>
-          <a:off x="0" y="0"/>
-          <a:ext cx="0" cy="0"/>
-          <a:chOff x="0" y="0"/>
-          <a:chExt cx="0" cy="0"/>
-        </a:xfrm>
-      </p:grpSpPr>
-      <p:sp>
-        <p:nvSpPr>
-          <p:cNvPr id="2" name="Shape 0"/>
-          <p:cNvSpPr/>
-          <p:nvPr/>
-        </p:nvSpPr>
-        <p:spPr>
-          <a:xfrm>
-            <a:off x="0" y="0"/>
-            <a:ext cx="12191695" cy="109728"/>
-          </a:xfrm>
-          <a:prstGeom prst="rect">
-            <a:avLst/>
-          </a:prstGeom>
-          <a:solidFill>
-            <a:srgbClr val="CC0000"/>
-          </a:solidFill>
-          <a:ln w="12700">
-            <a:solidFill>
-              <a:srgbClr val="CC0000"/>
-            </a:solidFill>
-            <a:prstDash val="solid"/>
-          </a:ln>
-        </p:spPr>
-        <p:txBody>
-          <a:bodyPr/>
-          <a:lstStyle/>
-          <a:p>
-            <a:endParaRPr lang="en-US"/>
-          </a:p>
-        </p:txBody>
-      </p:sp>
-      <p:sp>
-        <p:nvSpPr>
-          <p:cNvPr id="3" name="Text 1"/>
-          <p:cNvSpPr/>
-          <p:nvPr/>
-        </p:nvSpPr>
-        <p:spPr>
-          <a:xfrm>
-            <a:off x="301752" y="228600"/>
-            <a:ext cx="3108960" cy="146304"/>
-          </a:xfrm>
-          <a:prstGeom prst="rect">
-            <a:avLst/>
-          </a:prstGeom>
-          <a:noFill/>
-          <a:ln/>
-        </p:spPr>
-        <p:txBody>
-          <a:bodyPr wrap="square" lIns="0" tIns="0" rIns="0" bIns="0" rtlCol="0" anchor="ctr"/>
-          <a:lstStyle/>
-          <a:p>
-            <a:pPr marL="0" indent="0">
-              <a:buNone/>
-            </a:pPr>
-            <a:r>
-              <a:rPr lang="en-US" sz="550" b="1" dirty="0">
-                <a:solidFill>
-                  <a:srgbClr val="555555"/>
-                </a:solidFill>
-              </a:rPr>
-              <a:t>APPLIED AI DESIGN WORKSHOP</a:t>
-            </a:r>
-            <a:endParaRPr lang="en-US" sz="550" dirty="0"/>
-          </a:p>
-        </p:txBody>
-      </p:sp>
-      <p:sp>
-        <p:nvSpPr>
-          <p:cNvPr id="4" name="Text 2"/>
-          <p:cNvSpPr/>
-          <p:nvPr/>
-        </p:nvSpPr>
-        <p:spPr>
-          <a:xfrm>
-            <a:off x="10972800" y="228600"/>
-            <a:ext cx="914400" cy="146304"/>
-          </a:xfrm>
-          <a:prstGeom prst="rect">
-            <a:avLst/>
-          </a:prstGeom>
-          <a:noFill/>
-          <a:ln/>
-        </p:spPr>
-        <p:txBody>
-          <a:bodyPr wrap="square" lIns="0" tIns="0" rIns="0" bIns="0" rtlCol="0" anchor="ctr"/>
-          <a:lstStyle/>
-          <a:p>
-            <a:pPr marL="0" indent="0" algn="r">
-              <a:buNone/>
-            </a:pPr>
-            <a:r>
-              <a:rPr lang="en-US" sz="550" dirty="0">
-                <a:solidFill>
-                  <a:srgbClr val="555555"/>
-                </a:solidFill>
-              </a:rPr>
-              <a:t>Session 4</a:t>
-            </a:r>
-            <a:endParaRPr lang="en-US" sz="550" dirty="0"/>
-          </a:p>
-        </p:txBody>
-      </p:sp>
-      <p:sp>
-        <p:nvSpPr>
-          <p:cNvPr id="5" name="Text 3"/>
-          <p:cNvSpPr/>
-          <p:nvPr/>
-        </p:nvSpPr>
-        <p:spPr>
-          <a:xfrm>
-            <a:off x="329184" y="502920"/>
-            <a:ext cx="9875520" cy="384048"/>
-          </a:xfrm>
-          <a:prstGeom prst="rect">
-            <a:avLst/>
-          </a:prstGeom>
-          <a:noFill/>
-          <a:ln/>
-        </p:spPr>
-        <p:txBody>
-          <a:bodyPr wrap="square" lIns="0" tIns="0" rIns="0" bIns="0" rtlCol="0" anchor="ctr">
-            <a:normAutofit/>
-          </a:bodyPr>
-          <a:lstStyle/>
-          <a:p>
-            <a:pPr marL="0" indent="0">
-              <a:buNone/>
-            </a:pPr>
-            <a:r>
-              <a:rPr lang="en-US" sz="2000" b="1" dirty="0">
-                <a:solidFill>
-                  <a:srgbClr val="111111"/>
-                </a:solidFill>
-              </a:rPr>
-              <a:t>Faculty activity: design an unsupervised analysis</a:t>
-            </a:r>
-            <a:endParaRPr lang="en-US" sz="2000" dirty="0"/>
-          </a:p>
-        </p:txBody>
-      </p:sp>
-      <p:sp>
-        <p:nvSpPr>
-          <p:cNvPr id="6" name="Text 4"/>
-          <p:cNvSpPr/>
-          <p:nvPr/>
-        </p:nvSpPr>
-        <p:spPr>
-          <a:xfrm>
-            <a:off x="329184" y="932688"/>
-            <a:ext cx="10241280" cy="128016"/>
-          </a:xfrm>
-          <a:prstGeom prst="rect">
-            <a:avLst/>
-          </a:prstGeom>
-          <a:noFill/>
-          <a:ln/>
-        </p:spPr>
-        <p:txBody>
-          <a:bodyPr wrap="square" lIns="0" tIns="0" rIns="0" bIns="0" rtlCol="0" anchor="ctr"/>
-          <a:lstStyle/>
-          <a:p>
-            <a:pPr marL="0" indent="0">
-              <a:buNone/>
-            </a:pPr>
-            <a:r>
-              <a:rPr lang="en-US" sz="800" dirty="0">
-                <a:solidFill>
-                  <a:srgbClr val="333333"/>
-                </a:solidFill>
-              </a:rPr>
-              <a:t>Use an unlabeled dataset or remove the target from a known dataset.</a:t>
-            </a:r>
-            <a:endParaRPr lang="en-US" sz="800" dirty="0"/>
-          </a:p>
-        </p:txBody>
-      </p:sp>
-      <p:sp>
-        <p:nvSpPr>
-          <p:cNvPr id="7" name="Shape 5"/>
-          <p:cNvSpPr/>
-          <p:nvPr/>
-        </p:nvSpPr>
-        <p:spPr>
-          <a:xfrm>
-            <a:off x="777240" y="1325880"/>
-            <a:ext cx="3994785" cy="467360"/>
-          </a:xfrm>
-          <a:prstGeom prst="rect">
-            <a:avLst/>
-          </a:prstGeom>
-          <a:solidFill>
-            <a:srgbClr val="F2F2F2"/>
-          </a:solidFill>
-          <a:ln w="5080">
-            <a:solidFill>
-              <a:srgbClr val="E2E2E2"/>
-            </a:solidFill>
-            <a:prstDash val="solid"/>
-          </a:ln>
-        </p:spPr>
-        <p:txBody>
-          <a:bodyPr/>
-          <a:lstStyle/>
-          <a:p>
-            <a:endParaRPr lang="en-US"/>
-          </a:p>
-        </p:txBody>
-      </p:sp>
-      <p:sp>
-        <p:nvSpPr>
-          <p:cNvPr id="8" name="Text 6"/>
-          <p:cNvSpPr/>
-          <p:nvPr/>
-        </p:nvSpPr>
-        <p:spPr>
-          <a:xfrm>
-            <a:off x="841248" y="1380744"/>
-            <a:ext cx="3866769" cy="357632"/>
-          </a:xfrm>
-          <a:prstGeom prst="rect">
-            <a:avLst/>
-          </a:prstGeom>
-          <a:noFill/>
-          <a:ln/>
-        </p:spPr>
-        <p:txBody>
-          <a:bodyPr wrap="square" lIns="254" tIns="254" rIns="254" bIns="254" rtlCol="0" anchor="ctr">
-            <a:normAutofit/>
-          </a:bodyPr>
-          <a:lstStyle/>
-          <a:p>
-            <a:pPr marL="0" indent="0">
-              <a:buNone/>
-            </a:pPr>
-            <a:r>
-              <a:rPr lang="en-US" sz="800" b="1" dirty="0">
-                <a:solidFill>
-                  <a:srgbClr val="111111"/>
-                </a:solidFill>
-              </a:rPr>
-              <a:t>Decision area</a:t>
-            </a:r>
-            <a:endParaRPr lang="en-US" sz="800" dirty="0"/>
-          </a:p>
-        </p:txBody>
-      </p:sp>
-      <p:sp>
-        <p:nvSpPr>
-          <p:cNvPr id="9" name="Shape 7"/>
-          <p:cNvSpPr/>
-          <p:nvPr/>
-        </p:nvSpPr>
-        <p:spPr>
-          <a:xfrm>
-            <a:off x="4772025" y="1325880"/>
-            <a:ext cx="6657975" cy="467360"/>
-          </a:xfrm>
-          <a:prstGeom prst="rect">
-            <a:avLst/>
-          </a:prstGeom>
-          <a:solidFill>
-            <a:srgbClr val="F2F2F2"/>
-          </a:solidFill>
-          <a:ln w="5080">
-            <a:solidFill>
-              <a:srgbClr val="E2E2E2"/>
-            </a:solidFill>
-            <a:prstDash val="solid"/>
-          </a:ln>
-        </p:spPr>
-        <p:txBody>
-          <a:bodyPr/>
-          <a:lstStyle/>
-          <a:p>
-            <a:endParaRPr lang="en-US"/>
-          </a:p>
-        </p:txBody>
-      </p:sp>
-      <p:sp>
-        <p:nvSpPr>
-          <p:cNvPr id="10" name="Text 8"/>
-          <p:cNvSpPr/>
-          <p:nvPr/>
-        </p:nvSpPr>
-        <p:spPr>
-          <a:xfrm>
-            <a:off x="4836033" y="1380744"/>
-            <a:ext cx="6529959" cy="357632"/>
-          </a:xfrm>
-          <a:prstGeom prst="rect">
-            <a:avLst/>
-          </a:prstGeom>
-          <a:noFill/>
-          <a:ln/>
-        </p:spPr>
-        <p:txBody>
-          <a:bodyPr wrap="square" lIns="254" tIns="254" rIns="254" bIns="254" rtlCol="0" anchor="ctr">
-            <a:normAutofit/>
-          </a:bodyPr>
-          <a:lstStyle/>
-          <a:p>
-            <a:pPr marL="0" indent="0">
-              <a:buNone/>
-            </a:pPr>
-            <a:r>
-              <a:rPr lang="en-US" sz="800" b="1" dirty="0">
-                <a:solidFill>
-                  <a:srgbClr val="111111"/>
-                </a:solidFill>
-              </a:rPr>
-              <a:t>Participant response</a:t>
-            </a:r>
-            <a:endParaRPr lang="en-US" sz="800" dirty="0"/>
-          </a:p>
-        </p:txBody>
-      </p:sp>
-      <p:sp>
-        <p:nvSpPr>
-          <p:cNvPr id="11" name="Shape 9"/>
-          <p:cNvSpPr/>
-          <p:nvPr/>
-        </p:nvSpPr>
-        <p:spPr>
-          <a:xfrm>
-            <a:off x="777240" y="1793240"/>
-            <a:ext cx="3994785" cy="467360"/>
-          </a:xfrm>
-          <a:prstGeom prst="rect">
-            <a:avLst/>
-          </a:prstGeom>
-          <a:solidFill>
-            <a:srgbClr val="FFFFFF">
-              <a:alpha val="0"/>
-            </a:srgbClr>
-          </a:solidFill>
-          <a:ln w="5080">
-            <a:solidFill>
-              <a:srgbClr val="E2E2E2"/>
-            </a:solidFill>
-            <a:prstDash val="solid"/>
-          </a:ln>
-        </p:spPr>
-        <p:txBody>
-          <a:bodyPr/>
-          <a:lstStyle/>
-          <a:p>
-            <a:endParaRPr lang="en-US"/>
-          </a:p>
-        </p:txBody>
-      </p:sp>
-      <p:sp>
-        <p:nvSpPr>
-          <p:cNvPr id="12" name="Text 10"/>
-          <p:cNvSpPr/>
-          <p:nvPr/>
-        </p:nvSpPr>
-        <p:spPr>
-          <a:xfrm>
-            <a:off x="841248" y="1848104"/>
-            <a:ext cx="3866769" cy="357632"/>
-          </a:xfrm>
-          <a:prstGeom prst="rect">
-            <a:avLst/>
-          </a:prstGeom>
-          <a:noFill/>
-          <a:ln/>
-        </p:spPr>
-        <p:txBody>
-          <a:bodyPr wrap="square" lIns="254" tIns="254" rIns="254" bIns="254" rtlCol="0" anchor="ctr">
-            <a:normAutofit/>
-          </a:bodyPr>
-          <a:lstStyle/>
-          <a:p>
-            <a:pPr marL="0" indent="0">
-              <a:buNone/>
-            </a:pPr>
-            <a:r>
-              <a:rPr lang="en-US" sz="800" b="1" dirty="0">
-                <a:solidFill>
-                  <a:srgbClr val="CC0000"/>
-                </a:solidFill>
-              </a:rPr>
-              <a:t>Discovery question</a:t>
-            </a:r>
-            <a:endParaRPr lang="en-US" sz="800" dirty="0"/>
-          </a:p>
-        </p:txBody>
-      </p:sp>
-      <p:sp>
-        <p:nvSpPr>
-          <p:cNvPr id="13" name="Shape 11"/>
-          <p:cNvSpPr/>
-          <p:nvPr/>
-        </p:nvSpPr>
-        <p:spPr>
-          <a:xfrm>
-            <a:off x="4772025" y="1793240"/>
-            <a:ext cx="6657975" cy="467360"/>
-          </a:xfrm>
-          <a:prstGeom prst="rect">
-            <a:avLst/>
-          </a:prstGeom>
-          <a:solidFill>
-            <a:srgbClr val="FFFFFF">
-              <a:alpha val="0"/>
-            </a:srgbClr>
-          </a:solidFill>
-          <a:ln w="5080">
-            <a:solidFill>
-              <a:srgbClr val="E2E2E2"/>
-            </a:solidFill>
-            <a:prstDash val="solid"/>
-          </a:ln>
-        </p:spPr>
-        <p:txBody>
-          <a:bodyPr/>
-          <a:lstStyle/>
-          <a:p>
-            <a:endParaRPr lang="en-US"/>
-          </a:p>
-        </p:txBody>
-      </p:sp>
-      <p:sp>
-        <p:nvSpPr>
-          <p:cNvPr id="14" name="Text 12"/>
-          <p:cNvSpPr/>
-          <p:nvPr/>
-        </p:nvSpPr>
-        <p:spPr>
-          <a:xfrm>
-            <a:off x="4836033" y="1848104"/>
-            <a:ext cx="6529959" cy="357632"/>
-          </a:xfrm>
-          <a:prstGeom prst="rect">
-            <a:avLst/>
-          </a:prstGeom>
-          <a:noFill/>
-          <a:ln/>
-        </p:spPr>
-        <p:txBody>
-          <a:bodyPr wrap="square" lIns="254" tIns="254" rIns="254" bIns="254" rtlCol="0" anchor="ctr">
-            <a:normAutofit/>
-          </a:bodyPr>
-          <a:lstStyle/>
-          <a:p>
-            <a:pPr marL="0" indent="0">
-              <a:buNone/>
-            </a:pPr>
-            <a:endParaRPr lang="en-US" sz="800" dirty="0"/>
-          </a:p>
-        </p:txBody>
-      </p:sp>
-      <p:sp>
-        <p:nvSpPr>
-          <p:cNvPr id="15" name="Shape 13"/>
-          <p:cNvSpPr/>
-          <p:nvPr/>
-        </p:nvSpPr>
-        <p:spPr>
-          <a:xfrm>
-            <a:off x="777240" y="2260600"/>
-            <a:ext cx="3994785" cy="467360"/>
-          </a:xfrm>
-          <a:prstGeom prst="rect">
-            <a:avLst/>
-          </a:prstGeom>
-          <a:solidFill>
-            <a:srgbClr val="FFFFFF">
-              <a:alpha val="0"/>
-            </a:srgbClr>
-          </a:solidFill>
-          <a:ln w="5080">
-            <a:solidFill>
-              <a:srgbClr val="E2E2E2"/>
-            </a:solidFill>
-            <a:prstDash val="solid"/>
-          </a:ln>
-        </p:spPr>
-        <p:txBody>
-          <a:bodyPr/>
-          <a:lstStyle/>
-          <a:p>
-            <a:endParaRPr lang="en-US"/>
-          </a:p>
-        </p:txBody>
-      </p:sp>
-      <p:sp>
-        <p:nvSpPr>
-          <p:cNvPr id="16" name="Text 14"/>
-          <p:cNvSpPr/>
-          <p:nvPr/>
-        </p:nvSpPr>
-        <p:spPr>
-          <a:xfrm>
-            <a:off x="841248" y="2315464"/>
-            <a:ext cx="3866769" cy="357632"/>
-          </a:xfrm>
-          <a:prstGeom prst="rect">
-            <a:avLst/>
-          </a:prstGeom>
-          <a:noFill/>
-          <a:ln/>
-        </p:spPr>
-        <p:txBody>
-          <a:bodyPr wrap="square" lIns="254" tIns="254" rIns="254" bIns="254" rtlCol="0" anchor="ctr">
-            <a:normAutofit/>
-          </a:bodyPr>
-          <a:lstStyle/>
-          <a:p>
-            <a:pPr marL="0" indent="0">
-              <a:buNone/>
-            </a:pPr>
-            <a:r>
-              <a:rPr lang="en-US" sz="800" b="1" dirty="0">
-                <a:solidFill>
-                  <a:srgbClr val="CC0000"/>
-                </a:solidFill>
-              </a:rPr>
-              <a:t>Unit of observation</a:t>
-            </a:r>
-            <a:endParaRPr lang="en-US" sz="800" dirty="0"/>
-          </a:p>
-        </p:txBody>
-      </p:sp>
-      <p:sp>
-        <p:nvSpPr>
-          <p:cNvPr id="17" name="Shape 15"/>
-          <p:cNvSpPr/>
-          <p:nvPr/>
-        </p:nvSpPr>
-        <p:spPr>
-          <a:xfrm>
-            <a:off x="4772025" y="2260600"/>
-            <a:ext cx="6657975" cy="467360"/>
-          </a:xfrm>
-          <a:prstGeom prst="rect">
-            <a:avLst/>
-          </a:prstGeom>
-          <a:solidFill>
-            <a:srgbClr val="FFFFFF">
-              <a:alpha val="0"/>
-            </a:srgbClr>
-          </a:solidFill>
-          <a:ln w="5080">
-            <a:solidFill>
-              <a:srgbClr val="E2E2E2"/>
-            </a:solidFill>
-            <a:prstDash val="solid"/>
-          </a:ln>
-        </p:spPr>
-        <p:txBody>
-          <a:bodyPr/>
-          <a:lstStyle/>
-          <a:p>
-            <a:endParaRPr lang="en-US"/>
-          </a:p>
-        </p:txBody>
-      </p:sp>
-      <p:sp>
-        <p:nvSpPr>
-          <p:cNvPr id="18" name="Text 16"/>
-          <p:cNvSpPr/>
-          <p:nvPr/>
-        </p:nvSpPr>
-        <p:spPr>
-          <a:xfrm>
-            <a:off x="4836033" y="2315464"/>
-            <a:ext cx="6529959" cy="357632"/>
-          </a:xfrm>
-          <a:prstGeom prst="rect">
-            <a:avLst/>
-          </a:prstGeom>
-          <a:noFill/>
-          <a:ln/>
-        </p:spPr>
-        <p:txBody>
-          <a:bodyPr wrap="square" lIns="254" tIns="254" rIns="254" bIns="254" rtlCol="0" anchor="ctr">
-            <a:normAutofit/>
-          </a:bodyPr>
-          <a:lstStyle/>
-          <a:p>
-            <a:pPr marL="0" indent="0">
-              <a:buNone/>
-            </a:pPr>
-            <a:endParaRPr lang="en-US" sz="800" dirty="0"/>
-          </a:p>
-        </p:txBody>
-      </p:sp>
-      <p:sp>
-        <p:nvSpPr>
-          <p:cNvPr id="19" name="Shape 17"/>
-          <p:cNvSpPr/>
-          <p:nvPr/>
-        </p:nvSpPr>
-        <p:spPr>
-          <a:xfrm>
-            <a:off x="777240" y="2727960"/>
-            <a:ext cx="3994785" cy="467360"/>
-          </a:xfrm>
-          <a:prstGeom prst="rect">
-            <a:avLst/>
-          </a:prstGeom>
-          <a:solidFill>
-            <a:srgbClr val="FFFFFF">
-              <a:alpha val="0"/>
-            </a:srgbClr>
-          </a:solidFill>
-          <a:ln w="5080">
-            <a:solidFill>
-              <a:srgbClr val="E2E2E2"/>
-            </a:solidFill>
-            <a:prstDash val="solid"/>
-          </a:ln>
-        </p:spPr>
-        <p:txBody>
-          <a:bodyPr/>
-          <a:lstStyle/>
-          <a:p>
-            <a:endParaRPr lang="en-US"/>
-          </a:p>
-        </p:txBody>
-      </p:sp>
-      <p:sp>
-        <p:nvSpPr>
-          <p:cNvPr id="20" name="Text 18"/>
-          <p:cNvSpPr/>
-          <p:nvPr/>
-        </p:nvSpPr>
-        <p:spPr>
-          <a:xfrm>
-            <a:off x="841248" y="2782824"/>
-            <a:ext cx="3866769" cy="357632"/>
-          </a:xfrm>
-          <a:prstGeom prst="rect">
-            <a:avLst/>
-          </a:prstGeom>
-          <a:noFill/>
-          <a:ln/>
-        </p:spPr>
-        <p:txBody>
-          <a:bodyPr wrap="square" lIns="254" tIns="254" rIns="254" bIns="254" rtlCol="0" anchor="ctr">
-            <a:normAutofit/>
-          </a:bodyPr>
-          <a:lstStyle/>
-          <a:p>
-            <a:pPr marL="0" indent="0">
-              <a:buNone/>
-            </a:pPr>
-            <a:r>
-              <a:rPr lang="en-US" sz="800" b="1" dirty="0">
-                <a:solidFill>
-                  <a:srgbClr val="CC0000"/>
-                </a:solidFill>
-              </a:rPr>
-              <a:t>Features used for similarity</a:t>
-            </a:r>
-            <a:endParaRPr lang="en-US" sz="800" dirty="0"/>
-          </a:p>
-        </p:txBody>
-      </p:sp>
-      <p:sp>
-        <p:nvSpPr>
-          <p:cNvPr id="21" name="Shape 19"/>
-          <p:cNvSpPr/>
-          <p:nvPr/>
-        </p:nvSpPr>
-        <p:spPr>
-          <a:xfrm>
-            <a:off x="4772025" y="2727960"/>
-            <a:ext cx="6657975" cy="467360"/>
-          </a:xfrm>
-          <a:prstGeom prst="rect">
-            <a:avLst/>
-          </a:prstGeom>
-          <a:solidFill>
-            <a:srgbClr val="FFFFFF">
-              <a:alpha val="0"/>
-            </a:srgbClr>
-          </a:solidFill>
-          <a:ln w="5080">
-            <a:solidFill>
-              <a:srgbClr val="E2E2E2"/>
-            </a:solidFill>
-            <a:prstDash val="solid"/>
-          </a:ln>
-        </p:spPr>
-        <p:txBody>
-          <a:bodyPr/>
-          <a:lstStyle/>
-          <a:p>
-            <a:endParaRPr lang="en-US"/>
-          </a:p>
-        </p:txBody>
-      </p:sp>
-      <p:sp>
-        <p:nvSpPr>
-          <p:cNvPr id="22" name="Text 20"/>
-          <p:cNvSpPr/>
-          <p:nvPr/>
-        </p:nvSpPr>
-        <p:spPr>
-          <a:xfrm>
-            <a:off x="4836033" y="2782824"/>
-            <a:ext cx="6529959" cy="357632"/>
-          </a:xfrm>
-          <a:prstGeom prst="rect">
-            <a:avLst/>
-          </a:prstGeom>
-          <a:noFill/>
-          <a:ln/>
-        </p:spPr>
-        <p:txBody>
-          <a:bodyPr wrap="square" lIns="254" tIns="254" rIns="254" bIns="254" rtlCol="0" anchor="ctr">
-            <a:normAutofit/>
-          </a:bodyPr>
-          <a:lstStyle/>
-          <a:p>
-            <a:pPr marL="0" indent="0">
-              <a:buNone/>
-            </a:pPr>
-            <a:endParaRPr lang="en-US" sz="800" dirty="0"/>
-          </a:p>
-        </p:txBody>
-      </p:sp>
-      <p:sp>
-        <p:nvSpPr>
-          <p:cNvPr id="23" name="Shape 21"/>
-          <p:cNvSpPr/>
-          <p:nvPr/>
-        </p:nvSpPr>
-        <p:spPr>
-          <a:xfrm>
-            <a:off x="777240" y="3195320"/>
-            <a:ext cx="3994785" cy="467360"/>
-          </a:xfrm>
-          <a:prstGeom prst="rect">
-            <a:avLst/>
-          </a:prstGeom>
-          <a:solidFill>
-            <a:srgbClr val="FFFFFF">
-              <a:alpha val="0"/>
-            </a:srgbClr>
-          </a:solidFill>
-          <a:ln w="5080">
-            <a:solidFill>
-              <a:srgbClr val="E2E2E2"/>
-            </a:solidFill>
-            <a:prstDash val="solid"/>
-          </a:ln>
-        </p:spPr>
-        <p:txBody>
-          <a:bodyPr/>
-          <a:lstStyle/>
-          <a:p>
-            <a:endParaRPr lang="en-US"/>
-          </a:p>
-        </p:txBody>
-      </p:sp>
-      <p:sp>
-        <p:nvSpPr>
-          <p:cNvPr id="24" name="Text 22"/>
-          <p:cNvSpPr/>
-          <p:nvPr/>
-        </p:nvSpPr>
-        <p:spPr>
-          <a:xfrm>
-            <a:off x="841248" y="3250184"/>
-            <a:ext cx="3866769" cy="357632"/>
-          </a:xfrm>
-          <a:prstGeom prst="rect">
-            <a:avLst/>
-          </a:prstGeom>
-          <a:noFill/>
-          <a:ln/>
-        </p:spPr>
-        <p:txBody>
-          <a:bodyPr wrap="square" lIns="254" tIns="254" rIns="254" bIns="254" rtlCol="0" anchor="ctr">
-            <a:normAutofit/>
-          </a:bodyPr>
-          <a:lstStyle/>
-          <a:p>
-            <a:pPr marL="0" indent="0">
-              <a:buNone/>
-            </a:pPr>
-            <a:r>
-              <a:rPr lang="en-US" sz="800" b="1" dirty="0">
-                <a:solidFill>
-                  <a:srgbClr val="CC0000"/>
-                </a:solidFill>
-              </a:rPr>
-              <a:t>Features removed and why</a:t>
-            </a:r>
-            <a:endParaRPr lang="en-US" sz="800" dirty="0"/>
-          </a:p>
-        </p:txBody>
-      </p:sp>
-      <p:sp>
-        <p:nvSpPr>
-          <p:cNvPr id="25" name="Shape 23"/>
-          <p:cNvSpPr/>
-          <p:nvPr/>
-        </p:nvSpPr>
-        <p:spPr>
-          <a:xfrm>
-            <a:off x="4772025" y="3195320"/>
-            <a:ext cx="6657975" cy="467360"/>
-          </a:xfrm>
-          <a:prstGeom prst="rect">
-            <a:avLst/>
-          </a:prstGeom>
-          <a:solidFill>
-            <a:srgbClr val="FFFFFF">
-              <a:alpha val="0"/>
-            </a:srgbClr>
-          </a:solidFill>
-          <a:ln w="5080">
-            <a:solidFill>
-              <a:srgbClr val="E2E2E2"/>
-            </a:solidFill>
-            <a:prstDash val="solid"/>
-          </a:ln>
-        </p:spPr>
-        <p:txBody>
-          <a:bodyPr/>
-          <a:lstStyle/>
-          <a:p>
-            <a:endParaRPr lang="en-US"/>
-          </a:p>
-        </p:txBody>
-      </p:sp>
-      <p:sp>
-        <p:nvSpPr>
-          <p:cNvPr id="26" name="Text 24"/>
-          <p:cNvSpPr/>
-          <p:nvPr/>
-        </p:nvSpPr>
-        <p:spPr>
-          <a:xfrm>
-            <a:off x="4836033" y="3250184"/>
-            <a:ext cx="6529959" cy="357632"/>
-          </a:xfrm>
-          <a:prstGeom prst="rect">
-            <a:avLst/>
-          </a:prstGeom>
-          <a:noFill/>
-          <a:ln/>
-        </p:spPr>
-        <p:txBody>
-          <a:bodyPr wrap="square" lIns="254" tIns="254" rIns="254" bIns="254" rtlCol="0" anchor="ctr">
-            <a:normAutofit/>
-          </a:bodyPr>
-          <a:lstStyle/>
-          <a:p>
-            <a:pPr marL="0" indent="0">
-              <a:buNone/>
-            </a:pPr>
-            <a:endParaRPr lang="en-US" sz="800" dirty="0"/>
-          </a:p>
-        </p:txBody>
-      </p:sp>
-      <p:sp>
-        <p:nvSpPr>
-          <p:cNvPr id="27" name="Shape 25"/>
-          <p:cNvSpPr/>
-          <p:nvPr/>
-        </p:nvSpPr>
-        <p:spPr>
-          <a:xfrm>
-            <a:off x="777240" y="3662680"/>
-            <a:ext cx="3994785" cy="467360"/>
-          </a:xfrm>
-          <a:prstGeom prst="rect">
-            <a:avLst/>
-          </a:prstGeom>
-          <a:solidFill>
-            <a:srgbClr val="FFFFFF">
-              <a:alpha val="0"/>
-            </a:srgbClr>
-          </a:solidFill>
-          <a:ln w="5080">
-            <a:solidFill>
-              <a:srgbClr val="E2E2E2"/>
-            </a:solidFill>
-            <a:prstDash val="solid"/>
-          </a:ln>
-        </p:spPr>
-        <p:txBody>
-          <a:bodyPr/>
-          <a:lstStyle/>
-          <a:p>
-            <a:endParaRPr lang="en-US"/>
-          </a:p>
-        </p:txBody>
-      </p:sp>
-      <p:sp>
-        <p:nvSpPr>
-          <p:cNvPr id="28" name="Text 26"/>
-          <p:cNvSpPr/>
-          <p:nvPr/>
-        </p:nvSpPr>
-        <p:spPr>
-          <a:xfrm>
-            <a:off x="841248" y="3717544"/>
-            <a:ext cx="3866769" cy="357632"/>
-          </a:xfrm>
-          <a:prstGeom prst="rect">
-            <a:avLst/>
-          </a:prstGeom>
-          <a:noFill/>
-          <a:ln/>
-        </p:spPr>
-        <p:txBody>
-          <a:bodyPr wrap="square" lIns="254" tIns="254" rIns="254" bIns="254" rtlCol="0" anchor="ctr">
-            <a:normAutofit/>
-          </a:bodyPr>
-          <a:lstStyle/>
-          <a:p>
-            <a:pPr marL="0" indent="0">
-              <a:buNone/>
-            </a:pPr>
-            <a:r>
-              <a:rPr lang="en-US" sz="800" b="1" dirty="0">
-                <a:solidFill>
-                  <a:srgbClr val="CC0000"/>
-                </a:solidFill>
-              </a:rPr>
-              <a:t>Scaling or preprocessing plan</a:t>
-            </a:r>
-            <a:endParaRPr lang="en-US" sz="800" dirty="0"/>
-          </a:p>
-        </p:txBody>
-      </p:sp>
-      <p:sp>
-        <p:nvSpPr>
-          <p:cNvPr id="29" name="Shape 27"/>
-          <p:cNvSpPr/>
-          <p:nvPr/>
-        </p:nvSpPr>
-        <p:spPr>
-          <a:xfrm>
-            <a:off x="4772025" y="3662680"/>
-            <a:ext cx="6657975" cy="467360"/>
-          </a:xfrm>
-          <a:prstGeom prst="rect">
-            <a:avLst/>
-          </a:prstGeom>
-          <a:solidFill>
-            <a:srgbClr val="FFFFFF">
-              <a:alpha val="0"/>
-            </a:srgbClr>
-          </a:solidFill>
-          <a:ln w="5080">
-            <a:solidFill>
-              <a:srgbClr val="E2E2E2"/>
-            </a:solidFill>
-            <a:prstDash val="solid"/>
-          </a:ln>
-        </p:spPr>
-        <p:txBody>
-          <a:bodyPr/>
-          <a:lstStyle/>
-          <a:p>
-            <a:endParaRPr lang="en-US"/>
-          </a:p>
-        </p:txBody>
-      </p:sp>
-      <p:sp>
-        <p:nvSpPr>
-          <p:cNvPr id="30" name="Text 28"/>
-          <p:cNvSpPr/>
-          <p:nvPr/>
-        </p:nvSpPr>
-        <p:spPr>
-          <a:xfrm>
-            <a:off x="4836033" y="3717544"/>
-            <a:ext cx="6529959" cy="357632"/>
-          </a:xfrm>
-          <a:prstGeom prst="rect">
-            <a:avLst/>
-          </a:prstGeom>
-          <a:noFill/>
-          <a:ln/>
-        </p:spPr>
-        <p:txBody>
-          <a:bodyPr wrap="square" lIns="254" tIns="254" rIns="254" bIns="254" rtlCol="0" anchor="ctr">
-            <a:normAutofit/>
-          </a:bodyPr>
-          <a:lstStyle/>
-          <a:p>
-            <a:pPr marL="0" indent="0">
-              <a:buNone/>
-            </a:pPr>
-            <a:endParaRPr lang="en-US" sz="800" dirty="0"/>
-          </a:p>
-        </p:txBody>
-      </p:sp>
-      <p:sp>
-        <p:nvSpPr>
-          <p:cNvPr id="31" name="Shape 29"/>
-          <p:cNvSpPr/>
-          <p:nvPr/>
-        </p:nvSpPr>
-        <p:spPr>
-          <a:xfrm>
-            <a:off x="777240" y="4130040"/>
-            <a:ext cx="3994785" cy="467360"/>
-          </a:xfrm>
-          <a:prstGeom prst="rect">
-            <a:avLst/>
-          </a:prstGeom>
-          <a:solidFill>
-            <a:srgbClr val="FFFFFF">
-              <a:alpha val="0"/>
-            </a:srgbClr>
-          </a:solidFill>
-          <a:ln w="5080">
-            <a:solidFill>
-              <a:srgbClr val="E2E2E2"/>
-            </a:solidFill>
-            <a:prstDash val="solid"/>
-          </a:ln>
-        </p:spPr>
-        <p:txBody>
-          <a:bodyPr/>
-          <a:lstStyle/>
-          <a:p>
-            <a:endParaRPr lang="en-US"/>
-          </a:p>
-        </p:txBody>
-      </p:sp>
-      <p:sp>
-        <p:nvSpPr>
-          <p:cNvPr id="32" name="Text 30"/>
-          <p:cNvSpPr/>
-          <p:nvPr/>
-        </p:nvSpPr>
-        <p:spPr>
-          <a:xfrm>
-            <a:off x="841248" y="4184904"/>
-            <a:ext cx="3866769" cy="357632"/>
-          </a:xfrm>
-          <a:prstGeom prst="rect">
-            <a:avLst/>
-          </a:prstGeom>
-          <a:noFill/>
-          <a:ln/>
-        </p:spPr>
-        <p:txBody>
-          <a:bodyPr wrap="square" lIns="254" tIns="254" rIns="254" bIns="254" rtlCol="0" anchor="ctr">
-            <a:normAutofit/>
-          </a:bodyPr>
-          <a:lstStyle/>
-          <a:p>
-            <a:pPr marL="0" indent="0">
-              <a:buNone/>
-            </a:pPr>
-            <a:r>
-              <a:rPr lang="en-US" sz="800" b="1" dirty="0">
-                <a:solidFill>
-                  <a:srgbClr val="CC0000"/>
-                </a:solidFill>
-              </a:rPr>
-              <a:t>Candidate method: k-means, hierarchy, DBSCAN</a:t>
-            </a:r>
-            <a:endParaRPr lang="en-US" sz="800" dirty="0"/>
-          </a:p>
-        </p:txBody>
-      </p:sp>
-      <p:sp>
-        <p:nvSpPr>
-          <p:cNvPr id="33" name="Shape 31"/>
-          <p:cNvSpPr/>
-          <p:nvPr/>
-        </p:nvSpPr>
-        <p:spPr>
-          <a:xfrm>
-            <a:off x="4772025" y="4130040"/>
-            <a:ext cx="6657975" cy="467360"/>
-          </a:xfrm>
-          <a:prstGeom prst="rect">
-            <a:avLst/>
-          </a:prstGeom>
-          <a:solidFill>
-            <a:srgbClr val="FFFFFF">
-              <a:alpha val="0"/>
-            </a:srgbClr>
-          </a:solidFill>
-          <a:ln w="5080">
-            <a:solidFill>
-              <a:srgbClr val="E2E2E2"/>
-            </a:solidFill>
-            <a:prstDash val="solid"/>
-          </a:ln>
-        </p:spPr>
-        <p:txBody>
-          <a:bodyPr/>
-          <a:lstStyle/>
-          <a:p>
-            <a:endParaRPr lang="en-US"/>
-          </a:p>
-        </p:txBody>
-      </p:sp>
-      <p:sp>
-        <p:nvSpPr>
-          <p:cNvPr id="34" name="Text 32"/>
-          <p:cNvSpPr/>
-          <p:nvPr/>
-        </p:nvSpPr>
-        <p:spPr>
-          <a:xfrm>
-            <a:off x="4836033" y="4184904"/>
-            <a:ext cx="6529959" cy="357632"/>
-          </a:xfrm>
-          <a:prstGeom prst="rect">
-            <a:avLst/>
-          </a:prstGeom>
-          <a:noFill/>
-          <a:ln/>
-        </p:spPr>
-        <p:txBody>
-          <a:bodyPr wrap="square" lIns="254" tIns="254" rIns="254" bIns="254" rtlCol="0" anchor="ctr">
-            <a:normAutofit/>
-          </a:bodyPr>
-          <a:lstStyle/>
-          <a:p>
-            <a:pPr marL="0" indent="0">
-              <a:buNone/>
-            </a:pPr>
-            <a:endParaRPr lang="en-US" sz="800" dirty="0"/>
-          </a:p>
-        </p:txBody>
-      </p:sp>
-      <p:sp>
-        <p:nvSpPr>
-          <p:cNvPr id="35" name="Shape 33"/>
-          <p:cNvSpPr/>
-          <p:nvPr/>
-        </p:nvSpPr>
-        <p:spPr>
-          <a:xfrm>
-            <a:off x="777240" y="4597400"/>
-            <a:ext cx="3994785" cy="467360"/>
-          </a:xfrm>
-          <a:prstGeom prst="rect">
-            <a:avLst/>
-          </a:prstGeom>
-          <a:solidFill>
-            <a:srgbClr val="FFFFFF">
-              <a:alpha val="0"/>
-            </a:srgbClr>
-          </a:solidFill>
-          <a:ln w="5080">
-            <a:solidFill>
-              <a:srgbClr val="E2E2E2"/>
-            </a:solidFill>
-            <a:prstDash val="solid"/>
-          </a:ln>
-        </p:spPr>
-        <p:txBody>
-          <a:bodyPr/>
-          <a:lstStyle/>
-          <a:p>
-            <a:endParaRPr lang="en-US"/>
-          </a:p>
-        </p:txBody>
-      </p:sp>
-      <p:sp>
-        <p:nvSpPr>
-          <p:cNvPr id="36" name="Text 34"/>
-          <p:cNvSpPr/>
-          <p:nvPr/>
-        </p:nvSpPr>
-        <p:spPr>
-          <a:xfrm>
-            <a:off x="841248" y="4652264"/>
-            <a:ext cx="3866769" cy="357632"/>
-          </a:xfrm>
-          <a:prstGeom prst="rect">
-            <a:avLst/>
-          </a:prstGeom>
-          <a:noFill/>
-          <a:ln/>
-        </p:spPr>
-        <p:txBody>
-          <a:bodyPr wrap="square" lIns="254" tIns="254" rIns="254" bIns="254" rtlCol="0" anchor="ctr">
-            <a:normAutofit/>
-          </a:bodyPr>
-          <a:lstStyle/>
-          <a:p>
-            <a:pPr marL="0" indent="0">
-              <a:buNone/>
-            </a:pPr>
-            <a:r>
-              <a:rPr lang="en-US" sz="800" b="1" dirty="0">
-                <a:solidFill>
-                  <a:srgbClr val="CC0000"/>
-                </a:solidFill>
-              </a:rPr>
-              <a:t>Validation approach</a:t>
-            </a:r>
-            <a:endParaRPr lang="en-US" sz="800" dirty="0"/>
-          </a:p>
-        </p:txBody>
-      </p:sp>
-      <p:sp>
-        <p:nvSpPr>
-          <p:cNvPr id="37" name="Shape 35"/>
-          <p:cNvSpPr/>
-          <p:nvPr/>
-        </p:nvSpPr>
-        <p:spPr>
-          <a:xfrm>
-            <a:off x="4772025" y="4597400"/>
-            <a:ext cx="6657975" cy="467360"/>
-          </a:xfrm>
-          <a:prstGeom prst="rect">
-            <a:avLst/>
-          </a:prstGeom>
-          <a:solidFill>
-            <a:srgbClr val="FFFFFF">
-              <a:alpha val="0"/>
-            </a:srgbClr>
-          </a:solidFill>
-          <a:ln w="5080">
-            <a:solidFill>
-              <a:srgbClr val="E2E2E2"/>
-            </a:solidFill>
-            <a:prstDash val="solid"/>
-          </a:ln>
-        </p:spPr>
-        <p:txBody>
-          <a:bodyPr/>
-          <a:lstStyle/>
-          <a:p>
-            <a:endParaRPr lang="en-US"/>
-          </a:p>
-        </p:txBody>
-      </p:sp>
-      <p:sp>
-        <p:nvSpPr>
-          <p:cNvPr id="38" name="Text 36"/>
-          <p:cNvSpPr/>
-          <p:nvPr/>
-        </p:nvSpPr>
-        <p:spPr>
-          <a:xfrm>
-            <a:off x="4836033" y="4652264"/>
-            <a:ext cx="6529959" cy="357632"/>
-          </a:xfrm>
-          <a:prstGeom prst="rect">
-            <a:avLst/>
-          </a:prstGeom>
-          <a:noFill/>
-          <a:ln/>
-        </p:spPr>
-        <p:txBody>
-          <a:bodyPr wrap="square" lIns="254" tIns="254" rIns="254" bIns="254" rtlCol="0" anchor="ctr">
-            <a:normAutofit/>
-          </a:bodyPr>
-          <a:lstStyle/>
-          <a:p>
-            <a:pPr marL="0" indent="0">
-              <a:buNone/>
-            </a:pPr>
-            <a:endParaRPr lang="en-US" sz="800" dirty="0"/>
-          </a:p>
-        </p:txBody>
-      </p:sp>
-      <p:sp>
-        <p:nvSpPr>
-          <p:cNvPr id="39" name="Shape 37"/>
-          <p:cNvSpPr/>
-          <p:nvPr/>
-        </p:nvSpPr>
-        <p:spPr>
-          <a:xfrm>
-            <a:off x="777240" y="5064760"/>
-            <a:ext cx="3994785" cy="467360"/>
-          </a:xfrm>
-          <a:prstGeom prst="rect">
-            <a:avLst/>
-          </a:prstGeom>
-          <a:solidFill>
-            <a:srgbClr val="FFFFFF">
-              <a:alpha val="0"/>
-            </a:srgbClr>
-          </a:solidFill>
-          <a:ln w="5080">
-            <a:solidFill>
-              <a:srgbClr val="E2E2E2"/>
-            </a:solidFill>
-            <a:prstDash val="solid"/>
-          </a:ln>
-        </p:spPr>
-        <p:txBody>
-          <a:bodyPr/>
-          <a:lstStyle/>
-          <a:p>
-            <a:endParaRPr lang="en-US"/>
-          </a:p>
-        </p:txBody>
-      </p:sp>
-      <p:sp>
-        <p:nvSpPr>
-          <p:cNvPr id="40" name="Text 38"/>
-          <p:cNvSpPr/>
-          <p:nvPr/>
-        </p:nvSpPr>
-        <p:spPr>
-          <a:xfrm>
-            <a:off x="841248" y="5119624"/>
-            <a:ext cx="3866769" cy="357632"/>
-          </a:xfrm>
-          <a:prstGeom prst="rect">
-            <a:avLst/>
-          </a:prstGeom>
-          <a:noFill/>
-          <a:ln/>
-        </p:spPr>
-        <p:txBody>
-          <a:bodyPr wrap="square" lIns="254" tIns="254" rIns="254" bIns="254" rtlCol="0" anchor="ctr">
-            <a:normAutofit/>
-          </a:bodyPr>
-          <a:lstStyle/>
-          <a:p>
-            <a:pPr marL="0" indent="0">
-              <a:buNone/>
-            </a:pPr>
-            <a:r>
-              <a:rPr lang="en-US" sz="800" b="1" dirty="0">
-                <a:solidFill>
-                  <a:srgbClr val="CC0000"/>
-                </a:solidFill>
-              </a:rPr>
-              <a:t>What would make a cluster meaningful?</a:t>
-            </a:r>
-            <a:endParaRPr lang="en-US" sz="800" dirty="0"/>
-          </a:p>
-        </p:txBody>
-      </p:sp>
-      <p:sp>
-        <p:nvSpPr>
-          <p:cNvPr id="41" name="Shape 39"/>
-          <p:cNvSpPr/>
-          <p:nvPr/>
-        </p:nvSpPr>
-        <p:spPr>
-          <a:xfrm>
-            <a:off x="4772025" y="5064760"/>
-            <a:ext cx="6657975" cy="467360"/>
-          </a:xfrm>
-          <a:prstGeom prst="rect">
-            <a:avLst/>
-          </a:prstGeom>
-          <a:solidFill>
-            <a:srgbClr val="FFFFFF">
-              <a:alpha val="0"/>
-            </a:srgbClr>
-          </a:solidFill>
-          <a:ln w="5080">
-            <a:solidFill>
-              <a:srgbClr val="E2E2E2"/>
-            </a:solidFill>
-            <a:prstDash val="solid"/>
-          </a:ln>
-        </p:spPr>
-        <p:txBody>
-          <a:bodyPr/>
-          <a:lstStyle/>
-          <a:p>
-            <a:endParaRPr lang="en-US"/>
-          </a:p>
-        </p:txBody>
-      </p:sp>
-      <p:sp>
-        <p:nvSpPr>
-          <p:cNvPr id="42" name="Text 40"/>
-          <p:cNvSpPr/>
-          <p:nvPr/>
-        </p:nvSpPr>
-        <p:spPr>
-          <a:xfrm>
-            <a:off x="4836033" y="5119624"/>
-            <a:ext cx="6529959" cy="357632"/>
-          </a:xfrm>
-          <a:prstGeom prst="rect">
-            <a:avLst/>
-          </a:prstGeom>
-          <a:noFill/>
-          <a:ln/>
-        </p:spPr>
-        <p:txBody>
-          <a:bodyPr wrap="square" lIns="254" tIns="254" rIns="254" bIns="254" rtlCol="0" anchor="ctr">
-            <a:normAutofit/>
-          </a:bodyPr>
-          <a:lstStyle/>
-          <a:p>
-            <a:pPr marL="0" indent="0">
-              <a:buNone/>
-            </a:pPr>
-            <a:endParaRPr lang="en-US" sz="800" dirty="0"/>
-          </a:p>
-        </p:txBody>
-      </p:sp>
-      <p:sp>
-        <p:nvSpPr>
-          <p:cNvPr id="43" name="Shape 41"/>
-          <p:cNvSpPr/>
-          <p:nvPr/>
-        </p:nvSpPr>
-        <p:spPr>
-          <a:xfrm>
-            <a:off x="640080" y="6053328"/>
-            <a:ext cx="10927080" cy="384048"/>
-          </a:xfrm>
-          <a:prstGeom prst="roundRect">
-            <a:avLst>
-              <a:gd name="adj" fmla="val 9524"/>
-            </a:avLst>
-          </a:prstGeom>
-          <a:solidFill>
-            <a:srgbClr val="FFFFFF"/>
-          </a:solidFill>
-          <a:ln w="10160">
-            <a:solidFill>
-              <a:srgbClr val="F0A0A0"/>
-            </a:solidFill>
-            <a:prstDash val="solid"/>
-          </a:ln>
-        </p:spPr>
-        <p:txBody>
-          <a:bodyPr/>
-          <a:lstStyle/>
-          <a:p>
-            <a:endParaRPr lang="en-US"/>
-          </a:p>
-        </p:txBody>
-      </p:sp>
-      <p:sp>
-        <p:nvSpPr>
-          <p:cNvPr id="44" name="Text 42"/>
-          <p:cNvSpPr/>
-          <p:nvPr/>
-        </p:nvSpPr>
-        <p:spPr>
-          <a:xfrm>
-            <a:off x="777240" y="6172200"/>
-            <a:ext cx="10652760" cy="128016"/>
-          </a:xfrm>
-          <a:prstGeom prst="rect">
-            <a:avLst/>
-          </a:prstGeom>
-          <a:noFill/>
-          <a:ln/>
-        </p:spPr>
-        <p:txBody>
-          <a:bodyPr wrap="square" lIns="0" tIns="0" rIns="0" bIns="0" rtlCol="0" anchor="ctr">
-            <a:normAutofit/>
-          </a:bodyPr>
-          <a:lstStyle/>
-          <a:p>
-            <a:pPr marL="0" indent="0" algn="ctr">
-              <a:buNone/>
-            </a:pPr>
-            <a:r>
-              <a:rPr lang="en-US" sz="820" b="1" dirty="0">
-                <a:solidFill>
-                  <a:srgbClr val="CC0000"/>
-                </a:solidFill>
-              </a:rPr>
-              <a:t>Deliverable: one unsupervised learning plan with interpretation and validation criteria.</a:t>
-            </a:r>
-            <a:endParaRPr lang="en-US" sz="820" dirty="0"/>
-          </a:p>
-        </p:txBody>
-      </p:sp>
-    </p:spTree>
-  </p:cSld>
-  <p:clrMapOvr>
-    <a:masterClrMapping/>
-  </p:clrMapOvr>
-</p:sld>
-</file>
-
-<file path=ppt/slides/slide15.xml><?xml version="1.0" encoding="utf-8"?>
 <p:sld xmlns:a="http://schemas.openxmlformats.org/drawingml/2006/main" xmlns:r="http://schemas.openxmlformats.org/officeDocument/2006/relationships" xmlns:p="http://schemas.openxmlformats.org/presentationml/2006/main">
   <p:cSld name="Slide 15">
     <p:bg>
@@ -8042,14 +6610,14 @@
               <a:buNone/>
             </a:pPr>
             <a:r>
-              <a:rPr lang="en-US" sz="550" b="1" dirty="0">
+              <a:rPr lang="en-US" sz="1200" b="1" dirty="0">
                 <a:solidFill>
                   <a:srgbClr val="555555"/>
                 </a:solidFill>
               </a:rPr>
               <a:t>APPLIED AI DESIGN WORKSHOP</a:t>
             </a:r>
-            <a:endParaRPr lang="en-US" sz="550" dirty="0"/>
+            <a:endParaRPr lang="en-US" sz="1200" dirty="0"/>
           </a:p>
         </p:txBody>
       </p:sp>
@@ -8078,14 +6646,14 @@
               <a:buNone/>
             </a:pPr>
             <a:r>
-              <a:rPr lang="en-US" sz="550" dirty="0">
+              <a:rPr lang="en-US" sz="1200" dirty="0">
                 <a:solidFill>
                   <a:srgbClr val="555555"/>
                 </a:solidFill>
               </a:rPr>
               <a:t>Session 4</a:t>
             </a:r>
-            <a:endParaRPr lang="en-US" sz="550" dirty="0"/>
+            <a:endParaRPr lang="en-US" sz="1200" dirty="0"/>
           </a:p>
         </p:txBody>
       </p:sp>
@@ -8121,7 +6689,7 @@
                   <a:srgbClr val="111111"/>
                 </a:solidFill>
               </a:rPr>
-              <a:t>Classroom discussion prompts</a:t>
+              <a:t>Discussion prompts</a:t>
             </a:r>
             <a:endParaRPr lang="en-US" sz="2000" dirty="0"/>
           </a:p>
@@ -8348,14 +6916,14 @@
               <a:buNone/>
             </a:pPr>
             <a:r>
-              <a:rPr lang="en-US" sz="900" dirty="0">
+              <a:rPr lang="en-US" sz="1200" dirty="0">
                 <a:solidFill>
                   <a:srgbClr val="111111"/>
                 </a:solidFill>
               </a:rPr>
               <a:t>Unsupervised learning helps faculty explore structure, generate hypotheses, and guide data collection — but it does not replace labels, experiments, or domain judgment.</a:t>
             </a:r>
-            <a:endParaRPr lang="en-US" sz="900" dirty="0"/>
+            <a:endParaRPr lang="en-US" sz="1200" dirty="0"/>
           </a:p>
         </p:txBody>
       </p:sp>
@@ -8412,7 +6980,7 @@
         </p:spPr>
         <p:txBody>
           <a:bodyPr wrap="square" lIns="0" tIns="0" rIns="0" bIns="0" rtlCol="0" anchor="ctr">
-            <a:normAutofit/>
+            <a:noAutofit/>
           </a:bodyPr>
           <a:lstStyle/>
           <a:p>
@@ -8420,14 +6988,14 @@
               <a:buNone/>
             </a:pPr>
             <a:r>
-              <a:rPr lang="en-US" sz="820" b="1" dirty="0">
+              <a:rPr lang="en-US" sz="1200" b="1" dirty="0">
                 <a:solidFill>
                   <a:srgbClr val="CC0000"/>
                 </a:solidFill>
               </a:rPr>
               <a:t>The most important output is not a cluster label — it is a defensible interpretation plan.</a:t>
             </a:r>
-            <a:endParaRPr lang="en-US" sz="820" dirty="0"/>
+            <a:endParaRPr lang="en-US" sz="1200" dirty="0"/>
           </a:p>
         </p:txBody>
       </p:sp>
@@ -8439,7 +7007,7 @@
 </p:sld>
 </file>
 
-<file path=ppt/slides/slide16.xml><?xml version="1.0" encoding="utf-8"?>
+<file path=ppt/slides/slide15.xml><?xml version="1.0" encoding="utf-8"?>
 <p:sld xmlns:a="http://schemas.openxmlformats.org/drawingml/2006/main" xmlns:r="http://schemas.openxmlformats.org/officeDocument/2006/relationships" xmlns:p="http://schemas.openxmlformats.org/presentationml/2006/main">
   <p:cSld name="Slide 16">
     <p:bg>
@@ -8521,14 +7089,14 @@
               <a:buNone/>
             </a:pPr>
             <a:r>
-              <a:rPr lang="en-US" sz="550" b="1" dirty="0">
+              <a:rPr lang="en-US" sz="1200" b="1" dirty="0">
                 <a:solidFill>
                   <a:srgbClr val="555555"/>
                 </a:solidFill>
               </a:rPr>
               <a:t>APPLIED AI DESIGN WORKSHOP</a:t>
             </a:r>
-            <a:endParaRPr lang="en-US" sz="550" dirty="0"/>
+            <a:endParaRPr lang="en-US" sz="1200" dirty="0"/>
           </a:p>
         </p:txBody>
       </p:sp>
@@ -8557,14 +7125,14 @@
               <a:buNone/>
             </a:pPr>
             <a:r>
-              <a:rPr lang="en-US" sz="550" dirty="0">
+              <a:rPr lang="en-US" sz="1200" dirty="0">
                 <a:solidFill>
                   <a:srgbClr val="555555"/>
                 </a:solidFill>
               </a:rPr>
               <a:t>Session 4</a:t>
             </a:r>
-            <a:endParaRPr lang="en-US" sz="550" dirty="0"/>
+            <a:endParaRPr lang="en-US" sz="1200" dirty="0"/>
           </a:p>
         </p:txBody>
       </p:sp>
@@ -8705,70 +7273,70 @@
               <a:buNone/>
             </a:pPr>
             <a:r>
-              <a:rPr lang="en-US" sz="900" dirty="0">
+              <a:rPr lang="en-US" sz="1200" dirty="0">
                 <a:solidFill>
                   <a:srgbClr val="111111"/>
                 </a:solidFill>
               </a:rPr>
               <a:t>• Define the discovery question</a:t>
             </a:r>
-            <a:endParaRPr lang="en-US" sz="900" dirty="0"/>
-          </a:p>
-          <a:p>
-            <a:pPr marL="0" indent="0">
-              <a:buNone/>
-            </a:pPr>
-            <a:r>
-              <a:rPr lang="en-US" sz="900" dirty="0">
+            <a:endParaRPr lang="en-US" sz="1200" dirty="0"/>
+          </a:p>
+          <a:p>
+            <a:pPr marL="0" indent="0">
+              <a:buNone/>
+            </a:pPr>
+            <a:r>
+              <a:rPr lang="en-US" sz="1200" dirty="0">
                 <a:solidFill>
                   <a:srgbClr val="111111"/>
                 </a:solidFill>
               </a:rPr>
               <a:t>• Choose the unit of observation</a:t>
             </a:r>
-            <a:endParaRPr lang="en-US" sz="900" dirty="0"/>
-          </a:p>
-          <a:p>
-            <a:pPr marL="0" indent="0">
-              <a:buNone/>
-            </a:pPr>
-            <a:r>
-              <a:rPr lang="en-US" sz="900" dirty="0">
+            <a:endParaRPr lang="en-US" sz="1200" dirty="0"/>
+          </a:p>
+          <a:p>
+            <a:pPr marL="0" indent="0">
+              <a:buNone/>
+            </a:pPr>
+            <a:r>
+              <a:rPr lang="en-US" sz="1200" dirty="0">
                 <a:solidFill>
                   <a:srgbClr val="111111"/>
                 </a:solidFill>
               </a:rPr>
               <a:t>• Select meaningful features</a:t>
             </a:r>
-            <a:endParaRPr lang="en-US" sz="900" dirty="0"/>
-          </a:p>
-          <a:p>
-            <a:pPr marL="0" indent="0">
-              <a:buNone/>
-            </a:pPr>
-            <a:r>
-              <a:rPr lang="en-US" sz="900" dirty="0">
+            <a:endParaRPr lang="en-US" sz="1200" dirty="0"/>
+          </a:p>
+          <a:p>
+            <a:pPr marL="0" indent="0">
+              <a:buNone/>
+            </a:pPr>
+            <a:r>
+              <a:rPr lang="en-US" sz="1200" dirty="0">
                 <a:solidFill>
                   <a:srgbClr val="111111"/>
                 </a:solidFill>
               </a:rPr>
               <a:t>• Remove IDs and leakage variables</a:t>
             </a:r>
-            <a:endParaRPr lang="en-US" sz="900" dirty="0"/>
-          </a:p>
-          <a:p>
-            <a:pPr marL="0" indent="0">
-              <a:buNone/>
-            </a:pPr>
-            <a:r>
-              <a:rPr lang="en-US" sz="900" dirty="0">
+            <a:endParaRPr lang="en-US" sz="1200" dirty="0"/>
+          </a:p>
+          <a:p>
+            <a:pPr marL="0" indent="0">
+              <a:buNone/>
+            </a:pPr>
+            <a:r>
+              <a:rPr lang="en-US" sz="1200" dirty="0">
                 <a:solidFill>
                   <a:srgbClr val="111111"/>
                 </a:solidFill>
               </a:rPr>
               <a:t>• Scale numeric data</a:t>
             </a:r>
-            <a:endParaRPr lang="en-US" sz="900" dirty="0"/>
+            <a:endParaRPr lang="en-US" sz="1200" dirty="0"/>
           </a:p>
         </p:txBody>
       </p:sp>
@@ -8871,70 +7439,70 @@
               <a:buNone/>
             </a:pPr>
             <a:r>
-              <a:rPr lang="en-US" sz="900" dirty="0">
+              <a:rPr lang="en-US" sz="1200" dirty="0">
                 <a:solidFill>
                   <a:srgbClr val="111111"/>
                 </a:solidFill>
               </a:rPr>
               <a:t>• Compare simple methods</a:t>
             </a:r>
-            <a:endParaRPr lang="en-US" sz="900" dirty="0"/>
-          </a:p>
-          <a:p>
-            <a:pPr marL="0" indent="0">
-              <a:buNone/>
-            </a:pPr>
-            <a:r>
-              <a:rPr lang="en-US" sz="900" dirty="0">
+            <a:endParaRPr lang="en-US" sz="1200" dirty="0"/>
+          </a:p>
+          <a:p>
+            <a:pPr marL="0" indent="0">
+              <a:buNone/>
+            </a:pPr>
+            <a:r>
+              <a:rPr lang="en-US" sz="1200" dirty="0">
                 <a:solidFill>
                   <a:srgbClr val="111111"/>
                 </a:solidFill>
               </a:rPr>
               <a:t>• Visualize with PCA</a:t>
             </a:r>
-            <a:endParaRPr lang="en-US" sz="900" dirty="0"/>
-          </a:p>
-          <a:p>
-            <a:pPr marL="0" indent="0">
-              <a:buNone/>
-            </a:pPr>
-            <a:r>
-              <a:rPr lang="en-US" sz="900" dirty="0">
+            <a:endParaRPr lang="en-US" sz="1200" dirty="0"/>
+          </a:p>
+          <a:p>
+            <a:pPr marL="0" indent="0">
+              <a:buNone/>
+            </a:pPr>
+            <a:r>
+              <a:rPr lang="en-US" sz="1200" dirty="0">
                 <a:solidFill>
                   <a:srgbClr val="111111"/>
                 </a:solidFill>
               </a:rPr>
               <a:t>• Check sensitivity to K and features</a:t>
             </a:r>
-            <a:endParaRPr lang="en-US" sz="900" dirty="0"/>
-          </a:p>
-          <a:p>
-            <a:pPr marL="0" indent="0">
-              <a:buNone/>
-            </a:pPr>
-            <a:r>
-              <a:rPr lang="en-US" sz="900" dirty="0">
+            <a:endParaRPr lang="en-US" sz="1200" dirty="0"/>
+          </a:p>
+          <a:p>
+            <a:pPr marL="0" indent="0">
+              <a:buNone/>
+            </a:pPr>
+            <a:r>
+              <a:rPr lang="en-US" sz="1200" dirty="0">
                 <a:solidFill>
                   <a:srgbClr val="111111"/>
                 </a:solidFill>
               </a:rPr>
               <a:t>• Inspect representative cases</a:t>
             </a:r>
-            <a:endParaRPr lang="en-US" sz="900" dirty="0"/>
-          </a:p>
-          <a:p>
-            <a:pPr marL="0" indent="0">
-              <a:buNone/>
-            </a:pPr>
-            <a:r>
-              <a:rPr lang="en-US" sz="900" dirty="0">
+            <a:endParaRPr lang="en-US" sz="1200" dirty="0"/>
+          </a:p>
+          <a:p>
+            <a:pPr marL="0" indent="0">
+              <a:buNone/>
+            </a:pPr>
+            <a:r>
+              <a:rPr lang="en-US" sz="1200" dirty="0">
                 <a:solidFill>
                   <a:srgbClr val="111111"/>
                 </a:solidFill>
               </a:rPr>
               <a:t>• Record assumptions</a:t>
             </a:r>
-            <a:endParaRPr lang="en-US" sz="900" dirty="0"/>
+            <a:endParaRPr lang="en-US" sz="1200" dirty="0"/>
           </a:p>
         </p:txBody>
       </p:sp>
@@ -9037,70 +7605,70 @@
               <a:buNone/>
             </a:pPr>
             <a:r>
-              <a:rPr lang="en-US" sz="900" dirty="0">
+              <a:rPr lang="en-US" sz="1200" dirty="0">
                 <a:solidFill>
                   <a:srgbClr val="111111"/>
                 </a:solidFill>
               </a:rPr>
               <a:t>• Describe cluster profiles</a:t>
             </a:r>
-            <a:endParaRPr lang="en-US" sz="900" dirty="0"/>
-          </a:p>
-          <a:p>
-            <a:pPr marL="0" indent="0">
-              <a:buNone/>
-            </a:pPr>
-            <a:r>
-              <a:rPr lang="en-US" sz="900" dirty="0">
+            <a:endParaRPr lang="en-US" sz="1200" dirty="0"/>
+          </a:p>
+          <a:p>
+            <a:pPr marL="0" indent="0">
+              <a:buNone/>
+            </a:pPr>
+            <a:r>
+              <a:rPr lang="en-US" sz="1200" dirty="0">
                 <a:solidFill>
                   <a:srgbClr val="111111"/>
                 </a:solidFill>
               </a:rPr>
               <a:t>• Validate with metadata or experts</a:t>
             </a:r>
-            <a:endParaRPr lang="en-US" sz="900" dirty="0"/>
-          </a:p>
-          <a:p>
-            <a:pPr marL="0" indent="0">
-              <a:buNone/>
-            </a:pPr>
-            <a:r>
-              <a:rPr lang="en-US" sz="900" dirty="0">
+            <a:endParaRPr lang="en-US" sz="1200" dirty="0"/>
+          </a:p>
+          <a:p>
+            <a:pPr marL="0" indent="0">
+              <a:buNone/>
+            </a:pPr>
+            <a:r>
+              <a:rPr lang="en-US" sz="1200" dirty="0">
                 <a:solidFill>
                   <a:srgbClr val="111111"/>
                 </a:solidFill>
               </a:rPr>
               <a:t>• Avoid causal claims</a:t>
             </a:r>
-            <a:endParaRPr lang="en-US" sz="900" dirty="0"/>
-          </a:p>
-          <a:p>
-            <a:pPr marL="0" indent="0">
-              <a:buNone/>
-            </a:pPr>
-            <a:r>
-              <a:rPr lang="en-US" sz="900" dirty="0">
+            <a:endParaRPr lang="en-US" sz="1200" dirty="0"/>
+          </a:p>
+          <a:p>
+            <a:pPr marL="0" indent="0">
+              <a:buNone/>
+            </a:pPr>
+            <a:r>
+              <a:rPr lang="en-US" sz="1200" dirty="0">
                 <a:solidFill>
                   <a:srgbClr val="111111"/>
                 </a:solidFill>
               </a:rPr>
               <a:t>• Plan follow-up labeling</a:t>
             </a:r>
-            <a:endParaRPr lang="en-US" sz="900" dirty="0"/>
-          </a:p>
-          <a:p>
-            <a:pPr marL="0" indent="0">
-              <a:buNone/>
-            </a:pPr>
-            <a:r>
-              <a:rPr lang="en-US" sz="900" dirty="0">
+            <a:endParaRPr lang="en-US" sz="1200" dirty="0"/>
+          </a:p>
+          <a:p>
+            <a:pPr marL="0" indent="0">
+              <a:buNone/>
+            </a:pPr>
+            <a:r>
+              <a:rPr lang="en-US" sz="1200" dirty="0">
                 <a:solidFill>
                   <a:srgbClr val="111111"/>
                 </a:solidFill>
               </a:rPr>
               <a:t>• State limitations clearly</a:t>
             </a:r>
-            <a:endParaRPr lang="en-US" sz="900" dirty="0"/>
+            <a:endParaRPr lang="en-US" sz="1200" dirty="0"/>
           </a:p>
         </p:txBody>
       </p:sp>
@@ -9157,7 +7725,7 @@
         </p:spPr>
         <p:txBody>
           <a:bodyPr wrap="square" lIns="0" tIns="0" rIns="0" bIns="0" rtlCol="0" anchor="ctr">
-            <a:normAutofit/>
+            <a:noAutofit/>
           </a:bodyPr>
           <a:lstStyle/>
           <a:p>
@@ -9165,14 +7733,14 @@
               <a:buNone/>
             </a:pPr>
             <a:r>
-              <a:rPr lang="en-US" sz="820" b="1" dirty="0">
+              <a:rPr lang="en-US" sz="1200" b="1" dirty="0">
                 <a:solidFill>
                   <a:srgbClr val="CC0000"/>
                 </a:solidFill>
               </a:rPr>
-              <a:t>Day 4 endpoint: faculty can complete a baseline supervised workflow and design an unsupervised discovery analysis.</a:t>
-            </a:r>
-            <a:endParaRPr lang="en-US" sz="820" dirty="0"/>
+              <a:t>Day 4 endpoint: You can complete a baseline supervised workflow and design an unsupervised discovery analysis.</a:t>
+            </a:r>
+            <a:endParaRPr lang="en-US" sz="1200" dirty="0"/>
           </a:p>
         </p:txBody>
       </p:sp>
@@ -9266,14 +7834,14 @@
               <a:buNone/>
             </a:pPr>
             <a:r>
-              <a:rPr lang="en-US" sz="550" b="1" dirty="0">
+              <a:rPr lang="en-US" sz="1200" b="1" dirty="0">
                 <a:solidFill>
                   <a:srgbClr val="555555"/>
                 </a:solidFill>
               </a:rPr>
               <a:t>APPLIED AI DESIGN WORKSHOP</a:t>
             </a:r>
-            <a:endParaRPr lang="en-US" sz="550" dirty="0"/>
+            <a:endParaRPr lang="en-US" sz="1200" dirty="0"/>
           </a:p>
         </p:txBody>
       </p:sp>
@@ -9302,14 +7870,14 @@
               <a:buNone/>
             </a:pPr>
             <a:r>
-              <a:rPr lang="en-US" sz="550" dirty="0">
+              <a:rPr lang="en-US" sz="1200" dirty="0">
                 <a:solidFill>
                   <a:srgbClr val="555555"/>
                 </a:solidFill>
               </a:rPr>
               <a:t>Session 4</a:t>
             </a:r>
-            <a:endParaRPr lang="en-US" sz="550" dirty="0"/>
+            <a:endParaRPr lang="en-US" sz="1200" dirty="0"/>
           </a:p>
         </p:txBody>
       </p:sp>
@@ -9450,14 +8018,14 @@
               <a:buNone/>
             </a:pPr>
             <a:r>
-              <a:rPr lang="en-US" sz="810" dirty="0">
+              <a:rPr lang="en-US" sz="1200" dirty="0">
                 <a:solidFill>
                   <a:srgbClr val="111111"/>
                 </a:solidFill>
               </a:rPr>
               <a:t>Explain supervised vs. unsupervised learning and when labels are absent</a:t>
             </a:r>
-            <a:endParaRPr lang="en-US" sz="810" dirty="0"/>
+            <a:endParaRPr lang="en-US" sz="1200" dirty="0"/>
           </a:p>
         </p:txBody>
       </p:sp>
@@ -9556,18 +8124,15 @@
           </a:bodyPr>
           <a:lstStyle/>
           <a:p>
-            <a:pPr marL="0" indent="0">
-              <a:buNone/>
-            </a:pPr>
-            <a:r>
-              <a:rPr lang="en-US" sz="810" dirty="0">
+            <a:r>
+              <a:rPr lang="en-US" sz="1200" dirty="0">
                 <a:solidFill>
                   <a:srgbClr val="111111"/>
                 </a:solidFill>
               </a:rPr>
-              <a:t>Describe k-means, hierarchical clustering, and DBSCAN at a conceptual level</a:t>
-            </a:r>
-            <a:endParaRPr lang="en-US" sz="810" dirty="0"/>
+              <a:t>Describe k-means, hierarchical clustering concepts, and DBSCAN at a level</a:t>
+            </a:r>
+            <a:endParaRPr lang="en-US" sz="1200" dirty="0"/>
           </a:p>
         </p:txBody>
       </p:sp>
@@ -9670,14 +8235,14 @@
               <a:buNone/>
             </a:pPr>
             <a:r>
-              <a:rPr lang="en-US" sz="810" dirty="0">
+              <a:rPr lang="en-US" sz="1200" dirty="0">
                 <a:solidFill>
                   <a:srgbClr val="111111"/>
                 </a:solidFill>
               </a:rPr>
               <a:t>Scale variables and choose features before clustering</a:t>
             </a:r>
-            <a:endParaRPr lang="en-US" sz="810" dirty="0"/>
+            <a:endParaRPr lang="en-US" sz="1200" dirty="0"/>
           </a:p>
         </p:txBody>
       </p:sp>
@@ -9780,14 +8345,14 @@
               <a:buNone/>
             </a:pPr>
             <a:r>
-              <a:rPr lang="en-US" sz="810" dirty="0">
+              <a:rPr lang="en-US" sz="1200" dirty="0">
                 <a:solidFill>
                   <a:srgbClr val="111111"/>
                 </a:solidFill>
               </a:rPr>
               <a:t>Use metrics, visual inspection, and domain checks to assess structure</a:t>
             </a:r>
-            <a:endParaRPr lang="en-US" sz="810" dirty="0"/>
+            <a:endParaRPr lang="en-US" sz="1200" dirty="0"/>
           </a:p>
         </p:txBody>
       </p:sp>
@@ -9890,14 +8455,14 @@
               <a:buNone/>
             </a:pPr>
             <a:r>
-              <a:rPr lang="en-US" sz="810" dirty="0">
+              <a:rPr lang="en-US" sz="1200" dirty="0">
                 <a:solidFill>
                   <a:srgbClr val="111111"/>
                 </a:solidFill>
               </a:rPr>
               <a:t>Translate clusters into hypotheses without claiming causality or truth</a:t>
             </a:r>
-            <a:endParaRPr lang="en-US" sz="810" dirty="0"/>
+            <a:endParaRPr lang="en-US" sz="1200" dirty="0"/>
           </a:p>
         </p:txBody>
       </p:sp>
@@ -9954,7 +8519,7 @@
         </p:spPr>
         <p:txBody>
           <a:bodyPr wrap="square" lIns="0" tIns="0" rIns="0" bIns="0" rtlCol="0" anchor="ctr">
-            <a:normAutofit/>
+            <a:noAutofit/>
           </a:bodyPr>
           <a:lstStyle/>
           <a:p>
@@ -9962,14 +8527,14 @@
               <a:buNone/>
             </a:pPr>
             <a:r>
-              <a:rPr lang="en-US" sz="820" b="1" dirty="0">
+              <a:rPr lang="en-US" sz="1200" b="1" dirty="0">
                 <a:solidFill>
                   <a:srgbClr val="CC0000"/>
                 </a:solidFill>
               </a:rPr>
               <a:t>Participant output: a clustering plan that includes features, scaling, validation, interpretation, and limitations.</a:t>
             </a:r>
-            <a:endParaRPr lang="en-US" sz="820" dirty="0"/>
+            <a:endParaRPr lang="en-US" sz="1200" dirty="0"/>
           </a:p>
         </p:txBody>
       </p:sp>
@@ -10063,14 +8628,14 @@
               <a:buNone/>
             </a:pPr>
             <a:r>
-              <a:rPr lang="en-US" sz="550" b="1" dirty="0">
+              <a:rPr lang="en-US" sz="1200" b="1" dirty="0">
                 <a:solidFill>
                   <a:srgbClr val="555555"/>
                 </a:solidFill>
               </a:rPr>
               <a:t>APPLIED AI DESIGN WORKSHOP</a:t>
             </a:r>
-            <a:endParaRPr lang="en-US" sz="550" dirty="0"/>
+            <a:endParaRPr lang="en-US" sz="1200" dirty="0"/>
           </a:p>
         </p:txBody>
       </p:sp>
@@ -10099,14 +8664,14 @@
               <a:buNone/>
             </a:pPr>
             <a:r>
-              <a:rPr lang="en-US" sz="550" dirty="0">
+              <a:rPr lang="en-US" sz="1200" dirty="0">
                 <a:solidFill>
                   <a:srgbClr val="555555"/>
                 </a:solidFill>
               </a:rPr>
               <a:t>Session 4</a:t>
             </a:r>
-            <a:endParaRPr lang="en-US" sz="550" dirty="0"/>
+            <a:endParaRPr lang="en-US" sz="1200" dirty="0"/>
           </a:p>
         </p:txBody>
       </p:sp>
@@ -10247,14 +8812,14 @@
               <a:buNone/>
             </a:pPr>
             <a:r>
-              <a:rPr lang="en-US" sz="750" dirty="0">
+              <a:rPr lang="en-US" sz="1200" dirty="0">
                 <a:solidFill>
                   <a:srgbClr val="111111"/>
                 </a:solidFill>
               </a:rPr>
               <a:t>What structure are we looking for?</a:t>
             </a:r>
-            <a:endParaRPr lang="en-US" sz="750" dirty="0"/>
+            <a:endParaRPr lang="en-US" sz="1200" dirty="0"/>
           </a:p>
         </p:txBody>
       </p:sp>
@@ -10389,14 +8954,14 @@
               <a:buNone/>
             </a:pPr>
             <a:r>
-              <a:rPr lang="en-US" sz="750" dirty="0">
+              <a:rPr lang="en-US" sz="1200" dirty="0">
                 <a:solidFill>
                   <a:srgbClr val="111111"/>
                 </a:solidFill>
               </a:rPr>
               <a:t>Scale and select features</a:t>
             </a:r>
-            <a:endParaRPr lang="en-US" sz="750" dirty="0"/>
+            <a:endParaRPr lang="en-US" sz="1200" dirty="0"/>
           </a:p>
         </p:txBody>
       </p:sp>
@@ -10531,14 +9096,14 @@
               <a:buNone/>
             </a:pPr>
             <a:r>
-              <a:rPr lang="en-US" sz="750" dirty="0">
+              <a:rPr lang="en-US" sz="1200" dirty="0">
                 <a:solidFill>
                   <a:srgbClr val="111111"/>
                 </a:solidFill>
               </a:rPr>
               <a:t>k-means, hierarchy, DBSCAN</a:t>
             </a:r>
-            <a:endParaRPr lang="en-US" sz="750" dirty="0"/>
+            <a:endParaRPr lang="en-US" sz="1200" dirty="0"/>
           </a:p>
         </p:txBody>
       </p:sp>
@@ -10673,14 +9238,14 @@
               <a:buNone/>
             </a:pPr>
             <a:r>
-              <a:rPr lang="en-US" sz="750" dirty="0">
+              <a:rPr lang="en-US" sz="1200" dirty="0">
                 <a:solidFill>
                   <a:srgbClr val="111111"/>
                 </a:solidFill>
               </a:rPr>
               <a:t>PCA and cluster plots</a:t>
             </a:r>
-            <a:endParaRPr lang="en-US" sz="750" dirty="0"/>
+            <a:endParaRPr lang="en-US" sz="1200" dirty="0"/>
           </a:p>
         </p:txBody>
       </p:sp>
@@ -10815,14 +9380,14 @@
               <a:buNone/>
             </a:pPr>
             <a:r>
-              <a:rPr lang="en-US" sz="750" dirty="0">
+              <a:rPr lang="en-US" sz="1200" dirty="0">
                 <a:solidFill>
                   <a:srgbClr val="111111"/>
                 </a:solidFill>
               </a:rPr>
               <a:t>Metrics and stability checks</a:t>
             </a:r>
-            <a:endParaRPr lang="en-US" sz="750" dirty="0"/>
+            <a:endParaRPr lang="en-US" sz="1200" dirty="0"/>
           </a:p>
         </p:txBody>
       </p:sp>
@@ -10957,14 +9522,14 @@
               <a:buNone/>
             </a:pPr>
             <a:r>
-              <a:rPr lang="en-US" sz="750" dirty="0">
+              <a:rPr lang="en-US" sz="1200" dirty="0">
                 <a:solidFill>
                   <a:srgbClr val="111111"/>
                 </a:solidFill>
               </a:rPr>
               <a:t>Domain meaning and limits</a:t>
             </a:r>
-            <a:endParaRPr lang="en-US" sz="750" dirty="0"/>
+            <a:endParaRPr lang="en-US" sz="1200" dirty="0"/>
           </a:p>
         </p:txBody>
       </p:sp>
@@ -11034,7 +9599,7 @@
                   <a:srgbClr val="CC0000"/>
                 </a:solidFill>
               </a:rPr>
-              <a:t>Facilitator note</a:t>
+              <a:t>Note</a:t>
             </a:r>
             <a:endParaRPr lang="en-US" sz="950" dirty="0"/>
           </a:p>
@@ -11067,14 +9632,14 @@
               <a:buNone/>
             </a:pPr>
             <a:r>
-              <a:rPr lang="en-US" sz="900" dirty="0">
+              <a:rPr lang="en-US" sz="1200" dirty="0">
                 <a:solidFill>
                   <a:srgbClr val="111111"/>
                 </a:solidFill>
               </a:rPr>
               <a:t>The point is not to “find the right clusters.” The point is to generate defensible hypotheses about structure in unlabeled data.</a:t>
             </a:r>
-            <a:endParaRPr lang="en-US" sz="900" dirty="0"/>
+            <a:endParaRPr lang="en-US" sz="1200" dirty="0"/>
           </a:p>
         </p:txBody>
       </p:sp>
@@ -11131,7 +9696,7 @@
         </p:spPr>
         <p:txBody>
           <a:bodyPr wrap="square" lIns="0" tIns="0" rIns="0" bIns="0" rtlCol="0" anchor="ctr">
-            <a:normAutofit/>
+            <a:noAutofit/>
           </a:bodyPr>
           <a:lstStyle/>
           <a:p>
@@ -11139,14 +9704,14 @@
               <a:buNone/>
             </a:pPr>
             <a:r>
-              <a:rPr lang="en-US" sz="820" b="1" dirty="0">
+              <a:rPr lang="en-US" sz="1200" b="1" dirty="0">
                 <a:solidFill>
                   <a:srgbClr val="CC0000"/>
                 </a:solidFill>
               </a:rPr>
               <a:t>Unsupervised learning supports discovery, exploration, segmentation, and data-quality investigation.</a:t>
             </a:r>
-            <a:endParaRPr lang="en-US" sz="820" dirty="0"/>
+            <a:endParaRPr lang="en-US" sz="1200" dirty="0"/>
           </a:p>
         </p:txBody>
       </p:sp>
@@ -11240,14 +9805,14 @@
               <a:buNone/>
             </a:pPr>
             <a:r>
-              <a:rPr lang="en-US" sz="550" b="1" dirty="0">
+              <a:rPr lang="en-US" sz="1200" b="1" dirty="0">
                 <a:solidFill>
                   <a:srgbClr val="555555"/>
                 </a:solidFill>
               </a:rPr>
               <a:t>APPLIED AI DESIGN WORKSHOP</a:t>
             </a:r>
-            <a:endParaRPr lang="en-US" sz="550" dirty="0"/>
+            <a:endParaRPr lang="en-US" sz="1200" dirty="0"/>
           </a:p>
         </p:txBody>
       </p:sp>
@@ -11276,14 +9841,14 @@
               <a:buNone/>
             </a:pPr>
             <a:r>
-              <a:rPr lang="en-US" sz="550" dirty="0">
+              <a:rPr lang="en-US" sz="1200" dirty="0">
                 <a:solidFill>
                   <a:srgbClr val="555555"/>
                 </a:solidFill>
               </a:rPr>
               <a:t>Session 4</a:t>
             </a:r>
-            <a:endParaRPr lang="en-US" sz="550" dirty="0"/>
+            <a:endParaRPr lang="en-US" sz="1200" dirty="0"/>
           </a:p>
         </p:txBody>
       </p:sp>
@@ -11350,14 +9915,14 @@
               <a:buNone/>
             </a:pPr>
             <a:r>
-              <a:rPr lang="en-US" sz="800" dirty="0">
+              <a:rPr lang="en-US" sz="1200" dirty="0">
                 <a:solidFill>
                   <a:srgbClr val="333333"/>
                 </a:solidFill>
               </a:rPr>
               <a:t>Unsupervised learning searches for structure without a known target label.</a:t>
             </a:r>
-            <a:endParaRPr lang="en-US" sz="800" dirty="0"/>
+            <a:endParaRPr lang="en-US" sz="1200" dirty="0"/>
           </a:p>
         </p:txBody>
       </p:sp>
@@ -11460,90 +10025,90 @@
               <a:buNone/>
             </a:pPr>
             <a:r>
-              <a:rPr lang="en-US" sz="820" dirty="0">
+              <a:rPr lang="en-US" sz="1200" dirty="0">
                 <a:solidFill>
                   <a:srgbClr val="111111"/>
                 </a:solidFill>
               </a:rPr>
               <a:t>Known target label:</a:t>
             </a:r>
-            <a:endParaRPr lang="en-US" sz="820" dirty="0"/>
-          </a:p>
-          <a:p>
-            <a:pPr marL="0" indent="0">
-              <a:buNone/>
-            </a:pPr>
-            <a:r>
-              <a:rPr lang="en-US" sz="820" dirty="0">
+            <a:endParaRPr lang="en-US" sz="1200" dirty="0"/>
+          </a:p>
+          <a:p>
+            <a:pPr marL="0" indent="0">
+              <a:buNone/>
+            </a:pPr>
+            <a:r>
+              <a:rPr lang="en-US" sz="1200" dirty="0">
                 <a:solidFill>
                   <a:srgbClr val="111111"/>
                 </a:solidFill>
               </a:rPr>
               <a:t>• strength value</a:t>
             </a:r>
-            <a:endParaRPr lang="en-US" sz="820" dirty="0"/>
-          </a:p>
-          <a:p>
-            <a:pPr marL="0" indent="0">
-              <a:buNone/>
-            </a:pPr>
-            <a:r>
-              <a:rPr lang="en-US" sz="820" dirty="0">
+            <a:endParaRPr lang="en-US" sz="1200" dirty="0"/>
+          </a:p>
+          <a:p>
+            <a:pPr marL="0" indent="0">
+              <a:buNone/>
+            </a:pPr>
+            <a:r>
+              <a:rPr lang="en-US" sz="1200" dirty="0">
                 <a:solidFill>
                   <a:srgbClr val="111111"/>
                 </a:solidFill>
               </a:rPr>
               <a:t>• defect / no defect</a:t>
             </a:r>
-            <a:endParaRPr lang="en-US" sz="820" dirty="0"/>
-          </a:p>
-          <a:p>
-            <a:pPr marL="0" indent="0">
-              <a:buNone/>
-            </a:pPr>
-            <a:r>
-              <a:rPr lang="en-US" sz="820" dirty="0">
+            <a:endParaRPr lang="en-US" sz="1200" dirty="0"/>
+          </a:p>
+          <a:p>
+            <a:pPr marL="0" indent="0">
+              <a:buNone/>
+            </a:pPr>
+            <a:r>
+              <a:rPr lang="en-US" sz="1200" dirty="0">
                 <a:solidFill>
                   <a:srgbClr val="111111"/>
                 </a:solidFill>
               </a:rPr>
               <a:t>• pass / fail</a:t>
             </a:r>
-            <a:endParaRPr lang="en-US" sz="820" dirty="0"/>
-          </a:p>
-          <a:p>
-            <a:pPr marL="0" indent="0">
-              <a:buNone/>
-            </a:pPr>
-            <a:r>
-              <a:rPr lang="en-US" sz="820" dirty="0">
+            <a:endParaRPr lang="en-US" sz="1200" dirty="0"/>
+          </a:p>
+          <a:p>
+            <a:pPr marL="0" indent="0">
+              <a:buNone/>
+            </a:pPr>
+            <a:r>
+              <a:rPr lang="en-US" sz="1200" dirty="0">
                 <a:solidFill>
                   <a:srgbClr val="111111"/>
                 </a:solidFill>
               </a:rPr>
               <a:t>• diagnosis</a:t>
             </a:r>
-            <a:endParaRPr lang="en-US" sz="820" dirty="0"/>
-          </a:p>
-          <a:p>
-            <a:pPr marL="0" indent="0">
-              <a:buNone/>
-            </a:pPr>
-            <a:endParaRPr lang="en-US" sz="820" dirty="0"/>
-          </a:p>
-          <a:p>
-            <a:pPr marL="0" indent="0">
-              <a:buNone/>
-            </a:pPr>
-            <a:r>
-              <a:rPr lang="en-US" sz="820" dirty="0">
+            <a:endParaRPr lang="en-US" sz="1200" dirty="0"/>
+          </a:p>
+          <a:p>
+            <a:pPr marL="0" indent="0">
+              <a:buNone/>
+            </a:pPr>
+            <a:endParaRPr lang="en-US" sz="1200" dirty="0"/>
+          </a:p>
+          <a:p>
+            <a:pPr marL="0" indent="0">
+              <a:buNone/>
+            </a:pPr>
+            <a:r>
+              <a:rPr lang="en-US" sz="1200" dirty="0">
                 <a:solidFill>
                   <a:srgbClr val="111111"/>
                 </a:solidFill>
               </a:rPr>
               <a:t>Question: can inputs predict the target?</a:t>
             </a:r>
-            <a:endParaRPr lang="en-US" sz="820" dirty="0"/>
+            <a:endParaRPr lang="en-US" sz="1200" dirty="0"/>
           </a:p>
         </p:txBody>
       </p:sp>
@@ -11646,90 +10211,90 @@
               <a:buNone/>
             </a:pPr>
             <a:r>
-              <a:rPr lang="en-US" sz="820" dirty="0">
+              <a:rPr lang="en-US" sz="1200" dirty="0">
                 <a:solidFill>
                   <a:srgbClr val="111111"/>
                 </a:solidFill>
               </a:rPr>
               <a:t>No target label:</a:t>
             </a:r>
-            <a:endParaRPr lang="en-US" sz="820" dirty="0"/>
-          </a:p>
-          <a:p>
-            <a:pPr marL="0" indent="0">
-              <a:buNone/>
-            </a:pPr>
-            <a:r>
-              <a:rPr lang="en-US" sz="820" dirty="0">
+            <a:endParaRPr lang="en-US" sz="1200" dirty="0"/>
+          </a:p>
+          <a:p>
+            <a:pPr marL="0" indent="0">
+              <a:buNone/>
+            </a:pPr>
+            <a:r>
+              <a:rPr lang="en-US" sz="1200" dirty="0">
                 <a:solidFill>
                   <a:srgbClr val="111111"/>
                 </a:solidFill>
               </a:rPr>
               <a:t>• unknown groups</a:t>
             </a:r>
-            <a:endParaRPr lang="en-US" sz="820" dirty="0"/>
-          </a:p>
-          <a:p>
-            <a:pPr marL="0" indent="0">
-              <a:buNone/>
-            </a:pPr>
-            <a:r>
-              <a:rPr lang="en-US" sz="820" dirty="0">
+            <a:endParaRPr lang="en-US" sz="1200" dirty="0"/>
+          </a:p>
+          <a:p>
+            <a:pPr marL="0" indent="0">
+              <a:buNone/>
+            </a:pPr>
+            <a:r>
+              <a:rPr lang="en-US" sz="1200" dirty="0">
                 <a:solidFill>
                   <a:srgbClr val="111111"/>
                 </a:solidFill>
               </a:rPr>
               <a:t>• operating regimes</a:t>
             </a:r>
-            <a:endParaRPr lang="en-US" sz="820" dirty="0"/>
-          </a:p>
-          <a:p>
-            <a:pPr marL="0" indent="0">
-              <a:buNone/>
-            </a:pPr>
-            <a:r>
-              <a:rPr lang="en-US" sz="820" dirty="0">
+            <a:endParaRPr lang="en-US" sz="1200" dirty="0"/>
+          </a:p>
+          <a:p>
+            <a:pPr marL="0" indent="0">
+              <a:buNone/>
+            </a:pPr>
+            <a:r>
+              <a:rPr lang="en-US" sz="1200" dirty="0">
                 <a:solidFill>
                   <a:srgbClr val="111111"/>
                 </a:solidFill>
               </a:rPr>
               <a:t>• abnormal cases</a:t>
             </a:r>
-            <a:endParaRPr lang="en-US" sz="820" dirty="0"/>
-          </a:p>
-          <a:p>
-            <a:pPr marL="0" indent="0">
-              <a:buNone/>
-            </a:pPr>
-            <a:r>
-              <a:rPr lang="en-US" sz="820" dirty="0">
+            <a:endParaRPr lang="en-US" sz="1200" dirty="0"/>
+          </a:p>
+          <a:p>
+            <a:pPr marL="0" indent="0">
+              <a:buNone/>
+            </a:pPr>
+            <a:r>
+              <a:rPr lang="en-US" sz="1200" dirty="0">
                 <a:solidFill>
                   <a:srgbClr val="111111"/>
                 </a:solidFill>
               </a:rPr>
               <a:t>• latent patterns</a:t>
             </a:r>
-            <a:endParaRPr lang="en-US" sz="820" dirty="0"/>
-          </a:p>
-          <a:p>
-            <a:pPr marL="0" indent="0">
-              <a:buNone/>
-            </a:pPr>
-            <a:endParaRPr lang="en-US" sz="820" dirty="0"/>
-          </a:p>
-          <a:p>
-            <a:pPr marL="0" indent="0">
-              <a:buNone/>
-            </a:pPr>
-            <a:r>
-              <a:rPr lang="en-US" sz="820" dirty="0">
+            <a:endParaRPr lang="en-US" sz="1200" dirty="0"/>
+          </a:p>
+          <a:p>
+            <a:pPr marL="0" indent="0">
+              <a:buNone/>
+            </a:pPr>
+            <a:endParaRPr lang="en-US" sz="1200" dirty="0"/>
+          </a:p>
+          <a:p>
+            <a:pPr marL="0" indent="0">
+              <a:buNone/>
+            </a:pPr>
+            <a:r>
+              <a:rPr lang="en-US" sz="1200" dirty="0">
                 <a:solidFill>
                   <a:srgbClr val="111111"/>
                 </a:solidFill>
               </a:rPr>
               <a:t>Question: what structure exists?</a:t>
             </a:r>
-            <a:endParaRPr lang="en-US" sz="820" dirty="0"/>
+            <a:endParaRPr lang="en-US" sz="1200" dirty="0"/>
           </a:p>
         </p:txBody>
       </p:sp>
@@ -11832,14 +10397,14 @@
               <a:buNone/>
             </a:pPr>
             <a:r>
-              <a:rPr lang="en-US" sz="830" dirty="0">
+              <a:rPr lang="en-US" sz="1200" dirty="0">
                 <a:solidFill>
                   <a:srgbClr val="111111"/>
                 </a:solidFill>
               </a:rPr>
               <a:t>Explore data before labels exist, identify natural groupings, or create hypotheses for follow-up experiments.</a:t>
             </a:r>
-            <a:endParaRPr lang="en-US" sz="830" dirty="0"/>
+            <a:endParaRPr lang="en-US" sz="1200" dirty="0"/>
           </a:p>
         </p:txBody>
       </p:sp>
@@ -11896,7 +10461,7 @@
         </p:spPr>
         <p:txBody>
           <a:bodyPr wrap="square" lIns="0" tIns="0" rIns="0" bIns="0" rtlCol="0" anchor="ctr">
-            <a:normAutofit/>
+            <a:noAutofit/>
           </a:bodyPr>
           <a:lstStyle/>
           <a:p>
@@ -11904,14 +10469,14 @@
               <a:buNone/>
             </a:pPr>
             <a:r>
-              <a:rPr lang="en-US" sz="820" b="1" dirty="0">
+              <a:rPr lang="en-US" sz="1200" b="1" dirty="0">
                 <a:solidFill>
                   <a:srgbClr val="CC0000"/>
                 </a:solidFill>
               </a:rPr>
               <a:t>Unsupervised results are usually starting points for investigation, not final decisions.</a:t>
             </a:r>
-            <a:endParaRPr lang="en-US" sz="820" dirty="0"/>
+            <a:endParaRPr lang="en-US" sz="1200" dirty="0"/>
           </a:p>
         </p:txBody>
       </p:sp>
@@ -12005,14 +10570,14 @@
               <a:buNone/>
             </a:pPr>
             <a:r>
-              <a:rPr lang="en-US" sz="550" b="1" dirty="0">
+              <a:rPr lang="en-US" sz="1200" b="1" dirty="0">
                 <a:solidFill>
                   <a:srgbClr val="555555"/>
                 </a:solidFill>
               </a:rPr>
               <a:t>APPLIED AI DESIGN WORKSHOP</a:t>
             </a:r>
-            <a:endParaRPr lang="en-US" sz="550" dirty="0"/>
+            <a:endParaRPr lang="en-US" sz="1200" dirty="0"/>
           </a:p>
         </p:txBody>
       </p:sp>
@@ -12041,14 +10606,14 @@
               <a:buNone/>
             </a:pPr>
             <a:r>
-              <a:rPr lang="en-US" sz="550" dirty="0">
+              <a:rPr lang="en-US" sz="1200" dirty="0">
                 <a:solidFill>
                   <a:srgbClr val="555555"/>
                 </a:solidFill>
               </a:rPr>
               <a:t>Session 4</a:t>
             </a:r>
-            <a:endParaRPr lang="en-US" sz="550" dirty="0"/>
+            <a:endParaRPr lang="en-US" sz="1200" dirty="0"/>
           </a:p>
         </p:txBody>
       </p:sp>
@@ -12149,14 +10714,14 @@
               <a:buNone/>
             </a:pPr>
             <a:r>
-              <a:rPr lang="en-US" sz="780" b="1" dirty="0">
+              <a:rPr lang="en-US" sz="1400" b="1" dirty="0">
                 <a:solidFill>
                   <a:srgbClr val="111111"/>
                 </a:solidFill>
               </a:rPr>
               <a:t>Domain</a:t>
             </a:r>
-            <a:endParaRPr lang="en-US" sz="780" dirty="0"/>
+            <a:endParaRPr lang="en-US" sz="1400" dirty="0"/>
           </a:p>
         </p:txBody>
       </p:sp>
@@ -12219,14 +10784,14 @@
               <a:buNone/>
             </a:pPr>
             <a:r>
-              <a:rPr lang="en-US" sz="780" b="1" dirty="0">
+              <a:rPr lang="en-US" sz="1400" b="1" dirty="0">
                 <a:solidFill>
                   <a:srgbClr val="111111"/>
                 </a:solidFill>
               </a:rPr>
               <a:t>Data</a:t>
             </a:r>
-            <a:endParaRPr lang="en-US" sz="780" dirty="0"/>
+            <a:endParaRPr lang="en-US" sz="1400" dirty="0"/>
           </a:p>
         </p:txBody>
       </p:sp>
@@ -12289,14 +10854,14 @@
               <a:buNone/>
             </a:pPr>
             <a:r>
-              <a:rPr lang="en-US" sz="780" b="1" dirty="0">
+              <a:rPr lang="en-US" sz="1400" b="1" dirty="0">
                 <a:solidFill>
                   <a:srgbClr val="111111"/>
                 </a:solidFill>
               </a:rPr>
               <a:t>Discovery question</a:t>
             </a:r>
-            <a:endParaRPr lang="en-US" sz="780" dirty="0"/>
+            <a:endParaRPr lang="en-US" sz="1400" dirty="0"/>
           </a:p>
         </p:txBody>
       </p:sp>
@@ -12361,14 +10926,14 @@
               <a:buNone/>
             </a:pPr>
             <a:r>
-              <a:rPr lang="en-US" sz="780" b="1" dirty="0">
+              <a:rPr lang="en-US" sz="1200" b="1" dirty="0">
                 <a:solidFill>
                   <a:srgbClr val="CC0000"/>
                 </a:solidFill>
               </a:rPr>
               <a:t>Manufacturing</a:t>
             </a:r>
-            <a:endParaRPr lang="en-US" sz="780" dirty="0"/>
+            <a:endParaRPr lang="en-US" sz="1200" dirty="0"/>
           </a:p>
         </p:txBody>
       </p:sp>
@@ -12433,14 +10998,14 @@
               <a:buNone/>
             </a:pPr>
             <a:r>
-              <a:rPr lang="en-US" sz="780" dirty="0">
+              <a:rPr lang="en-US" sz="1200" dirty="0">
                 <a:solidFill>
                   <a:srgbClr val="111111"/>
                 </a:solidFill>
               </a:rPr>
               <a:t>temperature, speed, vibration, energy</a:t>
             </a:r>
-            <a:endParaRPr lang="en-US" sz="780" dirty="0"/>
+            <a:endParaRPr lang="en-US" sz="1200" dirty="0"/>
           </a:p>
         </p:txBody>
       </p:sp>
@@ -12505,14 +11070,14 @@
               <a:buNone/>
             </a:pPr>
             <a:r>
-              <a:rPr lang="en-US" sz="780" dirty="0">
+              <a:rPr lang="en-US" sz="1200" dirty="0">
                 <a:solidFill>
                   <a:srgbClr val="111111"/>
                 </a:solidFill>
               </a:rPr>
               <a:t>Are there distinct operating regimes?</a:t>
             </a:r>
-            <a:endParaRPr lang="en-US" sz="780" dirty="0"/>
+            <a:endParaRPr lang="en-US" sz="1200" dirty="0"/>
           </a:p>
         </p:txBody>
       </p:sp>
@@ -12577,14 +11142,14 @@
               <a:buNone/>
             </a:pPr>
             <a:r>
-              <a:rPr lang="en-US" sz="780" b="1" dirty="0">
+              <a:rPr lang="en-US" sz="1200" b="1" dirty="0">
                 <a:solidFill>
                   <a:srgbClr val="CC0000"/>
                 </a:solidFill>
               </a:rPr>
               <a:t>Bioprocessing</a:t>
             </a:r>
-            <a:endParaRPr lang="en-US" sz="780" dirty="0"/>
+            <a:endParaRPr lang="en-US" sz="1200" dirty="0"/>
           </a:p>
         </p:txBody>
       </p:sp>
@@ -12649,14 +11214,14 @@
               <a:buNone/>
             </a:pPr>
             <a:r>
-              <a:rPr lang="en-US" sz="780" dirty="0">
+              <a:rPr lang="en-US" sz="1200" dirty="0">
                 <a:solidFill>
                   <a:srgbClr val="111111"/>
                 </a:solidFill>
               </a:rPr>
               <a:t>pH, dissolved oxygen, agitation, OD trajectory features</a:t>
             </a:r>
-            <a:endParaRPr lang="en-US" sz="780" dirty="0"/>
+            <a:endParaRPr lang="en-US" sz="1200" dirty="0"/>
           </a:p>
         </p:txBody>
       </p:sp>
@@ -12721,14 +11286,14 @@
               <a:buNone/>
             </a:pPr>
             <a:r>
-              <a:rPr lang="en-US" sz="780" dirty="0">
+              <a:rPr lang="en-US" sz="1200" dirty="0">
                 <a:solidFill>
                   <a:srgbClr val="111111"/>
                 </a:solidFill>
               </a:rPr>
               <a:t>Which batches behave similarly?</a:t>
             </a:r>
-            <a:endParaRPr lang="en-US" sz="780" dirty="0"/>
+            <a:endParaRPr lang="en-US" sz="1200" dirty="0"/>
           </a:p>
         </p:txBody>
       </p:sp>
@@ -12793,14 +11358,14 @@
               <a:buNone/>
             </a:pPr>
             <a:r>
-              <a:rPr lang="en-US" sz="780" b="1" dirty="0">
+              <a:rPr lang="en-US" sz="1200" b="1" dirty="0">
                 <a:solidFill>
                   <a:srgbClr val="CC0000"/>
                 </a:solidFill>
               </a:rPr>
               <a:t>Education</a:t>
             </a:r>
-            <a:endParaRPr lang="en-US" sz="780" dirty="0"/>
+            <a:endParaRPr lang="en-US" sz="1200" dirty="0"/>
           </a:p>
         </p:txBody>
       </p:sp>
@@ -12865,14 +11430,14 @@
               <a:buNone/>
             </a:pPr>
             <a:r>
-              <a:rPr lang="en-US" sz="780" dirty="0">
+              <a:rPr lang="en-US" sz="1200" dirty="0">
                 <a:solidFill>
                   <a:srgbClr val="111111"/>
                 </a:solidFill>
               </a:rPr>
               <a:t>assignment timing, submissions, interaction frequency</a:t>
             </a:r>
-            <a:endParaRPr lang="en-US" sz="780" dirty="0"/>
+            <a:endParaRPr lang="en-US" sz="1200" dirty="0"/>
           </a:p>
         </p:txBody>
       </p:sp>
@@ -12937,14 +11502,14 @@
               <a:buNone/>
             </a:pPr>
             <a:r>
-              <a:rPr lang="en-US" sz="780" dirty="0">
+              <a:rPr lang="en-US" sz="1200" dirty="0">
                 <a:solidFill>
                   <a:srgbClr val="111111"/>
                 </a:solidFill>
               </a:rPr>
               <a:t>Are there patterns of student engagement?</a:t>
             </a:r>
-            <a:endParaRPr lang="en-US" sz="780" dirty="0"/>
+            <a:endParaRPr lang="en-US" sz="1200" dirty="0"/>
           </a:p>
         </p:txBody>
       </p:sp>
@@ -13009,14 +11574,14 @@
               <a:buNone/>
             </a:pPr>
             <a:r>
-              <a:rPr lang="en-US" sz="780" b="1" dirty="0">
+              <a:rPr lang="en-US" sz="1200" b="1" dirty="0">
                 <a:solidFill>
                   <a:srgbClr val="CC0000"/>
                 </a:solidFill>
               </a:rPr>
               <a:t>Materials</a:t>
             </a:r>
-            <a:endParaRPr lang="en-US" sz="780" dirty="0"/>
+            <a:endParaRPr lang="en-US" sz="1200" dirty="0"/>
           </a:p>
         </p:txBody>
       </p:sp>
@@ -13081,14 +11646,14 @@
               <a:buNone/>
             </a:pPr>
             <a:r>
-              <a:rPr lang="en-US" sz="780" dirty="0">
+              <a:rPr lang="en-US" sz="1200" dirty="0">
                 <a:solidFill>
                   <a:srgbClr val="111111"/>
                 </a:solidFill>
               </a:rPr>
               <a:t>composition, process settings, measured properties</a:t>
             </a:r>
-            <a:endParaRPr lang="en-US" sz="780" dirty="0"/>
+            <a:endParaRPr lang="en-US" sz="1200" dirty="0"/>
           </a:p>
         </p:txBody>
       </p:sp>
@@ -13153,14 +11718,14 @@
               <a:buNone/>
             </a:pPr>
             <a:r>
-              <a:rPr lang="en-US" sz="780" dirty="0">
+              <a:rPr lang="en-US" sz="1200" dirty="0">
                 <a:solidFill>
                   <a:srgbClr val="111111"/>
                 </a:solidFill>
               </a:rPr>
               <a:t>Do material families emerge from the data?</a:t>
             </a:r>
-            <a:endParaRPr lang="en-US" sz="780" dirty="0"/>
+            <a:endParaRPr lang="en-US" sz="1200" dirty="0"/>
           </a:p>
         </p:txBody>
       </p:sp>
@@ -13225,14 +11790,14 @@
               <a:buNone/>
             </a:pPr>
             <a:r>
-              <a:rPr lang="en-US" sz="780" b="1" dirty="0">
+              <a:rPr lang="en-US" sz="1200" b="1" dirty="0">
                 <a:solidFill>
                   <a:srgbClr val="CC0000"/>
                 </a:solidFill>
               </a:rPr>
               <a:t>Maintenance</a:t>
             </a:r>
-            <a:endParaRPr lang="en-US" sz="780" dirty="0"/>
+            <a:endParaRPr lang="en-US" sz="1200" dirty="0"/>
           </a:p>
         </p:txBody>
       </p:sp>
@@ -13297,14 +11862,14 @@
               <a:buNone/>
             </a:pPr>
             <a:r>
-              <a:rPr lang="en-US" sz="780" dirty="0">
+              <a:rPr lang="en-US" sz="1200" dirty="0">
                 <a:solidFill>
                   <a:srgbClr val="111111"/>
                 </a:solidFill>
               </a:rPr>
               <a:t>sensor summaries from equipment cycles</a:t>
             </a:r>
-            <a:endParaRPr lang="en-US" sz="780" dirty="0"/>
+            <a:endParaRPr lang="en-US" sz="1200" dirty="0"/>
           </a:p>
         </p:txBody>
       </p:sp>
@@ -13369,14 +11934,14 @@
               <a:buNone/>
             </a:pPr>
             <a:r>
-              <a:rPr lang="en-US" sz="780" dirty="0">
+              <a:rPr lang="en-US" sz="1200" dirty="0">
                 <a:solidFill>
                   <a:srgbClr val="111111"/>
                 </a:solidFill>
               </a:rPr>
               <a:t>Which cycles look atypical or degraded?</a:t>
             </a:r>
-            <a:endParaRPr lang="en-US" sz="780" dirty="0"/>
+            <a:endParaRPr lang="en-US" sz="1200" dirty="0"/>
           </a:p>
         </p:txBody>
       </p:sp>
@@ -13433,7 +11998,7 @@
         </p:spPr>
         <p:txBody>
           <a:bodyPr wrap="square" lIns="0" tIns="0" rIns="0" bIns="0" rtlCol="0" anchor="ctr">
-            <a:normAutofit/>
+            <a:noAutofit/>
           </a:bodyPr>
           <a:lstStyle/>
           <a:p>
@@ -13441,14 +12006,14 @@
               <a:buNone/>
             </a:pPr>
             <a:r>
-              <a:rPr lang="en-US" sz="820" b="1" dirty="0">
+              <a:rPr lang="en-US" sz="1200" b="1" dirty="0">
                 <a:solidFill>
                   <a:srgbClr val="CC0000"/>
                 </a:solidFill>
               </a:rPr>
               <a:t>A good unsupervised question connects data patterns to a plausible disciplinary interpretation.</a:t>
             </a:r>
-            <a:endParaRPr lang="en-US" sz="820" dirty="0"/>
+            <a:endParaRPr lang="en-US" sz="1200" dirty="0"/>
           </a:p>
         </p:txBody>
       </p:sp>
@@ -13542,14 +12107,14 @@
               <a:buNone/>
             </a:pPr>
             <a:r>
-              <a:rPr lang="en-US" sz="550" b="1" dirty="0">
+              <a:rPr lang="en-US" sz="1200" b="1" dirty="0">
                 <a:solidFill>
                   <a:srgbClr val="555555"/>
                 </a:solidFill>
               </a:rPr>
               <a:t>APPLIED AI DESIGN WORKSHOP</a:t>
             </a:r>
-            <a:endParaRPr lang="en-US" sz="550" dirty="0"/>
+            <a:endParaRPr lang="en-US" sz="1200" dirty="0"/>
           </a:p>
         </p:txBody>
       </p:sp>
@@ -13578,14 +12143,14 @@
               <a:buNone/>
             </a:pPr>
             <a:r>
-              <a:rPr lang="en-US" sz="550" dirty="0">
+              <a:rPr lang="en-US" sz="1200" dirty="0">
                 <a:solidFill>
                   <a:srgbClr val="555555"/>
                 </a:solidFill>
               </a:rPr>
               <a:t>Session 4</a:t>
             </a:r>
-            <a:endParaRPr lang="en-US" sz="550" dirty="0"/>
+            <a:endParaRPr lang="en-US" sz="1200" dirty="0"/>
           </a:p>
         </p:txBody>
       </p:sp>
@@ -13652,14 +12217,14 @@
               <a:buNone/>
             </a:pPr>
             <a:r>
-              <a:rPr lang="en-US" sz="800" dirty="0">
+              <a:rPr lang="en-US" sz="1200" dirty="0">
                 <a:solidFill>
                   <a:srgbClr val="333333"/>
                 </a:solidFill>
               </a:rPr>
               <a:t>Clustering is sensitive to feature choice and scale.</a:t>
             </a:r>
-            <a:endParaRPr lang="en-US" sz="800" dirty="0"/>
+            <a:endParaRPr lang="en-US" sz="1200" dirty="0"/>
           </a:p>
         </p:txBody>
       </p:sp>
@@ -13693,7 +12258,7 @@
           <a:bodyPr/>
           <a:lstStyle/>
           <a:p>
-            <a:endParaRPr lang="en-US"/>
+            <a:endParaRPr lang="en-US" dirty="0"/>
           </a:p>
         </p:txBody>
       </p:sp>
@@ -13762,14 +12327,14 @@
               <a:buNone/>
             </a:pPr>
             <a:r>
-              <a:rPr lang="en-US" sz="830" dirty="0">
+              <a:rPr lang="en-US" sz="1200" dirty="0">
                 <a:solidFill>
                   <a:srgbClr val="111111"/>
                 </a:solidFill>
               </a:rPr>
               <a:t>Use variables that represent the phenomenon of interest. Remove identifiers and target-like columns.</a:t>
             </a:r>
-            <a:endParaRPr lang="en-US" sz="830" dirty="0"/>
+            <a:endParaRPr lang="en-US" sz="1200" dirty="0"/>
           </a:p>
         </p:txBody>
       </p:sp>
@@ -13872,14 +12437,14 @@
               <a:buNone/>
             </a:pPr>
             <a:r>
-              <a:rPr lang="en-US" sz="830" dirty="0">
+              <a:rPr lang="en-US" sz="1200" dirty="0">
                 <a:solidFill>
                   <a:srgbClr val="111111"/>
                 </a:solidFill>
               </a:rPr>
               <a:t>Variables with large units can dominate distance-based methods. Standardize before k-means, PCA, and many distance methods.</a:t>
             </a:r>
-            <a:endParaRPr lang="en-US" sz="830" dirty="0"/>
+            <a:endParaRPr lang="en-US" sz="1200" dirty="0"/>
           </a:p>
         </p:txBody>
       </p:sp>
@@ -13982,14 +12547,14 @@
               <a:buNone/>
             </a:pPr>
             <a:r>
-              <a:rPr lang="en-US" sz="830" dirty="0">
+              <a:rPr lang="en-US" sz="1200" dirty="0">
                 <a:solidFill>
                   <a:srgbClr val="111111"/>
                 </a:solidFill>
               </a:rPr>
               <a:t>Impute carefully or remove variables with too much missingness. Missingness may itself carry meaning.</a:t>
             </a:r>
-            <a:endParaRPr lang="en-US" sz="830" dirty="0"/>
+            <a:endParaRPr lang="en-US" sz="1200" dirty="0"/>
           </a:p>
         </p:txBody>
       </p:sp>
@@ -14092,14 +12657,14 @@
               <a:buNone/>
             </a:pPr>
             <a:r>
-              <a:rPr lang="en-US" sz="900" dirty="0">
+              <a:rPr lang="en-US" sz="1200" dirty="0">
                 <a:solidFill>
                   <a:srgbClr val="111111"/>
                 </a:solidFill>
               </a:rPr>
               <a:t>Do the selected features describe similarity in the way a domain expert would understand it?</a:t>
             </a:r>
-            <a:endParaRPr lang="en-US" sz="900" dirty="0"/>
+            <a:endParaRPr lang="en-US" sz="1200" dirty="0"/>
           </a:p>
         </p:txBody>
       </p:sp>
@@ -14193,14 +12758,14 @@
               <a:buNone/>
             </a:pPr>
             <a:r>
-              <a:rPr lang="en-US" sz="550" b="1" dirty="0">
+              <a:rPr lang="en-US" sz="1200" b="1" dirty="0">
                 <a:solidFill>
                   <a:srgbClr val="555555"/>
                 </a:solidFill>
               </a:rPr>
               <a:t>APPLIED AI DESIGN WORKSHOP</a:t>
             </a:r>
-            <a:endParaRPr lang="en-US" sz="550" dirty="0"/>
+            <a:endParaRPr lang="en-US" sz="1200" dirty="0"/>
           </a:p>
         </p:txBody>
       </p:sp>
@@ -14229,14 +12794,14 @@
               <a:buNone/>
             </a:pPr>
             <a:r>
-              <a:rPr lang="en-US" sz="550" dirty="0">
+              <a:rPr lang="en-US" sz="1200" dirty="0">
                 <a:solidFill>
                   <a:srgbClr val="555555"/>
                 </a:solidFill>
               </a:rPr>
               <a:t>Session 4</a:t>
             </a:r>
-            <a:endParaRPr lang="en-US" sz="550" dirty="0"/>
+            <a:endParaRPr lang="en-US" sz="1200" dirty="0"/>
           </a:p>
         </p:txBody>
       </p:sp>
@@ -14303,854 +12868,14 @@
               <a:buNone/>
             </a:pPr>
             <a:r>
-              <a:rPr lang="en-US" sz="800" dirty="0">
+              <a:rPr lang="en-US" sz="1200" dirty="0">
                 <a:solidFill>
                   <a:srgbClr val="333333"/>
                 </a:solidFill>
               </a:rPr>
               <a:t>k-means partitions observations into K groups by minimizing distance to cluster centers.</a:t>
             </a:r>
-            <a:endParaRPr lang="en-US" sz="800" dirty="0"/>
-          </a:p>
-        </p:txBody>
-      </p:sp>
-      <p:sp>
-        <p:nvSpPr>
-          <p:cNvPr id="7" name="Shape 5"/>
-          <p:cNvSpPr/>
-          <p:nvPr/>
-        </p:nvSpPr>
-        <p:spPr>
-          <a:xfrm>
-            <a:off x="1472184" y="2020824"/>
-            <a:ext cx="73152" cy="73152"/>
-          </a:xfrm>
-          <a:prstGeom prst="ellipse">
-            <a:avLst/>
-          </a:prstGeom>
-          <a:solidFill>
-            <a:srgbClr val="CC0000"/>
-          </a:solidFill>
-          <a:ln w="12700">
-            <a:solidFill>
-              <a:srgbClr val="CC0000"/>
-            </a:solidFill>
-            <a:prstDash val="solid"/>
-          </a:ln>
-        </p:spPr>
-        <p:txBody>
-          <a:bodyPr/>
-          <a:lstStyle/>
-          <a:p>
-            <a:endParaRPr lang="en-US"/>
-          </a:p>
-        </p:txBody>
-      </p:sp>
-      <p:sp>
-        <p:nvSpPr>
-          <p:cNvPr id="8" name="Shape 6"/>
-          <p:cNvSpPr/>
-          <p:nvPr/>
-        </p:nvSpPr>
-        <p:spPr>
-          <a:xfrm>
-            <a:off x="1746504" y="1929384"/>
-            <a:ext cx="73152" cy="73152"/>
-          </a:xfrm>
-          <a:prstGeom prst="ellipse">
-            <a:avLst/>
-          </a:prstGeom>
-          <a:solidFill>
-            <a:srgbClr val="CC0000"/>
-          </a:solidFill>
-          <a:ln w="12700">
-            <a:solidFill>
-              <a:srgbClr val="CC0000"/>
-            </a:solidFill>
-            <a:prstDash val="solid"/>
-          </a:ln>
-        </p:spPr>
-        <p:txBody>
-          <a:bodyPr/>
-          <a:lstStyle/>
-          <a:p>
-            <a:endParaRPr lang="en-US"/>
-          </a:p>
-        </p:txBody>
-      </p:sp>
-      <p:sp>
-        <p:nvSpPr>
-          <p:cNvPr id="9" name="Shape 7"/>
-          <p:cNvSpPr/>
-          <p:nvPr/>
-        </p:nvSpPr>
-        <p:spPr>
-          <a:xfrm>
-            <a:off x="2020824" y="2020824"/>
-            <a:ext cx="73152" cy="73152"/>
-          </a:xfrm>
-          <a:prstGeom prst="ellipse">
-            <a:avLst/>
-          </a:prstGeom>
-          <a:solidFill>
-            <a:srgbClr val="CC0000"/>
-          </a:solidFill>
-          <a:ln w="12700">
-            <a:solidFill>
-              <a:srgbClr val="CC0000"/>
-            </a:solidFill>
-            <a:prstDash val="solid"/>
-          </a:ln>
-        </p:spPr>
-        <p:txBody>
-          <a:bodyPr/>
-          <a:lstStyle/>
-          <a:p>
-            <a:endParaRPr lang="en-US"/>
-          </a:p>
-        </p:txBody>
-      </p:sp>
-      <p:sp>
-        <p:nvSpPr>
-          <p:cNvPr id="10" name="Shape 8"/>
-          <p:cNvSpPr/>
-          <p:nvPr/>
-        </p:nvSpPr>
-        <p:spPr>
-          <a:xfrm>
-            <a:off x="1563624" y="2295144"/>
-            <a:ext cx="73152" cy="73152"/>
-          </a:xfrm>
-          <a:prstGeom prst="ellipse">
-            <a:avLst/>
-          </a:prstGeom>
-          <a:solidFill>
-            <a:srgbClr val="CC0000"/>
-          </a:solidFill>
-          <a:ln w="12700">
-            <a:solidFill>
-              <a:srgbClr val="CC0000"/>
-            </a:solidFill>
-            <a:prstDash val="solid"/>
-          </a:ln>
-        </p:spPr>
-        <p:txBody>
-          <a:bodyPr/>
-          <a:lstStyle/>
-          <a:p>
-            <a:endParaRPr lang="en-US"/>
-          </a:p>
-        </p:txBody>
-      </p:sp>
-      <p:sp>
-        <p:nvSpPr>
-          <p:cNvPr id="11" name="Shape 9"/>
-          <p:cNvSpPr/>
-          <p:nvPr/>
-        </p:nvSpPr>
-        <p:spPr>
-          <a:xfrm>
-            <a:off x="1837944" y="2295144"/>
-            <a:ext cx="73152" cy="73152"/>
-          </a:xfrm>
-          <a:prstGeom prst="ellipse">
-            <a:avLst/>
-          </a:prstGeom>
-          <a:solidFill>
-            <a:srgbClr val="CC0000"/>
-          </a:solidFill>
-          <a:ln w="12700">
-            <a:solidFill>
-              <a:srgbClr val="CC0000"/>
-            </a:solidFill>
-            <a:prstDash val="solid"/>
-          </a:ln>
-        </p:spPr>
-        <p:txBody>
-          <a:bodyPr/>
-          <a:lstStyle/>
-          <a:p>
-            <a:endParaRPr lang="en-US"/>
-          </a:p>
-        </p:txBody>
-      </p:sp>
-      <p:sp>
-        <p:nvSpPr>
-          <p:cNvPr id="12" name="Shape 10"/>
-          <p:cNvSpPr/>
-          <p:nvPr/>
-        </p:nvSpPr>
-        <p:spPr>
-          <a:xfrm>
-            <a:off x="2112264" y="2295144"/>
-            <a:ext cx="73152" cy="73152"/>
-          </a:xfrm>
-          <a:prstGeom prst="ellipse">
-            <a:avLst/>
-          </a:prstGeom>
-          <a:solidFill>
-            <a:srgbClr val="CC0000"/>
-          </a:solidFill>
-          <a:ln w="12700">
-            <a:solidFill>
-              <a:srgbClr val="CC0000"/>
-            </a:solidFill>
-            <a:prstDash val="solid"/>
-          </a:ln>
-        </p:spPr>
-        <p:txBody>
-          <a:bodyPr/>
-          <a:lstStyle/>
-          <a:p>
-            <a:endParaRPr lang="en-US"/>
-          </a:p>
-        </p:txBody>
-      </p:sp>
-      <p:sp>
-        <p:nvSpPr>
-          <p:cNvPr id="13" name="Shape 11"/>
-          <p:cNvSpPr/>
-          <p:nvPr/>
-        </p:nvSpPr>
-        <p:spPr>
-          <a:xfrm>
-            <a:off x="1655064" y="2569464"/>
-            <a:ext cx="73152" cy="73152"/>
-          </a:xfrm>
-          <a:prstGeom prst="ellipse">
-            <a:avLst/>
-          </a:prstGeom>
-          <a:solidFill>
-            <a:srgbClr val="CC0000"/>
-          </a:solidFill>
-          <a:ln w="12700">
-            <a:solidFill>
-              <a:srgbClr val="CC0000"/>
-            </a:solidFill>
-            <a:prstDash val="solid"/>
-          </a:ln>
-        </p:spPr>
-        <p:txBody>
-          <a:bodyPr/>
-          <a:lstStyle/>
-          <a:p>
-            <a:endParaRPr lang="en-US"/>
-          </a:p>
-        </p:txBody>
-      </p:sp>
-      <p:sp>
-        <p:nvSpPr>
-          <p:cNvPr id="14" name="Shape 12"/>
-          <p:cNvSpPr/>
-          <p:nvPr/>
-        </p:nvSpPr>
-        <p:spPr>
-          <a:xfrm>
-            <a:off x="1929384" y="2569464"/>
-            <a:ext cx="73152" cy="73152"/>
-          </a:xfrm>
-          <a:prstGeom prst="ellipse">
-            <a:avLst/>
-          </a:prstGeom>
-          <a:solidFill>
-            <a:srgbClr val="CC0000"/>
-          </a:solidFill>
-          <a:ln w="12700">
-            <a:solidFill>
-              <a:srgbClr val="CC0000"/>
-            </a:solidFill>
-            <a:prstDash val="solid"/>
-          </a:ln>
-        </p:spPr>
-        <p:txBody>
-          <a:bodyPr/>
-          <a:lstStyle/>
-          <a:p>
-            <a:endParaRPr lang="en-US"/>
-          </a:p>
-        </p:txBody>
-      </p:sp>
-      <p:sp>
-        <p:nvSpPr>
-          <p:cNvPr id="15" name="Shape 13"/>
-          <p:cNvSpPr/>
-          <p:nvPr/>
-        </p:nvSpPr>
-        <p:spPr>
-          <a:xfrm>
-            <a:off x="2660904" y="3621024"/>
-            <a:ext cx="73152" cy="73152"/>
-          </a:xfrm>
-          <a:prstGeom prst="ellipse">
-            <a:avLst/>
-          </a:prstGeom>
-          <a:solidFill>
-            <a:srgbClr val="777777"/>
-          </a:solidFill>
-          <a:ln w="12700">
-            <a:solidFill>
-              <a:srgbClr val="777777"/>
-            </a:solidFill>
-            <a:prstDash val="solid"/>
-          </a:ln>
-        </p:spPr>
-        <p:txBody>
-          <a:bodyPr/>
-          <a:lstStyle/>
-          <a:p>
-            <a:endParaRPr lang="en-US"/>
-          </a:p>
-        </p:txBody>
-      </p:sp>
-      <p:sp>
-        <p:nvSpPr>
-          <p:cNvPr id="16" name="Shape 14"/>
-          <p:cNvSpPr/>
-          <p:nvPr/>
-        </p:nvSpPr>
-        <p:spPr>
-          <a:xfrm>
-            <a:off x="2935224" y="3529584"/>
-            <a:ext cx="73152" cy="73152"/>
-          </a:xfrm>
-          <a:prstGeom prst="ellipse">
-            <a:avLst/>
-          </a:prstGeom>
-          <a:solidFill>
-            <a:srgbClr val="777777"/>
-          </a:solidFill>
-          <a:ln w="12700">
-            <a:solidFill>
-              <a:srgbClr val="777777"/>
-            </a:solidFill>
-            <a:prstDash val="solid"/>
-          </a:ln>
-        </p:spPr>
-        <p:txBody>
-          <a:bodyPr/>
-          <a:lstStyle/>
-          <a:p>
-            <a:endParaRPr lang="en-US"/>
-          </a:p>
-        </p:txBody>
-      </p:sp>
-      <p:sp>
-        <p:nvSpPr>
-          <p:cNvPr id="17" name="Shape 15"/>
-          <p:cNvSpPr/>
-          <p:nvPr/>
-        </p:nvSpPr>
-        <p:spPr>
-          <a:xfrm>
-            <a:off x="3209544" y="3621024"/>
-            <a:ext cx="73152" cy="73152"/>
-          </a:xfrm>
-          <a:prstGeom prst="ellipse">
-            <a:avLst/>
-          </a:prstGeom>
-          <a:solidFill>
-            <a:srgbClr val="777777"/>
-          </a:solidFill>
-          <a:ln w="12700">
-            <a:solidFill>
-              <a:srgbClr val="777777"/>
-            </a:solidFill>
-            <a:prstDash val="solid"/>
-          </a:ln>
-        </p:spPr>
-        <p:txBody>
-          <a:bodyPr/>
-          <a:lstStyle/>
-          <a:p>
-            <a:endParaRPr lang="en-US"/>
-          </a:p>
-        </p:txBody>
-      </p:sp>
-      <p:sp>
-        <p:nvSpPr>
-          <p:cNvPr id="18" name="Shape 16"/>
-          <p:cNvSpPr/>
-          <p:nvPr/>
-        </p:nvSpPr>
-        <p:spPr>
-          <a:xfrm>
-            <a:off x="2752344" y="3895344"/>
-            <a:ext cx="73152" cy="73152"/>
-          </a:xfrm>
-          <a:prstGeom prst="ellipse">
-            <a:avLst/>
-          </a:prstGeom>
-          <a:solidFill>
-            <a:srgbClr val="777777"/>
-          </a:solidFill>
-          <a:ln w="12700">
-            <a:solidFill>
-              <a:srgbClr val="777777"/>
-            </a:solidFill>
-            <a:prstDash val="solid"/>
-          </a:ln>
-        </p:spPr>
-        <p:txBody>
-          <a:bodyPr/>
-          <a:lstStyle/>
-          <a:p>
-            <a:endParaRPr lang="en-US"/>
-          </a:p>
-        </p:txBody>
-      </p:sp>
-      <p:sp>
-        <p:nvSpPr>
-          <p:cNvPr id="19" name="Shape 17"/>
-          <p:cNvSpPr/>
-          <p:nvPr/>
-        </p:nvSpPr>
-        <p:spPr>
-          <a:xfrm>
-            <a:off x="3026664" y="3849624"/>
-            <a:ext cx="73152" cy="73152"/>
-          </a:xfrm>
-          <a:prstGeom prst="ellipse">
-            <a:avLst/>
-          </a:prstGeom>
-          <a:solidFill>
-            <a:srgbClr val="777777"/>
-          </a:solidFill>
-          <a:ln w="12700">
-            <a:solidFill>
-              <a:srgbClr val="777777"/>
-            </a:solidFill>
-            <a:prstDash val="solid"/>
-          </a:ln>
-        </p:spPr>
-        <p:txBody>
-          <a:bodyPr/>
-          <a:lstStyle/>
-          <a:p>
-            <a:endParaRPr lang="en-US"/>
-          </a:p>
-        </p:txBody>
-      </p:sp>
-      <p:sp>
-        <p:nvSpPr>
-          <p:cNvPr id="20" name="Shape 18"/>
-          <p:cNvSpPr/>
-          <p:nvPr/>
-        </p:nvSpPr>
-        <p:spPr>
-          <a:xfrm>
-            <a:off x="3300984" y="3895344"/>
-            <a:ext cx="73152" cy="73152"/>
-          </a:xfrm>
-          <a:prstGeom prst="ellipse">
-            <a:avLst/>
-          </a:prstGeom>
-          <a:solidFill>
-            <a:srgbClr val="777777"/>
-          </a:solidFill>
-          <a:ln w="12700">
-            <a:solidFill>
-              <a:srgbClr val="777777"/>
-            </a:solidFill>
-            <a:prstDash val="solid"/>
-          </a:ln>
-        </p:spPr>
-        <p:txBody>
-          <a:bodyPr/>
-          <a:lstStyle/>
-          <a:p>
-            <a:endParaRPr lang="en-US"/>
-          </a:p>
-        </p:txBody>
-      </p:sp>
-      <p:sp>
-        <p:nvSpPr>
-          <p:cNvPr id="21" name="Shape 19"/>
-          <p:cNvSpPr/>
-          <p:nvPr/>
-        </p:nvSpPr>
-        <p:spPr>
-          <a:xfrm>
-            <a:off x="2843784" y="4169664"/>
-            <a:ext cx="73152" cy="73152"/>
-          </a:xfrm>
-          <a:prstGeom prst="ellipse">
-            <a:avLst/>
-          </a:prstGeom>
-          <a:solidFill>
-            <a:srgbClr val="777777"/>
-          </a:solidFill>
-          <a:ln w="12700">
-            <a:solidFill>
-              <a:srgbClr val="777777"/>
-            </a:solidFill>
-            <a:prstDash val="solid"/>
-          </a:ln>
-        </p:spPr>
-        <p:txBody>
-          <a:bodyPr/>
-          <a:lstStyle/>
-          <a:p>
-            <a:endParaRPr lang="en-US"/>
-          </a:p>
-        </p:txBody>
-      </p:sp>
-      <p:sp>
-        <p:nvSpPr>
-          <p:cNvPr id="22" name="Shape 20"/>
-          <p:cNvSpPr/>
-          <p:nvPr/>
-        </p:nvSpPr>
-        <p:spPr>
-          <a:xfrm>
-            <a:off x="3118104" y="4123944"/>
-            <a:ext cx="73152" cy="73152"/>
-          </a:xfrm>
-          <a:prstGeom prst="ellipse">
-            <a:avLst/>
-          </a:prstGeom>
-          <a:solidFill>
-            <a:srgbClr val="777777"/>
-          </a:solidFill>
-          <a:ln w="12700">
-            <a:solidFill>
-              <a:srgbClr val="777777"/>
-            </a:solidFill>
-            <a:prstDash val="solid"/>
-          </a:ln>
-        </p:spPr>
-        <p:txBody>
-          <a:bodyPr/>
-          <a:lstStyle/>
-          <a:p>
-            <a:endParaRPr lang="en-US"/>
-          </a:p>
-        </p:txBody>
-      </p:sp>
-      <p:sp>
-        <p:nvSpPr>
-          <p:cNvPr id="23" name="Shape 21"/>
-          <p:cNvSpPr/>
-          <p:nvPr/>
-        </p:nvSpPr>
-        <p:spPr>
-          <a:xfrm>
-            <a:off x="4215384" y="1837944"/>
-            <a:ext cx="73152" cy="73152"/>
-          </a:xfrm>
-          <a:prstGeom prst="ellipse">
-            <a:avLst/>
-          </a:prstGeom>
-          <a:solidFill>
-            <a:srgbClr val="BBBBBB"/>
-          </a:solidFill>
-          <a:ln w="12700">
-            <a:solidFill>
-              <a:srgbClr val="BBBBBB"/>
-            </a:solidFill>
-            <a:prstDash val="solid"/>
-          </a:ln>
-        </p:spPr>
-        <p:txBody>
-          <a:bodyPr/>
-          <a:lstStyle/>
-          <a:p>
-            <a:endParaRPr lang="en-US"/>
-          </a:p>
-        </p:txBody>
-      </p:sp>
-      <p:sp>
-        <p:nvSpPr>
-          <p:cNvPr id="24" name="Shape 22"/>
-          <p:cNvSpPr/>
-          <p:nvPr/>
-        </p:nvSpPr>
-        <p:spPr>
-          <a:xfrm>
-            <a:off x="4489704" y="1746504"/>
-            <a:ext cx="73152" cy="73152"/>
-          </a:xfrm>
-          <a:prstGeom prst="ellipse">
-            <a:avLst/>
-          </a:prstGeom>
-          <a:solidFill>
-            <a:srgbClr val="BBBBBB"/>
-          </a:solidFill>
-          <a:ln w="12700">
-            <a:solidFill>
-              <a:srgbClr val="BBBBBB"/>
-            </a:solidFill>
-            <a:prstDash val="solid"/>
-          </a:ln>
-        </p:spPr>
-        <p:txBody>
-          <a:bodyPr/>
-          <a:lstStyle/>
-          <a:p>
-            <a:endParaRPr lang="en-US"/>
-          </a:p>
-        </p:txBody>
-      </p:sp>
-      <p:sp>
-        <p:nvSpPr>
-          <p:cNvPr id="25" name="Shape 23"/>
-          <p:cNvSpPr/>
-          <p:nvPr/>
-        </p:nvSpPr>
-        <p:spPr>
-          <a:xfrm>
-            <a:off x="4764024" y="1837944"/>
-            <a:ext cx="73152" cy="73152"/>
-          </a:xfrm>
-          <a:prstGeom prst="ellipse">
-            <a:avLst/>
-          </a:prstGeom>
-          <a:solidFill>
-            <a:srgbClr val="BBBBBB"/>
-          </a:solidFill>
-          <a:ln w="12700">
-            <a:solidFill>
-              <a:srgbClr val="BBBBBB"/>
-            </a:solidFill>
-            <a:prstDash val="solid"/>
-          </a:ln>
-        </p:spPr>
-        <p:txBody>
-          <a:bodyPr/>
-          <a:lstStyle/>
-          <a:p>
-            <a:endParaRPr lang="en-US"/>
-          </a:p>
-        </p:txBody>
-      </p:sp>
-      <p:sp>
-        <p:nvSpPr>
-          <p:cNvPr id="26" name="Shape 24"/>
-          <p:cNvSpPr/>
-          <p:nvPr/>
-        </p:nvSpPr>
-        <p:spPr>
-          <a:xfrm>
-            <a:off x="4306824" y="2112264"/>
-            <a:ext cx="73152" cy="73152"/>
-          </a:xfrm>
-          <a:prstGeom prst="ellipse">
-            <a:avLst/>
-          </a:prstGeom>
-          <a:solidFill>
-            <a:srgbClr val="BBBBBB"/>
-          </a:solidFill>
-          <a:ln w="12700">
-            <a:solidFill>
-              <a:srgbClr val="BBBBBB"/>
-            </a:solidFill>
-            <a:prstDash val="solid"/>
-          </a:ln>
-        </p:spPr>
-        <p:txBody>
-          <a:bodyPr/>
-          <a:lstStyle/>
-          <a:p>
-            <a:endParaRPr lang="en-US"/>
-          </a:p>
-        </p:txBody>
-      </p:sp>
-      <p:sp>
-        <p:nvSpPr>
-          <p:cNvPr id="27" name="Shape 25"/>
-          <p:cNvSpPr/>
-          <p:nvPr/>
-        </p:nvSpPr>
-        <p:spPr>
-          <a:xfrm>
-            <a:off x="4581144" y="2112264"/>
-            <a:ext cx="73152" cy="73152"/>
-          </a:xfrm>
-          <a:prstGeom prst="ellipse">
-            <a:avLst/>
-          </a:prstGeom>
-          <a:solidFill>
-            <a:srgbClr val="BBBBBB"/>
-          </a:solidFill>
-          <a:ln w="12700">
-            <a:solidFill>
-              <a:srgbClr val="BBBBBB"/>
-            </a:solidFill>
-            <a:prstDash val="solid"/>
-          </a:ln>
-        </p:spPr>
-        <p:txBody>
-          <a:bodyPr/>
-          <a:lstStyle/>
-          <a:p>
-            <a:endParaRPr lang="en-US"/>
-          </a:p>
-        </p:txBody>
-      </p:sp>
-      <p:sp>
-        <p:nvSpPr>
-          <p:cNvPr id="28" name="Shape 26"/>
-          <p:cNvSpPr/>
-          <p:nvPr/>
-        </p:nvSpPr>
-        <p:spPr>
-          <a:xfrm>
-            <a:off x="4855464" y="2112264"/>
-            <a:ext cx="73152" cy="73152"/>
-          </a:xfrm>
-          <a:prstGeom prst="ellipse">
-            <a:avLst/>
-          </a:prstGeom>
-          <a:solidFill>
-            <a:srgbClr val="BBBBBB"/>
-          </a:solidFill>
-          <a:ln w="12700">
-            <a:solidFill>
-              <a:srgbClr val="BBBBBB"/>
-            </a:solidFill>
-            <a:prstDash val="solid"/>
-          </a:ln>
-        </p:spPr>
-        <p:txBody>
-          <a:bodyPr/>
-          <a:lstStyle/>
-          <a:p>
-            <a:endParaRPr lang="en-US"/>
-          </a:p>
-        </p:txBody>
-      </p:sp>
-      <p:sp>
-        <p:nvSpPr>
-          <p:cNvPr id="29" name="Shape 27"/>
-          <p:cNvSpPr/>
-          <p:nvPr/>
-        </p:nvSpPr>
-        <p:spPr>
-          <a:xfrm>
-            <a:off x="4398264" y="2386584"/>
-            <a:ext cx="73152" cy="73152"/>
-          </a:xfrm>
-          <a:prstGeom prst="ellipse">
-            <a:avLst/>
-          </a:prstGeom>
-          <a:solidFill>
-            <a:srgbClr val="BBBBBB"/>
-          </a:solidFill>
-          <a:ln w="12700">
-            <a:solidFill>
-              <a:srgbClr val="BBBBBB"/>
-            </a:solidFill>
-            <a:prstDash val="solid"/>
-          </a:ln>
-        </p:spPr>
-        <p:txBody>
-          <a:bodyPr/>
-          <a:lstStyle/>
-          <a:p>
-            <a:endParaRPr lang="en-US"/>
-          </a:p>
-        </p:txBody>
-      </p:sp>
-      <p:sp>
-        <p:nvSpPr>
-          <p:cNvPr id="30" name="Shape 28"/>
-          <p:cNvSpPr/>
-          <p:nvPr/>
-        </p:nvSpPr>
-        <p:spPr>
-          <a:xfrm>
-            <a:off x="4672584" y="2386584"/>
-            <a:ext cx="73152" cy="73152"/>
-          </a:xfrm>
-          <a:prstGeom prst="ellipse">
-            <a:avLst/>
-          </a:prstGeom>
-          <a:solidFill>
-            <a:srgbClr val="BBBBBB"/>
-          </a:solidFill>
-          <a:ln w="12700">
-            <a:solidFill>
-              <a:srgbClr val="BBBBBB"/>
-            </a:solidFill>
-            <a:prstDash val="solid"/>
-          </a:ln>
-        </p:spPr>
-        <p:txBody>
-          <a:bodyPr/>
-          <a:lstStyle/>
-          <a:p>
-            <a:endParaRPr lang="en-US"/>
-          </a:p>
-        </p:txBody>
-      </p:sp>
-      <p:sp>
-        <p:nvSpPr>
-          <p:cNvPr id="31" name="Text 29"/>
-          <p:cNvSpPr/>
-          <p:nvPr/>
-        </p:nvSpPr>
-        <p:spPr>
-          <a:xfrm>
-            <a:off x="2743200" y="4572000"/>
-            <a:ext cx="914400" cy="146304"/>
-          </a:xfrm>
-          <a:prstGeom prst="rect">
-            <a:avLst/>
-          </a:prstGeom>
-          <a:noFill/>
-          <a:ln/>
-        </p:spPr>
-        <p:txBody>
-          <a:bodyPr wrap="square" lIns="0" tIns="0" rIns="0" bIns="0" rtlCol="0" anchor="ctr"/>
-          <a:lstStyle/>
-          <a:p>
-            <a:pPr marL="0" indent="0" algn="ctr">
-              <a:buNone/>
-            </a:pPr>
-            <a:r>
-              <a:rPr lang="en-US" sz="750" dirty="0">
-                <a:solidFill>
-                  <a:srgbClr val="555555"/>
-                </a:solidFill>
-              </a:rPr>
-              <a:t>feature 1</a:t>
-            </a:r>
-            <a:endParaRPr lang="en-US" sz="750" dirty="0"/>
-          </a:p>
-        </p:txBody>
-      </p:sp>
-      <p:sp>
-        <p:nvSpPr>
-          <p:cNvPr id="32" name="Text 30"/>
-          <p:cNvSpPr/>
-          <p:nvPr/>
-        </p:nvSpPr>
-        <p:spPr>
-          <a:xfrm rot="16200000">
-            <a:off x="868680" y="2971800"/>
-            <a:ext cx="320040" cy="457200"/>
-          </a:xfrm>
-          <a:prstGeom prst="rect">
-            <a:avLst/>
-          </a:prstGeom>
-          <a:noFill/>
-          <a:ln/>
-        </p:spPr>
-        <p:txBody>
-          <a:bodyPr wrap="square" lIns="0" tIns="0" rIns="0" bIns="0" rtlCol="0" anchor="ctr"/>
-          <a:lstStyle/>
-          <a:p>
-            <a:pPr marL="0" indent="0">
-              <a:buNone/>
-            </a:pPr>
-            <a:r>
-              <a:rPr lang="en-US" sz="750" dirty="0">
-                <a:solidFill>
-                  <a:srgbClr val="555555"/>
-                </a:solidFill>
-              </a:rPr>
-              <a:t>feature 2</a:t>
-            </a:r>
-            <a:endParaRPr lang="en-US" sz="750" dirty="0"/>
+            <a:endParaRPr lang="en-US" sz="1200" dirty="0"/>
           </a:p>
         </p:txBody>
       </p:sp>
@@ -15253,14 +12978,14 @@
               <a:buNone/>
             </a:pPr>
             <a:r>
-              <a:rPr lang="en-US" sz="830" dirty="0">
+              <a:rPr lang="en-US" sz="1200" dirty="0">
                 <a:solidFill>
                   <a:srgbClr val="111111"/>
                 </a:solidFill>
               </a:rPr>
               <a:t>You must choose the number of clusters before fitting.</a:t>
             </a:r>
-            <a:endParaRPr lang="en-US" sz="830" dirty="0"/>
+            <a:endParaRPr lang="en-US" sz="1200" dirty="0"/>
           </a:p>
         </p:txBody>
       </p:sp>
@@ -15363,14 +13088,14 @@
               <a:buNone/>
             </a:pPr>
             <a:r>
-              <a:rPr lang="en-US" sz="830" dirty="0">
+              <a:rPr lang="en-US" sz="1200" dirty="0">
                 <a:solidFill>
                   <a:srgbClr val="111111"/>
                 </a:solidFill>
               </a:rPr>
               <a:t>Clusters are compact, separated, and roughly similar in size.</a:t>
             </a:r>
-            <a:endParaRPr lang="en-US" sz="830" dirty="0"/>
+            <a:endParaRPr lang="en-US" sz="1200" dirty="0"/>
           </a:p>
         </p:txBody>
       </p:sp>
@@ -15473,14 +13198,14 @@
               <a:buNone/>
             </a:pPr>
             <a:r>
-              <a:rPr lang="en-US" sz="830" dirty="0">
+              <a:rPr lang="en-US" sz="1200" dirty="0">
                 <a:solidFill>
                   <a:srgbClr val="111111"/>
                 </a:solidFill>
               </a:rPr>
               <a:t>Standardization strongly affects distance calculations.</a:t>
             </a:r>
-            <a:endParaRPr lang="en-US" sz="830" dirty="0"/>
+            <a:endParaRPr lang="en-US" sz="1200" dirty="0"/>
           </a:p>
         </p:txBody>
       </p:sp>
@@ -15583,14 +13308,14 @@
               <a:buNone/>
             </a:pPr>
             <a:r>
-              <a:rPr lang="en-US" sz="830" dirty="0">
+              <a:rPr lang="en-US" sz="1200" dirty="0">
                 <a:solidFill>
                   <a:srgbClr val="111111"/>
                 </a:solidFill>
               </a:rPr>
               <a:t>A cluster number does not automatically equal a real category.</a:t>
             </a:r>
-            <a:endParaRPr lang="en-US" sz="830" dirty="0"/>
+            <a:endParaRPr lang="en-US" sz="1200" dirty="0"/>
           </a:p>
         </p:txBody>
       </p:sp>
@@ -15647,7 +13372,7 @@
         </p:spPr>
         <p:txBody>
           <a:bodyPr wrap="square" lIns="0" tIns="0" rIns="0" bIns="0" rtlCol="0" anchor="ctr">
-            <a:normAutofit/>
+            <a:noAutofit/>
           </a:bodyPr>
           <a:lstStyle/>
           <a:p>
@@ -15655,14 +13380,79 @@
               <a:buNone/>
             </a:pPr>
             <a:r>
-              <a:rPr lang="en-US" sz="820" b="1" dirty="0">
+              <a:rPr lang="en-US" sz="1200" b="1" dirty="0">
                 <a:solidFill>
                   <a:srgbClr val="CC0000"/>
                 </a:solidFill>
               </a:rPr>
               <a:t>Use k-means when a compact-center view of similarity is defensible.</a:t>
             </a:r>
-            <a:endParaRPr lang="en-US" sz="820" dirty="0"/>
+            <a:endParaRPr lang="en-US" sz="1200" dirty="0"/>
+          </a:p>
+        </p:txBody>
+      </p:sp>
+      <p:pic>
+        <p:nvPicPr>
+          <p:cNvPr id="47" name="Picture 46" descr="k-Means Clustering | Brilliant Math &amp; Science Wiki">
+            <a:extLst>
+              <a:ext uri="{FF2B5EF4-FFF2-40B4-BE49-F238E27FC236}">
+                <a16:creationId xmlns:a16="http://schemas.microsoft.com/office/drawing/2014/main" id="{33A40B65-8220-A106-C5CF-0BCC3F83C71E}"/>
+              </a:ext>
+            </a:extLst>
+          </p:cNvPr>
+          <p:cNvPicPr>
+            <a:picLocks noChangeAspect="1"/>
+          </p:cNvPicPr>
+          <p:nvPr/>
+        </p:nvPicPr>
+        <p:blipFill>
+          <a:blip r:embed="rId3"/>
+          <a:stretch>
+            <a:fillRect/>
+          </a:stretch>
+        </p:blipFill>
+        <p:spPr>
+          <a:xfrm>
+            <a:off x="0" y="1490472"/>
+            <a:ext cx="5751576" cy="2923859"/>
+          </a:xfrm>
+          <a:prstGeom prst="rect">
+            <a:avLst/>
+          </a:prstGeom>
+        </p:spPr>
+      </p:pic>
+      <p:sp>
+        <p:nvSpPr>
+          <p:cNvPr id="49" name="TextBox 48">
+            <a:extLst>
+              <a:ext uri="{FF2B5EF4-FFF2-40B4-BE49-F238E27FC236}">
+                <a16:creationId xmlns:a16="http://schemas.microsoft.com/office/drawing/2014/main" id="{BD698FC0-CD6F-B401-DCEC-B0E34E273CAC}"/>
+              </a:ext>
+            </a:extLst>
+          </p:cNvPr>
+          <p:cNvSpPr txBox="1"/>
+          <p:nvPr/>
+        </p:nvSpPr>
+        <p:spPr>
+          <a:xfrm>
+            <a:off x="777240" y="4406057"/>
+            <a:ext cx="6101080" cy="276999"/>
+          </a:xfrm>
+          <a:prstGeom prst="rect">
+            <a:avLst/>
+          </a:prstGeom>
+          <a:noFill/>
+        </p:spPr>
+        <p:txBody>
+          <a:bodyPr wrap="square">
+            <a:spAutoFit/>
+          </a:bodyPr>
+          <a:lstStyle/>
+          <a:p>
+            <a:r>
+              <a:rPr lang="en-US" sz="1200" dirty="0"/>
+              <a:t>Source: https://brilliant.org/wiki/k-means-clustering/</a:t>
+            </a:r>
           </a:p>
         </p:txBody>
       </p:sp>
@@ -15756,14 +13546,14 @@
               <a:buNone/>
             </a:pPr>
             <a:r>
-              <a:rPr lang="en-US" sz="550" b="1" dirty="0">
+              <a:rPr lang="en-US" sz="1200" b="1" dirty="0">
                 <a:solidFill>
                   <a:srgbClr val="555555"/>
                 </a:solidFill>
               </a:rPr>
               <a:t>APPLIED AI DESIGN WORKSHOP</a:t>
             </a:r>
-            <a:endParaRPr lang="en-US" sz="550" dirty="0"/>
+            <a:endParaRPr lang="en-US" sz="1200" dirty="0"/>
           </a:p>
         </p:txBody>
       </p:sp>
@@ -15792,14 +13582,14 @@
               <a:buNone/>
             </a:pPr>
             <a:r>
-              <a:rPr lang="en-US" sz="550" dirty="0">
+              <a:rPr lang="en-US" sz="1200" dirty="0">
                 <a:solidFill>
                   <a:srgbClr val="555555"/>
                 </a:solidFill>
               </a:rPr>
               <a:t>Session 4</a:t>
             </a:r>
-            <a:endParaRPr lang="en-US" sz="550" dirty="0"/>
+            <a:endParaRPr lang="en-US" sz="1200" dirty="0"/>
           </a:p>
         </p:txBody>
       </p:sp>
@@ -15866,770 +13656,14 @@
               <a:buNone/>
             </a:pPr>
             <a:r>
-              <a:rPr lang="en-US" sz="800" dirty="0">
+              <a:rPr lang="en-US" sz="1200" dirty="0">
                 <a:solidFill>
                   <a:srgbClr val="333333"/>
                 </a:solidFill>
               </a:rPr>
               <a:t>Hierarchical methods show how observations merge into groups at different levels of similarity.</a:t>
             </a:r>
-            <a:endParaRPr lang="en-US" sz="800" dirty="0"/>
-          </a:p>
-        </p:txBody>
-      </p:sp>
-      <p:sp>
-        <p:nvSpPr>
-          <p:cNvPr id="7" name="Shape 5"/>
-          <p:cNvSpPr/>
-          <p:nvPr/>
-        </p:nvSpPr>
-        <p:spPr>
-          <a:xfrm>
-            <a:off x="1005840" y="4343400"/>
-            <a:ext cx="0" cy="320040"/>
-          </a:xfrm>
-          <a:prstGeom prst="line">
-            <a:avLst/>
-          </a:prstGeom>
-          <a:noFill/>
-          <a:ln w="10160">
-            <a:solidFill>
-              <a:srgbClr val="999999"/>
-            </a:solidFill>
-            <a:prstDash val="solid"/>
-          </a:ln>
-        </p:spPr>
-        <p:txBody>
-          <a:bodyPr/>
-          <a:lstStyle/>
-          <a:p>
-            <a:endParaRPr lang="en-US"/>
-          </a:p>
-        </p:txBody>
-      </p:sp>
-      <p:sp>
-        <p:nvSpPr>
-          <p:cNvPr id="8" name="Shape 6"/>
-          <p:cNvSpPr/>
-          <p:nvPr/>
-        </p:nvSpPr>
-        <p:spPr>
-          <a:xfrm>
-            <a:off x="1508760" y="4343400"/>
-            <a:ext cx="0" cy="320040"/>
-          </a:xfrm>
-          <a:prstGeom prst="line">
-            <a:avLst/>
-          </a:prstGeom>
-          <a:noFill/>
-          <a:ln w="10160">
-            <a:solidFill>
-              <a:srgbClr val="999999"/>
-            </a:solidFill>
-            <a:prstDash val="solid"/>
-          </a:ln>
-        </p:spPr>
-        <p:txBody>
-          <a:bodyPr/>
-          <a:lstStyle/>
-          <a:p>
-            <a:endParaRPr lang="en-US"/>
-          </a:p>
-        </p:txBody>
-      </p:sp>
-      <p:sp>
-        <p:nvSpPr>
-          <p:cNvPr id="9" name="Shape 7"/>
-          <p:cNvSpPr/>
-          <p:nvPr/>
-        </p:nvSpPr>
-        <p:spPr>
-          <a:xfrm>
-            <a:off x="2011680" y="4343400"/>
-            <a:ext cx="0" cy="320040"/>
-          </a:xfrm>
-          <a:prstGeom prst="line">
-            <a:avLst/>
-          </a:prstGeom>
-          <a:noFill/>
-          <a:ln w="10160">
-            <a:solidFill>
-              <a:srgbClr val="999999"/>
-            </a:solidFill>
-            <a:prstDash val="solid"/>
-          </a:ln>
-        </p:spPr>
-        <p:txBody>
-          <a:bodyPr/>
-          <a:lstStyle/>
-          <a:p>
-            <a:endParaRPr lang="en-US"/>
-          </a:p>
-        </p:txBody>
-      </p:sp>
-      <p:sp>
-        <p:nvSpPr>
-          <p:cNvPr id="10" name="Shape 8"/>
-          <p:cNvSpPr/>
-          <p:nvPr/>
-        </p:nvSpPr>
-        <p:spPr>
-          <a:xfrm>
-            <a:off x="2514600" y="4343400"/>
-            <a:ext cx="0" cy="320040"/>
-          </a:xfrm>
-          <a:prstGeom prst="line">
-            <a:avLst/>
-          </a:prstGeom>
-          <a:noFill/>
-          <a:ln w="10160">
-            <a:solidFill>
-              <a:srgbClr val="999999"/>
-            </a:solidFill>
-            <a:prstDash val="solid"/>
-          </a:ln>
-        </p:spPr>
-        <p:txBody>
-          <a:bodyPr/>
-          <a:lstStyle/>
-          <a:p>
-            <a:endParaRPr lang="en-US"/>
-          </a:p>
-        </p:txBody>
-      </p:sp>
-      <p:sp>
-        <p:nvSpPr>
-          <p:cNvPr id="11" name="Shape 9"/>
-          <p:cNvSpPr/>
-          <p:nvPr/>
-        </p:nvSpPr>
-        <p:spPr>
-          <a:xfrm>
-            <a:off x="3017520" y="4343400"/>
-            <a:ext cx="0" cy="320040"/>
-          </a:xfrm>
-          <a:prstGeom prst="line">
-            <a:avLst/>
-          </a:prstGeom>
-          <a:noFill/>
-          <a:ln w="10160">
-            <a:solidFill>
-              <a:srgbClr val="999999"/>
-            </a:solidFill>
-            <a:prstDash val="solid"/>
-          </a:ln>
-        </p:spPr>
-        <p:txBody>
-          <a:bodyPr/>
-          <a:lstStyle/>
-          <a:p>
-            <a:endParaRPr lang="en-US"/>
-          </a:p>
-        </p:txBody>
-      </p:sp>
-      <p:sp>
-        <p:nvSpPr>
-          <p:cNvPr id="12" name="Shape 10"/>
-          <p:cNvSpPr/>
-          <p:nvPr/>
-        </p:nvSpPr>
-        <p:spPr>
-          <a:xfrm>
-            <a:off x="3520440" y="4343400"/>
-            <a:ext cx="0" cy="320040"/>
-          </a:xfrm>
-          <a:prstGeom prst="line">
-            <a:avLst/>
-          </a:prstGeom>
-          <a:noFill/>
-          <a:ln w="10160">
-            <a:solidFill>
-              <a:srgbClr val="999999"/>
-            </a:solidFill>
-            <a:prstDash val="solid"/>
-          </a:ln>
-        </p:spPr>
-        <p:txBody>
-          <a:bodyPr/>
-          <a:lstStyle/>
-          <a:p>
-            <a:endParaRPr lang="en-US"/>
-          </a:p>
-        </p:txBody>
-      </p:sp>
-      <p:sp>
-        <p:nvSpPr>
-          <p:cNvPr id="13" name="Shape 11"/>
-          <p:cNvSpPr/>
-          <p:nvPr/>
-        </p:nvSpPr>
-        <p:spPr>
-          <a:xfrm>
-            <a:off x="4023360" y="4343400"/>
-            <a:ext cx="0" cy="320040"/>
-          </a:xfrm>
-          <a:prstGeom prst="line">
-            <a:avLst/>
-          </a:prstGeom>
-          <a:noFill/>
-          <a:ln w="10160">
-            <a:solidFill>
-              <a:srgbClr val="999999"/>
-            </a:solidFill>
-            <a:prstDash val="solid"/>
-          </a:ln>
-        </p:spPr>
-        <p:txBody>
-          <a:bodyPr/>
-          <a:lstStyle/>
-          <a:p>
-            <a:endParaRPr lang="en-US"/>
-          </a:p>
-        </p:txBody>
-      </p:sp>
-      <p:sp>
-        <p:nvSpPr>
-          <p:cNvPr id="14" name="Shape 12"/>
-          <p:cNvSpPr/>
-          <p:nvPr/>
-        </p:nvSpPr>
-        <p:spPr>
-          <a:xfrm>
-            <a:off x="4526280" y="4343400"/>
-            <a:ext cx="0" cy="320040"/>
-          </a:xfrm>
-          <a:prstGeom prst="line">
-            <a:avLst/>
-          </a:prstGeom>
-          <a:noFill/>
-          <a:ln w="10160">
-            <a:solidFill>
-              <a:srgbClr val="999999"/>
-            </a:solidFill>
-            <a:prstDash val="solid"/>
-          </a:ln>
-        </p:spPr>
-        <p:txBody>
-          <a:bodyPr/>
-          <a:lstStyle/>
-          <a:p>
-            <a:endParaRPr lang="en-US"/>
-          </a:p>
-        </p:txBody>
-      </p:sp>
-      <p:sp>
-        <p:nvSpPr>
-          <p:cNvPr id="15" name="Shape 13"/>
-          <p:cNvSpPr/>
-          <p:nvPr/>
-        </p:nvSpPr>
-        <p:spPr>
-          <a:xfrm>
-            <a:off x="1005840" y="4114800"/>
-            <a:ext cx="502920" cy="0"/>
-          </a:xfrm>
-          <a:prstGeom prst="line">
-            <a:avLst/>
-          </a:prstGeom>
-          <a:noFill/>
-          <a:ln w="16510">
-            <a:solidFill>
-              <a:srgbClr val="CC0000"/>
-            </a:solidFill>
-            <a:prstDash val="solid"/>
-          </a:ln>
-        </p:spPr>
-        <p:txBody>
-          <a:bodyPr/>
-          <a:lstStyle/>
-          <a:p>
-            <a:endParaRPr lang="en-US"/>
-          </a:p>
-        </p:txBody>
-      </p:sp>
-      <p:sp>
-        <p:nvSpPr>
-          <p:cNvPr id="16" name="Shape 14"/>
-          <p:cNvSpPr/>
-          <p:nvPr/>
-        </p:nvSpPr>
-        <p:spPr>
-          <a:xfrm>
-            <a:off x="1257300" y="4114800"/>
-            <a:ext cx="0" cy="0"/>
-          </a:xfrm>
-          <a:prstGeom prst="line">
-            <a:avLst/>
-          </a:prstGeom>
-          <a:noFill/>
-          <a:ln w="16510">
-            <a:solidFill>
-              <a:srgbClr val="CC0000"/>
-            </a:solidFill>
-            <a:prstDash val="solid"/>
-          </a:ln>
-        </p:spPr>
-        <p:txBody>
-          <a:bodyPr/>
-          <a:lstStyle/>
-          <a:p>
-            <a:endParaRPr lang="en-US"/>
-          </a:p>
-        </p:txBody>
-      </p:sp>
-      <p:sp>
-        <p:nvSpPr>
-          <p:cNvPr id="17" name="Shape 15"/>
-          <p:cNvSpPr/>
-          <p:nvPr/>
-        </p:nvSpPr>
-        <p:spPr>
-          <a:xfrm>
-            <a:off x="2011680" y="3977640"/>
-            <a:ext cx="502920" cy="0"/>
-          </a:xfrm>
-          <a:prstGeom prst="line">
-            <a:avLst/>
-          </a:prstGeom>
-          <a:noFill/>
-          <a:ln w="16510">
-            <a:solidFill>
-              <a:srgbClr val="CC0000"/>
-            </a:solidFill>
-            <a:prstDash val="solid"/>
-          </a:ln>
-        </p:spPr>
-        <p:txBody>
-          <a:bodyPr/>
-          <a:lstStyle/>
-          <a:p>
-            <a:endParaRPr lang="en-US"/>
-          </a:p>
-        </p:txBody>
-      </p:sp>
-      <p:sp>
-        <p:nvSpPr>
-          <p:cNvPr id="18" name="Shape 16"/>
-          <p:cNvSpPr/>
-          <p:nvPr/>
-        </p:nvSpPr>
-        <p:spPr>
-          <a:xfrm>
-            <a:off x="2263140" y="3977640"/>
-            <a:ext cx="0" cy="0"/>
-          </a:xfrm>
-          <a:prstGeom prst="line">
-            <a:avLst/>
-          </a:prstGeom>
-          <a:noFill/>
-          <a:ln w="16510">
-            <a:solidFill>
-              <a:srgbClr val="CC0000"/>
-            </a:solidFill>
-            <a:prstDash val="solid"/>
-          </a:ln>
-        </p:spPr>
-        <p:txBody>
-          <a:bodyPr/>
-          <a:lstStyle/>
-          <a:p>
-            <a:endParaRPr lang="en-US"/>
-          </a:p>
-        </p:txBody>
-      </p:sp>
-      <p:sp>
-        <p:nvSpPr>
-          <p:cNvPr id="19" name="Shape 17"/>
-          <p:cNvSpPr/>
-          <p:nvPr/>
-        </p:nvSpPr>
-        <p:spPr>
-          <a:xfrm>
-            <a:off x="3017520" y="3840480"/>
-            <a:ext cx="502920" cy="0"/>
-          </a:xfrm>
-          <a:prstGeom prst="line">
-            <a:avLst/>
-          </a:prstGeom>
-          <a:noFill/>
-          <a:ln w="16510">
-            <a:solidFill>
-              <a:srgbClr val="CC0000"/>
-            </a:solidFill>
-            <a:prstDash val="solid"/>
-          </a:ln>
-        </p:spPr>
-        <p:txBody>
-          <a:bodyPr/>
-          <a:lstStyle/>
-          <a:p>
-            <a:endParaRPr lang="en-US"/>
-          </a:p>
-        </p:txBody>
-      </p:sp>
-      <p:sp>
-        <p:nvSpPr>
-          <p:cNvPr id="20" name="Shape 18"/>
-          <p:cNvSpPr/>
-          <p:nvPr/>
-        </p:nvSpPr>
-        <p:spPr>
-          <a:xfrm>
-            <a:off x="3268980" y="3840480"/>
-            <a:ext cx="0" cy="0"/>
-          </a:xfrm>
-          <a:prstGeom prst="line">
-            <a:avLst/>
-          </a:prstGeom>
-          <a:noFill/>
-          <a:ln w="16510">
-            <a:solidFill>
-              <a:srgbClr val="CC0000"/>
-            </a:solidFill>
-            <a:prstDash val="solid"/>
-          </a:ln>
-        </p:spPr>
-        <p:txBody>
-          <a:bodyPr/>
-          <a:lstStyle/>
-          <a:p>
-            <a:endParaRPr lang="en-US"/>
-          </a:p>
-        </p:txBody>
-      </p:sp>
-      <p:sp>
-        <p:nvSpPr>
-          <p:cNvPr id="21" name="Shape 19"/>
-          <p:cNvSpPr/>
-          <p:nvPr/>
-        </p:nvSpPr>
-        <p:spPr>
-          <a:xfrm>
-            <a:off x="4023360" y="4160520"/>
-            <a:ext cx="502920" cy="0"/>
-          </a:xfrm>
-          <a:prstGeom prst="line">
-            <a:avLst/>
-          </a:prstGeom>
-          <a:noFill/>
-          <a:ln w="16510">
-            <a:solidFill>
-              <a:srgbClr val="CC0000"/>
-            </a:solidFill>
-            <a:prstDash val="solid"/>
-          </a:ln>
-        </p:spPr>
-        <p:txBody>
-          <a:bodyPr/>
-          <a:lstStyle/>
-          <a:p>
-            <a:endParaRPr lang="en-US"/>
-          </a:p>
-        </p:txBody>
-      </p:sp>
-      <p:sp>
-        <p:nvSpPr>
-          <p:cNvPr id="22" name="Shape 20"/>
-          <p:cNvSpPr/>
-          <p:nvPr/>
-        </p:nvSpPr>
-        <p:spPr>
-          <a:xfrm>
-            <a:off x="4274820" y="4160520"/>
-            <a:ext cx="0" cy="0"/>
-          </a:xfrm>
-          <a:prstGeom prst="line">
-            <a:avLst/>
-          </a:prstGeom>
-          <a:noFill/>
-          <a:ln w="16510">
-            <a:solidFill>
-              <a:srgbClr val="CC0000"/>
-            </a:solidFill>
-            <a:prstDash val="solid"/>
-          </a:ln>
-        </p:spPr>
-        <p:txBody>
-          <a:bodyPr/>
-          <a:lstStyle/>
-          <a:p>
-            <a:endParaRPr lang="en-US"/>
-          </a:p>
-        </p:txBody>
-      </p:sp>
-      <p:sp>
-        <p:nvSpPr>
-          <p:cNvPr id="23" name="Shape 21"/>
-          <p:cNvSpPr/>
-          <p:nvPr/>
-        </p:nvSpPr>
-        <p:spPr>
-          <a:xfrm>
-            <a:off x="1257300" y="3566160"/>
-            <a:ext cx="1005840" cy="0"/>
-          </a:xfrm>
-          <a:prstGeom prst="line">
-            <a:avLst/>
-          </a:prstGeom>
-          <a:noFill/>
-          <a:ln w="16510">
-            <a:solidFill>
-              <a:srgbClr val="CC0000"/>
-            </a:solidFill>
-            <a:prstDash val="solid"/>
-          </a:ln>
-        </p:spPr>
-        <p:txBody>
-          <a:bodyPr/>
-          <a:lstStyle/>
-          <a:p>
-            <a:endParaRPr lang="en-US"/>
-          </a:p>
-        </p:txBody>
-      </p:sp>
-      <p:sp>
-        <p:nvSpPr>
-          <p:cNvPr id="24" name="Shape 22"/>
-          <p:cNvSpPr/>
-          <p:nvPr/>
-        </p:nvSpPr>
-        <p:spPr>
-          <a:xfrm>
-            <a:off x="1760220" y="3566160"/>
-            <a:ext cx="0" cy="0"/>
-          </a:xfrm>
-          <a:prstGeom prst="line">
-            <a:avLst/>
-          </a:prstGeom>
-          <a:noFill/>
-          <a:ln w="16510">
-            <a:solidFill>
-              <a:srgbClr val="CC0000"/>
-            </a:solidFill>
-            <a:prstDash val="solid"/>
-          </a:ln>
-        </p:spPr>
-        <p:txBody>
-          <a:bodyPr/>
-          <a:lstStyle/>
-          <a:p>
-            <a:endParaRPr lang="en-US"/>
-          </a:p>
-        </p:txBody>
-      </p:sp>
-      <p:sp>
-        <p:nvSpPr>
-          <p:cNvPr id="25" name="Shape 23"/>
-          <p:cNvSpPr/>
-          <p:nvPr/>
-        </p:nvSpPr>
-        <p:spPr>
-          <a:xfrm>
-            <a:off x="3268980" y="3246120"/>
-            <a:ext cx="1005840" cy="0"/>
-          </a:xfrm>
-          <a:prstGeom prst="line">
-            <a:avLst/>
-          </a:prstGeom>
-          <a:noFill/>
-          <a:ln w="16510">
-            <a:solidFill>
-              <a:srgbClr val="CC0000"/>
-            </a:solidFill>
-            <a:prstDash val="solid"/>
-          </a:ln>
-        </p:spPr>
-        <p:txBody>
-          <a:bodyPr/>
-          <a:lstStyle/>
-          <a:p>
-            <a:endParaRPr lang="en-US"/>
-          </a:p>
-        </p:txBody>
-      </p:sp>
-      <p:sp>
-        <p:nvSpPr>
-          <p:cNvPr id="26" name="Shape 24"/>
-          <p:cNvSpPr/>
-          <p:nvPr/>
-        </p:nvSpPr>
-        <p:spPr>
-          <a:xfrm>
-            <a:off x="3771900" y="3246120"/>
-            <a:ext cx="0" cy="0"/>
-          </a:xfrm>
-          <a:prstGeom prst="line">
-            <a:avLst/>
-          </a:prstGeom>
-          <a:noFill/>
-          <a:ln w="16510">
-            <a:solidFill>
-              <a:srgbClr val="CC0000"/>
-            </a:solidFill>
-            <a:prstDash val="solid"/>
-          </a:ln>
-        </p:spPr>
-        <p:txBody>
-          <a:bodyPr/>
-          <a:lstStyle/>
-          <a:p>
-            <a:endParaRPr lang="en-US"/>
-          </a:p>
-        </p:txBody>
-      </p:sp>
-      <p:sp>
-        <p:nvSpPr>
-          <p:cNvPr id="27" name="Shape 25"/>
-          <p:cNvSpPr/>
-          <p:nvPr/>
-        </p:nvSpPr>
-        <p:spPr>
-          <a:xfrm>
-            <a:off x="1760220" y="2788920"/>
-            <a:ext cx="2011680" cy="0"/>
-          </a:xfrm>
-          <a:prstGeom prst="line">
-            <a:avLst/>
-          </a:prstGeom>
-          <a:noFill/>
-          <a:ln w="16510">
-            <a:solidFill>
-              <a:srgbClr val="CC0000"/>
-            </a:solidFill>
-            <a:prstDash val="solid"/>
-          </a:ln>
-        </p:spPr>
-        <p:txBody>
-          <a:bodyPr/>
-          <a:lstStyle/>
-          <a:p>
-            <a:endParaRPr lang="en-US"/>
-          </a:p>
-        </p:txBody>
-      </p:sp>
-      <p:sp>
-        <p:nvSpPr>
-          <p:cNvPr id="28" name="Shape 26"/>
-          <p:cNvSpPr/>
-          <p:nvPr/>
-        </p:nvSpPr>
-        <p:spPr>
-          <a:xfrm>
-            <a:off x="2766060" y="2788920"/>
-            <a:ext cx="0" cy="0"/>
-          </a:xfrm>
-          <a:prstGeom prst="line">
-            <a:avLst/>
-          </a:prstGeom>
-          <a:noFill/>
-          <a:ln w="16510">
-            <a:solidFill>
-              <a:srgbClr val="CC0000"/>
-            </a:solidFill>
-            <a:prstDash val="solid"/>
-          </a:ln>
-        </p:spPr>
-        <p:txBody>
-          <a:bodyPr/>
-          <a:lstStyle/>
-          <a:p>
-            <a:endParaRPr lang="en-US"/>
-          </a:p>
-        </p:txBody>
-      </p:sp>
-      <p:sp>
-        <p:nvSpPr>
-          <p:cNvPr id="29" name="Shape 27"/>
-          <p:cNvSpPr/>
-          <p:nvPr/>
-        </p:nvSpPr>
-        <p:spPr>
-          <a:xfrm>
-            <a:off x="2766060" y="1965960"/>
-            <a:ext cx="2308860" cy="0"/>
-          </a:xfrm>
-          <a:prstGeom prst="line">
-            <a:avLst/>
-          </a:prstGeom>
-          <a:noFill/>
-          <a:ln w="16510">
-            <a:solidFill>
-              <a:srgbClr val="CC0000"/>
-            </a:solidFill>
-            <a:prstDash val="solid"/>
-          </a:ln>
-        </p:spPr>
-        <p:txBody>
-          <a:bodyPr/>
-          <a:lstStyle/>
-          <a:p>
-            <a:endParaRPr lang="en-US"/>
-          </a:p>
-        </p:txBody>
-      </p:sp>
-      <p:sp>
-        <p:nvSpPr>
-          <p:cNvPr id="30" name="Shape 28"/>
-          <p:cNvSpPr/>
-          <p:nvPr/>
-        </p:nvSpPr>
-        <p:spPr>
-          <a:xfrm>
-            <a:off x="5074920" y="1965960"/>
-            <a:ext cx="0" cy="0"/>
-          </a:xfrm>
-          <a:prstGeom prst="line">
-            <a:avLst/>
-          </a:prstGeom>
-          <a:noFill/>
-          <a:ln w="16510">
-            <a:solidFill>
-              <a:srgbClr val="CC0000"/>
-            </a:solidFill>
-            <a:prstDash val="solid"/>
-          </a:ln>
-        </p:spPr>
-        <p:txBody>
-          <a:bodyPr/>
-          <a:lstStyle/>
-          <a:p>
-            <a:endParaRPr lang="en-US"/>
-          </a:p>
-        </p:txBody>
-      </p:sp>
-      <p:sp>
-        <p:nvSpPr>
-          <p:cNvPr id="31" name="Text 29"/>
-          <p:cNvSpPr/>
-          <p:nvPr/>
-        </p:nvSpPr>
-        <p:spPr>
-          <a:xfrm>
-            <a:off x="1508760" y="4846320"/>
-            <a:ext cx="2560320" cy="146304"/>
-          </a:xfrm>
-          <a:prstGeom prst="rect">
-            <a:avLst/>
-          </a:prstGeom>
-          <a:noFill/>
-          <a:ln/>
-        </p:spPr>
-        <p:txBody>
-          <a:bodyPr wrap="square" lIns="0" tIns="0" rIns="0" bIns="0" rtlCol="0" anchor="ctr"/>
-          <a:lstStyle/>
-          <a:p>
-            <a:pPr marL="0" indent="0" algn="ctr">
-              <a:buNone/>
-            </a:pPr>
-            <a:r>
-              <a:rPr lang="en-US" sz="750" dirty="0">
-                <a:solidFill>
-                  <a:srgbClr val="555555"/>
-                </a:solidFill>
-              </a:rPr>
-              <a:t>observations</a:t>
-            </a:r>
-            <a:endParaRPr lang="en-US" sz="750" dirty="0"/>
+            <a:endParaRPr lang="en-US" sz="1200" dirty="0"/>
           </a:p>
         </p:txBody>
       </p:sp>
@@ -16732,14 +13766,14 @@
               <a:buNone/>
             </a:pPr>
             <a:r>
-              <a:rPr lang="en-US" sz="820" dirty="0">
+              <a:rPr lang="en-US" sz="1200" dirty="0">
                 <a:solidFill>
                   <a:srgbClr val="111111"/>
                 </a:solidFill>
               </a:rPr>
               <a:t>Reveals nested structure and does not require choosing K before fitting.</a:t>
             </a:r>
-            <a:endParaRPr lang="en-US" sz="820" dirty="0"/>
+            <a:endParaRPr lang="en-US" sz="1200" dirty="0"/>
           </a:p>
         </p:txBody>
       </p:sp>
@@ -16842,14 +13876,14 @@
               <a:buNone/>
             </a:pPr>
             <a:r>
-              <a:rPr lang="en-US" sz="820" dirty="0">
+              <a:rPr lang="en-US" sz="1200" dirty="0">
                 <a:solidFill>
                   <a:srgbClr val="111111"/>
                 </a:solidFill>
               </a:rPr>
               <a:t>Cut the tree at a level that balances detail and interpretability.</a:t>
             </a:r>
-            <a:endParaRPr lang="en-US" sz="820" dirty="0"/>
+            <a:endParaRPr lang="en-US" sz="1200" dirty="0"/>
           </a:p>
         </p:txBody>
       </p:sp>
@@ -16952,14 +13986,14 @@
               <a:buNone/>
             </a:pPr>
             <a:r>
-              <a:rPr lang="en-US" sz="820" dirty="0">
+              <a:rPr lang="en-US" sz="1200" dirty="0">
                 <a:solidFill>
                   <a:srgbClr val="111111"/>
                 </a:solidFill>
               </a:rPr>
               <a:t>Distance metric and linkage method influence results.</a:t>
             </a:r>
-            <a:endParaRPr lang="en-US" sz="820" dirty="0"/>
+            <a:endParaRPr lang="en-US" sz="1200" dirty="0"/>
           </a:p>
         </p:txBody>
       </p:sp>
@@ -17062,14 +14096,14 @@
               <a:buNone/>
             </a:pPr>
             <a:r>
-              <a:rPr lang="en-US" sz="820" dirty="0">
+              <a:rPr lang="en-US" sz="1200" dirty="0">
                 <a:solidFill>
                   <a:srgbClr val="111111"/>
                 </a:solidFill>
               </a:rPr>
               <a:t>Can be hard to read for very large datasets without sampling or summarization.</a:t>
             </a:r>
-            <a:endParaRPr lang="en-US" sz="820" dirty="0"/>
+            <a:endParaRPr lang="en-US" sz="1200" dirty="0"/>
           </a:p>
         </p:txBody>
       </p:sp>
@@ -17126,7 +14160,7 @@
         </p:spPr>
         <p:txBody>
           <a:bodyPr wrap="square" lIns="0" tIns="0" rIns="0" bIns="0" rtlCol="0" anchor="ctr">
-            <a:normAutofit/>
+            <a:noAutofit/>
           </a:bodyPr>
           <a:lstStyle/>
           <a:p>
@@ -17134,14 +14168,79 @@
               <a:buNone/>
             </a:pPr>
             <a:r>
-              <a:rPr lang="en-US" sz="820" b="1" dirty="0">
+              <a:rPr lang="en-US" sz="1200" b="1" dirty="0">
                 <a:solidFill>
                   <a:srgbClr val="CC0000"/>
                 </a:solidFill>
               </a:rPr>
               <a:t>Hierarchical clustering is useful when you want to see structure at multiple resolutions.</a:t>
             </a:r>
-            <a:endParaRPr lang="en-US" sz="820" dirty="0"/>
+            <a:endParaRPr lang="en-US" sz="1200" dirty="0"/>
+          </a:p>
+        </p:txBody>
+      </p:sp>
+      <p:pic>
+        <p:nvPicPr>
+          <p:cNvPr id="46" name="Picture 45" descr="How the Hierarchical Clustering Algorithm Works">
+            <a:extLst>
+              <a:ext uri="{FF2B5EF4-FFF2-40B4-BE49-F238E27FC236}">
+                <a16:creationId xmlns:a16="http://schemas.microsoft.com/office/drawing/2014/main" id="{1C3485CF-E427-C005-2E6E-4F676F97C3BE}"/>
+              </a:ext>
+            </a:extLst>
+          </p:cNvPr>
+          <p:cNvPicPr>
+            <a:picLocks noChangeAspect="1"/>
+          </p:cNvPicPr>
+          <p:nvPr/>
+        </p:nvPicPr>
+        <p:blipFill>
+          <a:blip r:embed="rId3"/>
+          <a:stretch>
+            <a:fillRect/>
+          </a:stretch>
+        </p:blipFill>
+        <p:spPr>
+          <a:xfrm>
+            <a:off x="640080" y="1536192"/>
+            <a:ext cx="4998560" cy="3714750"/>
+          </a:xfrm>
+          <a:prstGeom prst="rect">
+            <a:avLst/>
+          </a:prstGeom>
+        </p:spPr>
+      </p:pic>
+      <p:sp>
+        <p:nvSpPr>
+          <p:cNvPr id="48" name="TextBox 47">
+            <a:extLst>
+              <a:ext uri="{FF2B5EF4-FFF2-40B4-BE49-F238E27FC236}">
+                <a16:creationId xmlns:a16="http://schemas.microsoft.com/office/drawing/2014/main" id="{EFE36B38-8C1B-0E14-EFB1-E21350AE520A}"/>
+              </a:ext>
+            </a:extLst>
+          </p:cNvPr>
+          <p:cNvSpPr txBox="1"/>
+          <p:nvPr/>
+        </p:nvSpPr>
+        <p:spPr>
+          <a:xfrm>
+            <a:off x="876300" y="5212080"/>
+            <a:ext cx="6101080" cy="276999"/>
+          </a:xfrm>
+          <a:prstGeom prst="rect">
+            <a:avLst/>
+          </a:prstGeom>
+          <a:noFill/>
+        </p:spPr>
+        <p:txBody>
+          <a:bodyPr wrap="square">
+            <a:spAutoFit/>
+          </a:bodyPr>
+          <a:lstStyle/>
+          <a:p>
+            <a:r>
+              <a:rPr lang="en-US" sz="1200" dirty="0"/>
+              <a:t>Source: https://dataaspirant.com/hierarchical-clustering-algorithm/</a:t>
+            </a:r>
           </a:p>
         </p:txBody>
       </p:sp>
@@ -17235,14 +14334,14 @@
               <a:buNone/>
             </a:pPr>
             <a:r>
-              <a:rPr lang="en-US" sz="550" b="1" dirty="0">
+              <a:rPr lang="en-US" sz="1200" b="1" dirty="0">
                 <a:solidFill>
                   <a:srgbClr val="555555"/>
                 </a:solidFill>
               </a:rPr>
               <a:t>APPLIED AI DESIGN WORKSHOP</a:t>
             </a:r>
-            <a:endParaRPr lang="en-US" sz="550" dirty="0"/>
+            <a:endParaRPr lang="en-US" sz="1200" dirty="0"/>
           </a:p>
         </p:txBody>
       </p:sp>
@@ -17271,14 +14370,14 @@
               <a:buNone/>
             </a:pPr>
             <a:r>
-              <a:rPr lang="en-US" sz="550" dirty="0">
+              <a:rPr lang="en-US" sz="1200" dirty="0">
                 <a:solidFill>
                   <a:srgbClr val="555555"/>
                 </a:solidFill>
               </a:rPr>
               <a:t>Session 4</a:t>
             </a:r>
-            <a:endParaRPr lang="en-US" sz="550" dirty="0"/>
+            <a:endParaRPr lang="en-US" sz="1200" dirty="0"/>
           </a:p>
         </p:txBody>
       </p:sp>
@@ -17345,910 +14444,14 @@
               <a:buNone/>
             </a:pPr>
             <a:r>
-              <a:rPr lang="en-US" sz="800" dirty="0">
+              <a:rPr lang="en-US" sz="1200" dirty="0">
                 <a:solidFill>
                   <a:srgbClr val="333333"/>
                 </a:solidFill>
               </a:rPr>
               <a:t>DBSCAN groups observations in dense regions and can label sparse points as noise.</a:t>
             </a:r>
-            <a:endParaRPr lang="en-US" sz="800" dirty="0"/>
-          </a:p>
-        </p:txBody>
-      </p:sp>
-      <p:sp>
-        <p:nvSpPr>
-          <p:cNvPr id="7" name="Shape 5"/>
-          <p:cNvSpPr/>
-          <p:nvPr/>
-        </p:nvSpPr>
-        <p:spPr>
-          <a:xfrm>
-            <a:off x="1289304" y="2203704"/>
-            <a:ext cx="73152" cy="73152"/>
-          </a:xfrm>
-          <a:prstGeom prst="ellipse">
-            <a:avLst/>
-          </a:prstGeom>
-          <a:solidFill>
-            <a:srgbClr val="CC0000"/>
-          </a:solidFill>
-          <a:ln w="12700">
-            <a:solidFill>
-              <a:srgbClr val="CC0000"/>
-            </a:solidFill>
-            <a:prstDash val="solid"/>
-          </a:ln>
-        </p:spPr>
-        <p:txBody>
-          <a:bodyPr/>
-          <a:lstStyle/>
-          <a:p>
-            <a:endParaRPr lang="en-US"/>
-          </a:p>
-        </p:txBody>
-      </p:sp>
-      <p:sp>
-        <p:nvSpPr>
-          <p:cNvPr id="8" name="Shape 6"/>
-          <p:cNvSpPr/>
-          <p:nvPr/>
-        </p:nvSpPr>
-        <p:spPr>
-          <a:xfrm>
-            <a:off x="1563624" y="2020824"/>
-            <a:ext cx="73152" cy="73152"/>
-          </a:xfrm>
-          <a:prstGeom prst="ellipse">
-            <a:avLst/>
-          </a:prstGeom>
-          <a:solidFill>
-            <a:srgbClr val="CC0000"/>
-          </a:solidFill>
-          <a:ln w="12700">
-            <a:solidFill>
-              <a:srgbClr val="CC0000"/>
-            </a:solidFill>
-            <a:prstDash val="solid"/>
-          </a:ln>
-        </p:spPr>
-        <p:txBody>
-          <a:bodyPr/>
-          <a:lstStyle/>
-          <a:p>
-            <a:endParaRPr lang="en-US"/>
-          </a:p>
-        </p:txBody>
-      </p:sp>
-      <p:sp>
-        <p:nvSpPr>
-          <p:cNvPr id="9" name="Shape 7"/>
-          <p:cNvSpPr/>
-          <p:nvPr/>
-        </p:nvSpPr>
-        <p:spPr>
-          <a:xfrm>
-            <a:off x="1837944" y="2112264"/>
-            <a:ext cx="73152" cy="73152"/>
-          </a:xfrm>
-          <a:prstGeom prst="ellipse">
-            <a:avLst/>
-          </a:prstGeom>
-          <a:solidFill>
-            <a:srgbClr val="CC0000"/>
-          </a:solidFill>
-          <a:ln w="12700">
-            <a:solidFill>
-              <a:srgbClr val="CC0000"/>
-            </a:solidFill>
-            <a:prstDash val="solid"/>
-          </a:ln>
-        </p:spPr>
-        <p:txBody>
-          <a:bodyPr/>
-          <a:lstStyle/>
-          <a:p>
-            <a:endParaRPr lang="en-US"/>
-          </a:p>
-        </p:txBody>
-      </p:sp>
-      <p:sp>
-        <p:nvSpPr>
-          <p:cNvPr id="10" name="Shape 8"/>
-          <p:cNvSpPr/>
-          <p:nvPr/>
-        </p:nvSpPr>
-        <p:spPr>
-          <a:xfrm>
-            <a:off x="2112264" y="2295144"/>
-            <a:ext cx="73152" cy="73152"/>
-          </a:xfrm>
-          <a:prstGeom prst="ellipse">
-            <a:avLst/>
-          </a:prstGeom>
-          <a:solidFill>
-            <a:srgbClr val="CC0000"/>
-          </a:solidFill>
-          <a:ln w="12700">
-            <a:solidFill>
-              <a:srgbClr val="CC0000"/>
-            </a:solidFill>
-            <a:prstDash val="solid"/>
-          </a:ln>
-        </p:spPr>
-        <p:txBody>
-          <a:bodyPr/>
-          <a:lstStyle/>
-          <a:p>
-            <a:endParaRPr lang="en-US"/>
-          </a:p>
-        </p:txBody>
-      </p:sp>
-      <p:sp>
-        <p:nvSpPr>
-          <p:cNvPr id="11" name="Shape 9"/>
-          <p:cNvSpPr/>
-          <p:nvPr/>
-        </p:nvSpPr>
-        <p:spPr>
-          <a:xfrm>
-            <a:off x="1380744" y="2569464"/>
-            <a:ext cx="73152" cy="73152"/>
-          </a:xfrm>
-          <a:prstGeom prst="ellipse">
-            <a:avLst/>
-          </a:prstGeom>
-          <a:solidFill>
-            <a:srgbClr val="CC0000"/>
-          </a:solidFill>
-          <a:ln w="12700">
-            <a:solidFill>
-              <a:srgbClr val="CC0000"/>
-            </a:solidFill>
-            <a:prstDash val="solid"/>
-          </a:ln>
-        </p:spPr>
-        <p:txBody>
-          <a:bodyPr/>
-          <a:lstStyle/>
-          <a:p>
-            <a:endParaRPr lang="en-US"/>
-          </a:p>
-        </p:txBody>
-      </p:sp>
-      <p:sp>
-        <p:nvSpPr>
-          <p:cNvPr id="12" name="Shape 10"/>
-          <p:cNvSpPr/>
-          <p:nvPr/>
-        </p:nvSpPr>
-        <p:spPr>
-          <a:xfrm>
-            <a:off x="1655064" y="2478024"/>
-            <a:ext cx="73152" cy="73152"/>
-          </a:xfrm>
-          <a:prstGeom prst="ellipse">
-            <a:avLst/>
-          </a:prstGeom>
-          <a:solidFill>
-            <a:srgbClr val="CC0000"/>
-          </a:solidFill>
-          <a:ln w="12700">
-            <a:solidFill>
-              <a:srgbClr val="CC0000"/>
-            </a:solidFill>
-            <a:prstDash val="solid"/>
-          </a:ln>
-        </p:spPr>
-        <p:txBody>
-          <a:bodyPr/>
-          <a:lstStyle/>
-          <a:p>
-            <a:endParaRPr lang="en-US"/>
-          </a:p>
-        </p:txBody>
-      </p:sp>
-      <p:sp>
-        <p:nvSpPr>
-          <p:cNvPr id="13" name="Shape 11"/>
-          <p:cNvSpPr/>
-          <p:nvPr/>
-        </p:nvSpPr>
-        <p:spPr>
-          <a:xfrm>
-            <a:off x="1929384" y="2615184"/>
-            <a:ext cx="73152" cy="73152"/>
-          </a:xfrm>
-          <a:prstGeom prst="ellipse">
-            <a:avLst/>
-          </a:prstGeom>
-          <a:solidFill>
-            <a:srgbClr val="CC0000"/>
-          </a:solidFill>
-          <a:ln w="12700">
-            <a:solidFill>
-              <a:srgbClr val="CC0000"/>
-            </a:solidFill>
-            <a:prstDash val="solid"/>
-          </a:ln>
-        </p:spPr>
-        <p:txBody>
-          <a:bodyPr/>
-          <a:lstStyle/>
-          <a:p>
-            <a:endParaRPr lang="en-US"/>
-          </a:p>
-        </p:txBody>
-      </p:sp>
-      <p:sp>
-        <p:nvSpPr>
-          <p:cNvPr id="14" name="Shape 12"/>
-          <p:cNvSpPr/>
-          <p:nvPr/>
-        </p:nvSpPr>
-        <p:spPr>
-          <a:xfrm>
-            <a:off x="2203704" y="2569464"/>
-            <a:ext cx="73152" cy="73152"/>
-          </a:xfrm>
-          <a:prstGeom prst="ellipse">
-            <a:avLst/>
-          </a:prstGeom>
-          <a:solidFill>
-            <a:srgbClr val="CC0000"/>
-          </a:solidFill>
-          <a:ln w="12700">
-            <a:solidFill>
-              <a:srgbClr val="CC0000"/>
-            </a:solidFill>
-            <a:prstDash val="solid"/>
-          </a:ln>
-        </p:spPr>
-        <p:txBody>
-          <a:bodyPr/>
-          <a:lstStyle/>
-          <a:p>
-            <a:endParaRPr lang="en-US"/>
-          </a:p>
-        </p:txBody>
-      </p:sp>
-      <p:sp>
-        <p:nvSpPr>
-          <p:cNvPr id="15" name="Shape 13"/>
-          <p:cNvSpPr/>
-          <p:nvPr/>
-        </p:nvSpPr>
-        <p:spPr>
-          <a:xfrm>
-            <a:off x="1472184" y="2889504"/>
-            <a:ext cx="73152" cy="73152"/>
-          </a:xfrm>
-          <a:prstGeom prst="ellipse">
-            <a:avLst/>
-          </a:prstGeom>
-          <a:solidFill>
-            <a:srgbClr val="CC0000"/>
-          </a:solidFill>
-          <a:ln w="12700">
-            <a:solidFill>
-              <a:srgbClr val="CC0000"/>
-            </a:solidFill>
-            <a:prstDash val="solid"/>
-          </a:ln>
-        </p:spPr>
-        <p:txBody>
-          <a:bodyPr/>
-          <a:lstStyle/>
-          <a:p>
-            <a:endParaRPr lang="en-US"/>
-          </a:p>
-        </p:txBody>
-      </p:sp>
-      <p:sp>
-        <p:nvSpPr>
-          <p:cNvPr id="16" name="Shape 14"/>
-          <p:cNvSpPr/>
-          <p:nvPr/>
-        </p:nvSpPr>
-        <p:spPr>
-          <a:xfrm>
-            <a:off x="1746504" y="2843784"/>
-            <a:ext cx="73152" cy="73152"/>
-          </a:xfrm>
-          <a:prstGeom prst="ellipse">
-            <a:avLst/>
-          </a:prstGeom>
-          <a:solidFill>
-            <a:srgbClr val="CC0000"/>
-          </a:solidFill>
-          <a:ln w="12700">
-            <a:solidFill>
-              <a:srgbClr val="CC0000"/>
-            </a:solidFill>
-            <a:prstDash val="solid"/>
-          </a:ln>
-        </p:spPr>
-        <p:txBody>
-          <a:bodyPr/>
-          <a:lstStyle/>
-          <a:p>
-            <a:endParaRPr lang="en-US"/>
-          </a:p>
-        </p:txBody>
-      </p:sp>
-      <p:sp>
-        <p:nvSpPr>
-          <p:cNvPr id="17" name="Shape 15"/>
-          <p:cNvSpPr/>
-          <p:nvPr/>
-        </p:nvSpPr>
-        <p:spPr>
-          <a:xfrm>
-            <a:off x="2020824" y="2935224"/>
-            <a:ext cx="73152" cy="73152"/>
-          </a:xfrm>
-          <a:prstGeom prst="ellipse">
-            <a:avLst/>
-          </a:prstGeom>
-          <a:solidFill>
-            <a:srgbClr val="CC0000"/>
-          </a:solidFill>
-          <a:ln w="12700">
-            <a:solidFill>
-              <a:srgbClr val="CC0000"/>
-            </a:solidFill>
-            <a:prstDash val="solid"/>
-          </a:ln>
-        </p:spPr>
-        <p:txBody>
-          <a:bodyPr/>
-          <a:lstStyle/>
-          <a:p>
-            <a:endParaRPr lang="en-US"/>
-          </a:p>
-        </p:txBody>
-      </p:sp>
-      <p:sp>
-        <p:nvSpPr>
-          <p:cNvPr id="18" name="Shape 16"/>
-          <p:cNvSpPr/>
-          <p:nvPr/>
-        </p:nvSpPr>
-        <p:spPr>
-          <a:xfrm>
-            <a:off x="3209544" y="3118104"/>
-            <a:ext cx="73152" cy="73152"/>
-          </a:xfrm>
-          <a:prstGeom prst="ellipse">
-            <a:avLst/>
-          </a:prstGeom>
-          <a:solidFill>
-            <a:srgbClr val="777777"/>
-          </a:solidFill>
-          <a:ln w="12700">
-            <a:solidFill>
-              <a:srgbClr val="777777"/>
-            </a:solidFill>
-            <a:prstDash val="solid"/>
-          </a:ln>
-        </p:spPr>
-        <p:txBody>
-          <a:bodyPr/>
-          <a:lstStyle/>
-          <a:p>
-            <a:endParaRPr lang="en-US"/>
-          </a:p>
-        </p:txBody>
-      </p:sp>
-      <p:sp>
-        <p:nvSpPr>
-          <p:cNvPr id="19" name="Shape 17"/>
-          <p:cNvSpPr/>
-          <p:nvPr/>
-        </p:nvSpPr>
-        <p:spPr>
-          <a:xfrm>
-            <a:off x="3483864" y="2935224"/>
-            <a:ext cx="73152" cy="73152"/>
-          </a:xfrm>
-          <a:prstGeom prst="ellipse">
-            <a:avLst/>
-          </a:prstGeom>
-          <a:solidFill>
-            <a:srgbClr val="777777"/>
-          </a:solidFill>
-          <a:ln w="12700">
-            <a:solidFill>
-              <a:srgbClr val="777777"/>
-            </a:solidFill>
-            <a:prstDash val="solid"/>
-          </a:ln>
-        </p:spPr>
-        <p:txBody>
-          <a:bodyPr/>
-          <a:lstStyle/>
-          <a:p>
-            <a:endParaRPr lang="en-US"/>
-          </a:p>
-        </p:txBody>
-      </p:sp>
-      <p:sp>
-        <p:nvSpPr>
-          <p:cNvPr id="20" name="Shape 18"/>
-          <p:cNvSpPr/>
-          <p:nvPr/>
-        </p:nvSpPr>
-        <p:spPr>
-          <a:xfrm>
-            <a:off x="3758184" y="2980944"/>
-            <a:ext cx="73152" cy="73152"/>
-          </a:xfrm>
-          <a:prstGeom prst="ellipse">
-            <a:avLst/>
-          </a:prstGeom>
-          <a:solidFill>
-            <a:srgbClr val="777777"/>
-          </a:solidFill>
-          <a:ln w="12700">
-            <a:solidFill>
-              <a:srgbClr val="777777"/>
-            </a:solidFill>
-            <a:prstDash val="solid"/>
-          </a:ln>
-        </p:spPr>
-        <p:txBody>
-          <a:bodyPr/>
-          <a:lstStyle/>
-          <a:p>
-            <a:endParaRPr lang="en-US"/>
-          </a:p>
-        </p:txBody>
-      </p:sp>
-      <p:sp>
-        <p:nvSpPr>
-          <p:cNvPr id="21" name="Shape 19"/>
-          <p:cNvSpPr/>
-          <p:nvPr/>
-        </p:nvSpPr>
-        <p:spPr>
-          <a:xfrm>
-            <a:off x="4032504" y="3209544"/>
-            <a:ext cx="73152" cy="73152"/>
-          </a:xfrm>
-          <a:prstGeom prst="ellipse">
-            <a:avLst/>
-          </a:prstGeom>
-          <a:solidFill>
-            <a:srgbClr val="777777"/>
-          </a:solidFill>
-          <a:ln w="12700">
-            <a:solidFill>
-              <a:srgbClr val="777777"/>
-            </a:solidFill>
-            <a:prstDash val="solid"/>
-          </a:ln>
-        </p:spPr>
-        <p:txBody>
-          <a:bodyPr/>
-          <a:lstStyle/>
-          <a:p>
-            <a:endParaRPr lang="en-US"/>
-          </a:p>
-        </p:txBody>
-      </p:sp>
-      <p:sp>
-        <p:nvSpPr>
-          <p:cNvPr id="22" name="Shape 20"/>
-          <p:cNvSpPr/>
-          <p:nvPr/>
-        </p:nvSpPr>
-        <p:spPr>
-          <a:xfrm>
-            <a:off x="4306824" y="3392424"/>
-            <a:ext cx="73152" cy="73152"/>
-          </a:xfrm>
-          <a:prstGeom prst="ellipse">
-            <a:avLst/>
-          </a:prstGeom>
-          <a:solidFill>
-            <a:srgbClr val="777777"/>
-          </a:solidFill>
-          <a:ln w="12700">
-            <a:solidFill>
-              <a:srgbClr val="777777"/>
-            </a:solidFill>
-            <a:prstDash val="solid"/>
-          </a:ln>
-        </p:spPr>
-        <p:txBody>
-          <a:bodyPr/>
-          <a:lstStyle/>
-          <a:p>
-            <a:endParaRPr lang="en-US"/>
-          </a:p>
-        </p:txBody>
-      </p:sp>
-      <p:sp>
-        <p:nvSpPr>
-          <p:cNvPr id="23" name="Shape 21"/>
-          <p:cNvSpPr/>
-          <p:nvPr/>
-        </p:nvSpPr>
-        <p:spPr>
-          <a:xfrm>
-            <a:off x="3300984" y="3483864"/>
-            <a:ext cx="73152" cy="73152"/>
-          </a:xfrm>
-          <a:prstGeom prst="ellipse">
-            <a:avLst/>
-          </a:prstGeom>
-          <a:solidFill>
-            <a:srgbClr val="777777"/>
-          </a:solidFill>
-          <a:ln w="12700">
-            <a:solidFill>
-              <a:srgbClr val="777777"/>
-            </a:solidFill>
-            <a:prstDash val="solid"/>
-          </a:ln>
-        </p:spPr>
-        <p:txBody>
-          <a:bodyPr/>
-          <a:lstStyle/>
-          <a:p>
-            <a:endParaRPr lang="en-US"/>
-          </a:p>
-        </p:txBody>
-      </p:sp>
-      <p:sp>
-        <p:nvSpPr>
-          <p:cNvPr id="24" name="Shape 22"/>
-          <p:cNvSpPr/>
-          <p:nvPr/>
-        </p:nvSpPr>
-        <p:spPr>
-          <a:xfrm>
-            <a:off x="3575304" y="3392424"/>
-            <a:ext cx="73152" cy="73152"/>
-          </a:xfrm>
-          <a:prstGeom prst="ellipse">
-            <a:avLst/>
-          </a:prstGeom>
-          <a:solidFill>
-            <a:srgbClr val="777777"/>
-          </a:solidFill>
-          <a:ln w="12700">
-            <a:solidFill>
-              <a:srgbClr val="777777"/>
-            </a:solidFill>
-            <a:prstDash val="solid"/>
-          </a:ln>
-        </p:spPr>
-        <p:txBody>
-          <a:bodyPr/>
-          <a:lstStyle/>
-          <a:p>
-            <a:endParaRPr lang="en-US"/>
-          </a:p>
-        </p:txBody>
-      </p:sp>
-      <p:sp>
-        <p:nvSpPr>
-          <p:cNvPr id="25" name="Shape 23"/>
-          <p:cNvSpPr/>
-          <p:nvPr/>
-        </p:nvSpPr>
-        <p:spPr>
-          <a:xfrm>
-            <a:off x="3849624" y="3575304"/>
-            <a:ext cx="73152" cy="73152"/>
-          </a:xfrm>
-          <a:prstGeom prst="ellipse">
-            <a:avLst/>
-          </a:prstGeom>
-          <a:solidFill>
-            <a:srgbClr val="777777"/>
-          </a:solidFill>
-          <a:ln w="12700">
-            <a:solidFill>
-              <a:srgbClr val="777777"/>
-            </a:solidFill>
-            <a:prstDash val="solid"/>
-          </a:ln>
-        </p:spPr>
-        <p:txBody>
-          <a:bodyPr/>
-          <a:lstStyle/>
-          <a:p>
-            <a:endParaRPr lang="en-US"/>
-          </a:p>
-        </p:txBody>
-      </p:sp>
-      <p:sp>
-        <p:nvSpPr>
-          <p:cNvPr id="26" name="Shape 24"/>
-          <p:cNvSpPr/>
-          <p:nvPr/>
-        </p:nvSpPr>
-        <p:spPr>
-          <a:xfrm>
-            <a:off x="4123944" y="3712464"/>
-            <a:ext cx="73152" cy="73152"/>
-          </a:xfrm>
-          <a:prstGeom prst="ellipse">
-            <a:avLst/>
-          </a:prstGeom>
-          <a:solidFill>
-            <a:srgbClr val="777777"/>
-          </a:solidFill>
-          <a:ln w="12700">
-            <a:solidFill>
-              <a:srgbClr val="777777"/>
-            </a:solidFill>
-            <a:prstDash val="solid"/>
-          </a:ln>
-        </p:spPr>
-        <p:txBody>
-          <a:bodyPr/>
-          <a:lstStyle/>
-          <a:p>
-            <a:endParaRPr lang="en-US"/>
-          </a:p>
-        </p:txBody>
-      </p:sp>
-      <p:sp>
-        <p:nvSpPr>
-          <p:cNvPr id="27" name="Shape 25"/>
-          <p:cNvSpPr/>
-          <p:nvPr/>
-        </p:nvSpPr>
-        <p:spPr>
-          <a:xfrm>
-            <a:off x="3392424" y="3849624"/>
-            <a:ext cx="73152" cy="73152"/>
-          </a:xfrm>
-          <a:prstGeom prst="ellipse">
-            <a:avLst/>
-          </a:prstGeom>
-          <a:solidFill>
-            <a:srgbClr val="777777"/>
-          </a:solidFill>
-          <a:ln w="12700">
-            <a:solidFill>
-              <a:srgbClr val="777777"/>
-            </a:solidFill>
-            <a:prstDash val="solid"/>
-          </a:ln>
-        </p:spPr>
-        <p:txBody>
-          <a:bodyPr/>
-          <a:lstStyle/>
-          <a:p>
-            <a:endParaRPr lang="en-US"/>
-          </a:p>
-        </p:txBody>
-      </p:sp>
-      <p:sp>
-        <p:nvSpPr>
-          <p:cNvPr id="28" name="Shape 26"/>
-          <p:cNvSpPr/>
-          <p:nvPr/>
-        </p:nvSpPr>
-        <p:spPr>
-          <a:xfrm>
-            <a:off x="3666744" y="3941064"/>
-            <a:ext cx="73152" cy="73152"/>
-          </a:xfrm>
-          <a:prstGeom prst="ellipse">
-            <a:avLst/>
-          </a:prstGeom>
-          <a:solidFill>
-            <a:srgbClr val="777777"/>
-          </a:solidFill>
-          <a:ln w="12700">
-            <a:solidFill>
-              <a:srgbClr val="777777"/>
-            </a:solidFill>
-            <a:prstDash val="solid"/>
-          </a:ln>
-        </p:spPr>
-        <p:txBody>
-          <a:bodyPr/>
-          <a:lstStyle/>
-          <a:p>
-            <a:endParaRPr lang="en-US"/>
-          </a:p>
-        </p:txBody>
-      </p:sp>
-      <p:sp>
-        <p:nvSpPr>
-          <p:cNvPr id="29" name="Shape 27"/>
-          <p:cNvSpPr/>
-          <p:nvPr/>
-        </p:nvSpPr>
-        <p:spPr>
-          <a:xfrm>
-            <a:off x="3941064" y="4032504"/>
-            <a:ext cx="73152" cy="73152"/>
-          </a:xfrm>
-          <a:prstGeom prst="ellipse">
-            <a:avLst/>
-          </a:prstGeom>
-          <a:solidFill>
-            <a:srgbClr val="777777"/>
-          </a:solidFill>
-          <a:ln w="12700">
-            <a:solidFill>
-              <a:srgbClr val="777777"/>
-            </a:solidFill>
-            <a:prstDash val="solid"/>
-          </a:ln>
-        </p:spPr>
-        <p:txBody>
-          <a:bodyPr/>
-          <a:lstStyle/>
-          <a:p>
-            <a:endParaRPr lang="en-US"/>
-          </a:p>
-        </p:txBody>
-      </p:sp>
-      <p:sp>
-        <p:nvSpPr>
-          <p:cNvPr id="30" name="Shape 28"/>
-          <p:cNvSpPr/>
-          <p:nvPr/>
-        </p:nvSpPr>
-        <p:spPr>
-          <a:xfrm>
-            <a:off x="882396" y="4357116"/>
-            <a:ext cx="64008" cy="64008"/>
-          </a:xfrm>
-          <a:prstGeom prst="ellipse">
-            <a:avLst/>
-          </a:prstGeom>
-          <a:solidFill>
-            <a:srgbClr val="BBBBBB"/>
-          </a:solidFill>
-          <a:ln w="12700">
-            <a:solidFill>
-              <a:srgbClr val="BBBBBB"/>
-            </a:solidFill>
-            <a:prstDash val="solid"/>
-          </a:ln>
-        </p:spPr>
-        <p:txBody>
-          <a:bodyPr/>
-          <a:lstStyle/>
-          <a:p>
-            <a:endParaRPr lang="en-US"/>
-          </a:p>
-        </p:txBody>
-      </p:sp>
-      <p:sp>
-        <p:nvSpPr>
-          <p:cNvPr id="31" name="Shape 29"/>
-          <p:cNvSpPr/>
-          <p:nvPr/>
-        </p:nvSpPr>
-        <p:spPr>
-          <a:xfrm>
-            <a:off x="2528316" y="1339596"/>
-            <a:ext cx="64008" cy="64008"/>
-          </a:xfrm>
-          <a:prstGeom prst="ellipse">
-            <a:avLst/>
-          </a:prstGeom>
-          <a:solidFill>
-            <a:srgbClr val="BBBBBB"/>
-          </a:solidFill>
-          <a:ln w="12700">
-            <a:solidFill>
-              <a:srgbClr val="BBBBBB"/>
-            </a:solidFill>
-            <a:prstDash val="solid"/>
-          </a:ln>
-        </p:spPr>
-        <p:txBody>
-          <a:bodyPr/>
-          <a:lstStyle/>
-          <a:p>
-            <a:endParaRPr lang="en-US"/>
-          </a:p>
-        </p:txBody>
-      </p:sp>
-      <p:sp>
-        <p:nvSpPr>
-          <p:cNvPr id="32" name="Shape 30"/>
-          <p:cNvSpPr/>
-          <p:nvPr/>
-        </p:nvSpPr>
-        <p:spPr>
-          <a:xfrm>
-            <a:off x="4631436" y="4448556"/>
-            <a:ext cx="64008" cy="64008"/>
-          </a:xfrm>
-          <a:prstGeom prst="ellipse">
-            <a:avLst/>
-          </a:prstGeom>
-          <a:solidFill>
-            <a:srgbClr val="BBBBBB"/>
-          </a:solidFill>
-          <a:ln w="12700">
-            <a:solidFill>
-              <a:srgbClr val="BBBBBB"/>
-            </a:solidFill>
-            <a:prstDash val="solid"/>
-          </a:ln>
-        </p:spPr>
-        <p:txBody>
-          <a:bodyPr/>
-          <a:lstStyle/>
-          <a:p>
-            <a:endParaRPr lang="en-US"/>
-          </a:p>
-        </p:txBody>
-      </p:sp>
-      <p:sp>
-        <p:nvSpPr>
-          <p:cNvPr id="33" name="Shape 31"/>
-          <p:cNvSpPr/>
-          <p:nvPr/>
-        </p:nvSpPr>
-        <p:spPr>
-          <a:xfrm>
-            <a:off x="4448556" y="1888236"/>
-            <a:ext cx="64008" cy="64008"/>
-          </a:xfrm>
-          <a:prstGeom prst="ellipse">
-            <a:avLst/>
-          </a:prstGeom>
-          <a:solidFill>
-            <a:srgbClr val="BBBBBB"/>
-          </a:solidFill>
-          <a:ln w="12700">
-            <a:solidFill>
-              <a:srgbClr val="BBBBBB"/>
-            </a:solidFill>
-            <a:prstDash val="solid"/>
-          </a:ln>
-        </p:spPr>
-        <p:txBody>
-          <a:bodyPr/>
-          <a:lstStyle/>
-          <a:p>
-            <a:endParaRPr lang="en-US"/>
-          </a:p>
-        </p:txBody>
-      </p:sp>
-      <p:sp>
-        <p:nvSpPr>
-          <p:cNvPr id="34" name="Shape 32"/>
-          <p:cNvSpPr/>
-          <p:nvPr/>
-        </p:nvSpPr>
-        <p:spPr>
-          <a:xfrm>
-            <a:off x="1019556" y="1385316"/>
-            <a:ext cx="64008" cy="64008"/>
-          </a:xfrm>
-          <a:prstGeom prst="ellipse">
-            <a:avLst/>
-          </a:prstGeom>
-          <a:solidFill>
-            <a:srgbClr val="BBBBBB"/>
-          </a:solidFill>
-          <a:ln w="12700">
-            <a:solidFill>
-              <a:srgbClr val="BBBBBB"/>
-            </a:solidFill>
-            <a:prstDash val="solid"/>
-          </a:ln>
-        </p:spPr>
-        <p:txBody>
-          <a:bodyPr/>
-          <a:lstStyle/>
-          <a:p>
-            <a:endParaRPr lang="en-US"/>
+            <a:endParaRPr lang="en-US" sz="1200" dirty="0"/>
           </a:p>
         </p:txBody>
       </p:sp>
@@ -18351,14 +14554,14 @@
               <a:buNone/>
             </a:pPr>
             <a:r>
-              <a:rPr lang="en-US" sz="820" dirty="0">
+              <a:rPr lang="en-US" sz="1200" dirty="0">
                 <a:solidFill>
                   <a:srgbClr val="111111"/>
                 </a:solidFill>
               </a:rPr>
               <a:t>Finds irregularly shaped clusters and identifies noise or outliers.</a:t>
             </a:r>
-            <a:endParaRPr lang="en-US" sz="820" dirty="0"/>
+            <a:endParaRPr lang="en-US" sz="1200" dirty="0"/>
           </a:p>
         </p:txBody>
       </p:sp>
@@ -18461,14 +14664,14 @@
               <a:buNone/>
             </a:pPr>
             <a:r>
-              <a:rPr lang="en-US" sz="820" dirty="0">
+              <a:rPr lang="en-US" sz="1200" dirty="0">
                 <a:solidFill>
                   <a:srgbClr val="111111"/>
                 </a:solidFill>
               </a:rPr>
               <a:t>eps controls neighborhood size; min_samples controls density requirement.</a:t>
             </a:r>
-            <a:endParaRPr lang="en-US" sz="820" dirty="0"/>
+            <a:endParaRPr lang="en-US" sz="1200" dirty="0"/>
           </a:p>
         </p:txBody>
       </p:sp>
@@ -18571,14 +14774,14 @@
               <a:buNone/>
             </a:pPr>
             <a:r>
-              <a:rPr lang="en-US" sz="820" dirty="0">
+              <a:rPr lang="en-US" sz="1200" dirty="0">
                 <a:solidFill>
                   <a:srgbClr val="111111"/>
                 </a:solidFill>
               </a:rPr>
               <a:t>Clusters differ from noise by density and the scale of distance is meaningful.</a:t>
             </a:r>
-            <a:endParaRPr lang="en-US" sz="820" dirty="0"/>
+            <a:endParaRPr lang="en-US" sz="1200" dirty="0"/>
           </a:p>
         </p:txBody>
       </p:sp>
@@ -18681,14 +14884,14 @@
               <a:buNone/>
             </a:pPr>
             <a:r>
-              <a:rPr lang="en-US" sz="820" dirty="0">
+              <a:rPr lang="en-US" sz="1200" dirty="0">
                 <a:solidFill>
                   <a:srgbClr val="111111"/>
                 </a:solidFill>
               </a:rPr>
               <a:t>Can struggle when clusters have very different densities.</a:t>
             </a:r>
-            <a:endParaRPr lang="en-US" sz="820" dirty="0"/>
+            <a:endParaRPr lang="en-US" sz="1200" dirty="0"/>
           </a:p>
         </p:txBody>
       </p:sp>
@@ -18745,7 +14948,7 @@
         </p:spPr>
         <p:txBody>
           <a:bodyPr wrap="square" lIns="0" tIns="0" rIns="0" bIns="0" rtlCol="0" anchor="ctr">
-            <a:normAutofit/>
+            <a:noAutofit/>
           </a:bodyPr>
           <a:lstStyle/>
           <a:p>
@@ -18753,17 +14956,53 @@
               <a:buNone/>
             </a:pPr>
             <a:r>
-              <a:rPr lang="en-US" sz="820" b="1" dirty="0">
+              <a:rPr lang="en-US" sz="1200" b="1" dirty="0">
                 <a:solidFill>
                   <a:srgbClr val="CC0000"/>
                 </a:solidFill>
               </a:rPr>
               <a:t>DBSCAN is useful when “unusual” observations matter as much as group membership.</a:t>
             </a:r>
-            <a:endParaRPr lang="en-US" sz="820" dirty="0"/>
-          </a:p>
-        </p:txBody>
-      </p:sp>
+            <a:endParaRPr lang="en-US" sz="1200" dirty="0"/>
+          </a:p>
+        </p:txBody>
+      </p:sp>
+      <p:pic>
+        <p:nvPicPr>
+          <p:cNvPr id="50" name="Picture 49" descr="A screenshot of a video game&#10;&#10;Description automatically generated">
+            <a:extLst>
+              <a:ext uri="{FF2B5EF4-FFF2-40B4-BE49-F238E27FC236}">
+                <a16:creationId xmlns:a16="http://schemas.microsoft.com/office/drawing/2014/main" id="{54ADCD77-62E6-ED51-65AF-F91C566DA387}"/>
+              </a:ext>
+            </a:extLst>
+          </p:cNvPr>
+          <p:cNvPicPr>
+            <a:picLocks noChangeAspect="1"/>
+          </p:cNvPicPr>
+          <p:nvPr/>
+        </p:nvPicPr>
+        <p:blipFill>
+          <a:blip r:embed="rId3">
+            <a:extLst>
+              <a:ext uri="{28A0092B-C50C-407E-A947-70E740481C1C}">
+                <a14:useLocalDpi xmlns:a14="http://schemas.microsoft.com/office/drawing/2010/main" val="0"/>
+              </a:ext>
+            </a:extLst>
+          </a:blip>
+          <a:stretch>
+            <a:fillRect/>
+          </a:stretch>
+        </p:blipFill>
+        <p:spPr>
+          <a:xfrm>
+            <a:off x="265014" y="1590802"/>
+            <a:ext cx="5212242" cy="3274060"/>
+          </a:xfrm>
+          <a:prstGeom prst="rect">
+            <a:avLst/>
+          </a:prstGeom>
+        </p:spPr>
+      </p:pic>
     </p:spTree>
   </p:cSld>
   <p:clrMapOvr>
